--- a/media/module1/slides.pptx
+++ b/media/module1/slides.pptx
@@ -37,6 +37,26 @@
     <p:sldId id="285" r:id="rId37"/>
     <p:sldId id="286" r:id="rId38"/>
     <p:sldId id="287" r:id="rId39"/>
+    <p:sldId id="288" r:id="rId40"/>
+    <p:sldId id="289" r:id="rId41"/>
+    <p:sldId id="290" r:id="rId42"/>
+    <p:sldId id="291" r:id="rId43"/>
+    <p:sldId id="292" r:id="rId44"/>
+    <p:sldId id="293" r:id="rId45"/>
+    <p:sldId id="294" r:id="rId46"/>
+    <p:sldId id="295" r:id="rId47"/>
+    <p:sldId id="296" r:id="rId48"/>
+    <p:sldId id="297" r:id="rId49"/>
+    <p:sldId id="298" r:id="rId50"/>
+    <p:sldId id="299" r:id="rId51"/>
+    <p:sldId id="300" r:id="rId52"/>
+    <p:sldId id="301" r:id="rId53"/>
+    <p:sldId id="302" r:id="rId54"/>
+    <p:sldId id="303" r:id="rId55"/>
+    <p:sldId id="304" r:id="rId56"/>
+    <p:sldId id="305" r:id="rId57"/>
+    <p:sldId id="306" r:id="rId58"/>
+    <p:sldId id="307" r:id="rId59"/>
   </p:sldIdLst>
   <p:sldSz cx="12191695" cy="6858000" type="screen4x3"/>
   <p:notesSz cx="6858000" cy="9144000"/>
@@ -533,7 +553,7 @@
           <a:lstStyle/>
           <a:p>
             <a:r>
-              <a:t>From MODULE1 Topics Covered.</a:t>
+              <a:t>From docs/MODULE1.md — read guides before running demos.</a:t>
             </a:r>
           </a:p>
         </p:txBody>
@@ -743,7 +763,7 @@
           <a:lstStyle/>
           <a:p>
             <a:r>
-              <a:t>Requires iverilog on PATH (apt install iverilog).</a:t>
+              <a:t>From MODULE1 Topics Covered.</a:t>
             </a:r>
           </a:p>
         </p:txBody>
@@ -813,7 +833,7 @@
           <a:lstStyle/>
           <a:p>
             <a:r>
-              <a:t>Hands-on: module1/examples/modules_ports/</a:t>
+              <a:t>From MODULE1 Topics Covered.</a:t>
             </a:r>
           </a:p>
         </p:txBody>
@@ -883,7 +903,7 @@
           <a:lstStyle/>
           <a:p>
             <a:r>
-              <a:t>Hands-on: module1/examples/nets_variables/</a:t>
+              <a:t>Requires iverilog on PATH (apt install iverilog).</a:t>
             </a:r>
           </a:p>
         </p:txBody>
@@ -953,7 +973,7 @@
           <a:lstStyle/>
           <a:p>
             <a:r>
-              <a:t>Hands-on: module1/examples/continuous_assign/</a:t>
+              <a:t>module1/examples/modules_ports/README.md</a:t>
             </a:r>
           </a:p>
         </p:txBody>
@@ -1023,7 +1043,7 @@
           <a:lstStyle/>
           <a:p>
             <a:r>
-              <a:t>Hands-on: module1/examples/continuous_assign_gates/</a:t>
+              <a:t>Hands-on: module1/examples/modules_ports/</a:t>
             </a:r>
           </a:p>
         </p:txBody>
@@ -1093,7 +1113,7 @@
           <a:lstStyle/>
           <a:p>
             <a:r>
-              <a:t>Hands-on: module1/examples/adder/</a:t>
+              <a:t>module1/examples/nets_variables/README.md</a:t>
             </a:r>
           </a:p>
         </p:txBody>
@@ -1163,7 +1183,7 @@
           <a:lstStyle/>
           <a:p>
             <a:r>
-              <a:t>Hands-on: module1/examples/procedural/</a:t>
+              <a:t>Hands-on: module1/examples/nets_variables/</a:t>
             </a:r>
           </a:p>
         </p:txBody>
@@ -1233,7 +1253,7 @@
           <a:lstStyle/>
           <a:p>
             <a:r>
-              <a:t>Hands-on: module1/examples/sequential_dff/</a:t>
+              <a:t>module1/examples/continuous_assign/README.md</a:t>
             </a:r>
           </a:p>
         </p:txBody>
@@ -1303,7 +1323,7 @@
           <a:lstStyle/>
           <a:p>
             <a:r>
-              <a:t>From MODULE1 Topics Covered.</a:t>
+              <a:t>From docs/MODULE1.md — read guides before running demos.</a:t>
             </a:r>
           </a:p>
         </p:txBody>
@@ -1373,7 +1393,7 @@
           <a:lstStyle/>
           <a:p>
             <a:r>
-              <a:t>Hands-on: module1/examples/delays_timing/</a:t>
+              <a:t>Hands-on: module1/examples/continuous_assign/</a:t>
             </a:r>
           </a:p>
         </p:txBody>
@@ -1443,7 +1463,567 @@
           <a:lstStyle/>
           <a:p>
             <a:r>
-              <a:t>Hands-on: module1/examples/testbenches/</a:t>
+              <a:t>module1/examples/continuous_assign_gates/README.md</a:t>
+            </a:r>
+          </a:p>
+        </p:txBody>
+      </p:sp>
+      <p:sp>
+        <p:nvSpPr>
+          <p:cNvPr id="4" name="Slide Number Placeholder 3"/>
+          <p:cNvSpPr>
+            <a:spLocks noGrp="1"/>
+          </p:cNvSpPr>
+          <p:nvPr>
+            <p:ph type="sldNum" idx="5" sz="quarter"/>
+          </p:nvPr>
+        </p:nvSpPr>
+        <p:spPr/>
+      </p:sp>
+    </p:spTree>
+  </p:cSld>
+  <p:clrMapOvr>
+    <a:masterClrMapping/>
+  </p:clrMapOvr>
+</p:notes>
+</file>
+
+<file path=ppt/notesSlides/notesSlide22.xml><?xml version="1.0" encoding="utf-8"?>
+<p:notes xmlns:a="http://schemas.openxmlformats.org/drawingml/2006/main" xmlns:p="http://schemas.openxmlformats.org/presentationml/2006/main" xmlns:r="http://schemas.openxmlformats.org/officeDocument/2006/relationships">
+  <p:cSld>
+    <p:spTree>
+      <p:nvGrpSpPr>
+        <p:cNvPr id="1" name=""/>
+        <p:cNvGrpSpPr/>
+        <p:nvPr/>
+      </p:nvGrpSpPr>
+      <p:grpSpPr>
+        <a:xfrm>
+          <a:off x="0" y="0"/>
+          <a:ext cx="0" cy="0"/>
+          <a:chOff x="0" y="0"/>
+          <a:chExt cx="0" cy="0"/>
+        </a:xfrm>
+      </p:grpSpPr>
+      <p:sp>
+        <p:nvSpPr>
+          <p:cNvPr id="2" name="Slide Image Placeholder 1"/>
+          <p:cNvSpPr>
+            <a:spLocks noGrp="1"/>
+          </p:cNvSpPr>
+          <p:nvPr>
+            <p:ph type="sldImg" idx="2"/>
+          </p:nvPr>
+        </p:nvSpPr>
+        <p:spPr/>
+      </p:sp>
+      <p:sp>
+        <p:nvSpPr>
+          <p:cNvPr id="3" name="Notes Placeholder 2"/>
+          <p:cNvSpPr>
+            <a:spLocks noGrp="1"/>
+          </p:cNvSpPr>
+          <p:nvPr>
+            <p:ph type="body" idx="3" sz="quarter"/>
+          </p:nvPr>
+        </p:nvSpPr>
+        <p:spPr/>
+        <p:txBody>
+          <a:bodyPr/>
+          <a:lstStyle/>
+          <a:p>
+            <a:r>
+              <a:t>Hands-on: module1/examples/continuous_assign_gates/</a:t>
+            </a:r>
+          </a:p>
+        </p:txBody>
+      </p:sp>
+      <p:sp>
+        <p:nvSpPr>
+          <p:cNvPr id="4" name="Slide Number Placeholder 3"/>
+          <p:cNvSpPr>
+            <a:spLocks noGrp="1"/>
+          </p:cNvSpPr>
+          <p:nvPr>
+            <p:ph type="sldNum" idx="5" sz="quarter"/>
+          </p:nvPr>
+        </p:nvSpPr>
+        <p:spPr/>
+      </p:sp>
+    </p:spTree>
+  </p:cSld>
+  <p:clrMapOvr>
+    <a:masterClrMapping/>
+  </p:clrMapOvr>
+</p:notes>
+</file>
+
+<file path=ppt/notesSlides/notesSlide23.xml><?xml version="1.0" encoding="utf-8"?>
+<p:notes xmlns:a="http://schemas.openxmlformats.org/drawingml/2006/main" xmlns:p="http://schemas.openxmlformats.org/presentationml/2006/main" xmlns:r="http://schemas.openxmlformats.org/officeDocument/2006/relationships">
+  <p:cSld>
+    <p:spTree>
+      <p:nvGrpSpPr>
+        <p:cNvPr id="1" name=""/>
+        <p:cNvGrpSpPr/>
+        <p:nvPr/>
+      </p:nvGrpSpPr>
+      <p:grpSpPr>
+        <a:xfrm>
+          <a:off x="0" y="0"/>
+          <a:ext cx="0" cy="0"/>
+          <a:chOff x="0" y="0"/>
+          <a:chExt cx="0" cy="0"/>
+        </a:xfrm>
+      </p:grpSpPr>
+      <p:sp>
+        <p:nvSpPr>
+          <p:cNvPr id="2" name="Slide Image Placeholder 1"/>
+          <p:cNvSpPr>
+            <a:spLocks noGrp="1"/>
+          </p:cNvSpPr>
+          <p:nvPr>
+            <p:ph type="sldImg" idx="2"/>
+          </p:nvPr>
+        </p:nvSpPr>
+        <p:spPr/>
+      </p:sp>
+      <p:sp>
+        <p:nvSpPr>
+          <p:cNvPr id="3" name="Notes Placeholder 2"/>
+          <p:cNvSpPr>
+            <a:spLocks noGrp="1"/>
+          </p:cNvSpPr>
+          <p:nvPr>
+            <p:ph type="body" idx="3" sz="quarter"/>
+          </p:nvPr>
+        </p:nvSpPr>
+        <p:spPr/>
+        <p:txBody>
+          <a:bodyPr/>
+          <a:lstStyle/>
+          <a:p>
+            <a:r>
+              <a:t>module1/examples/adder/README.md</a:t>
+            </a:r>
+          </a:p>
+        </p:txBody>
+      </p:sp>
+      <p:sp>
+        <p:nvSpPr>
+          <p:cNvPr id="4" name="Slide Number Placeholder 3"/>
+          <p:cNvSpPr>
+            <a:spLocks noGrp="1"/>
+          </p:cNvSpPr>
+          <p:nvPr>
+            <p:ph type="sldNum" idx="5" sz="quarter"/>
+          </p:nvPr>
+        </p:nvSpPr>
+        <p:spPr/>
+      </p:sp>
+    </p:spTree>
+  </p:cSld>
+  <p:clrMapOvr>
+    <a:masterClrMapping/>
+  </p:clrMapOvr>
+</p:notes>
+</file>
+
+<file path=ppt/notesSlides/notesSlide24.xml><?xml version="1.0" encoding="utf-8"?>
+<p:notes xmlns:a="http://schemas.openxmlformats.org/drawingml/2006/main" xmlns:p="http://schemas.openxmlformats.org/presentationml/2006/main" xmlns:r="http://schemas.openxmlformats.org/officeDocument/2006/relationships">
+  <p:cSld>
+    <p:spTree>
+      <p:nvGrpSpPr>
+        <p:cNvPr id="1" name=""/>
+        <p:cNvGrpSpPr/>
+        <p:nvPr/>
+      </p:nvGrpSpPr>
+      <p:grpSpPr>
+        <a:xfrm>
+          <a:off x="0" y="0"/>
+          <a:ext cx="0" cy="0"/>
+          <a:chOff x="0" y="0"/>
+          <a:chExt cx="0" cy="0"/>
+        </a:xfrm>
+      </p:grpSpPr>
+      <p:sp>
+        <p:nvSpPr>
+          <p:cNvPr id="2" name="Slide Image Placeholder 1"/>
+          <p:cNvSpPr>
+            <a:spLocks noGrp="1"/>
+          </p:cNvSpPr>
+          <p:nvPr>
+            <p:ph type="sldImg" idx="2"/>
+          </p:nvPr>
+        </p:nvSpPr>
+        <p:spPr/>
+      </p:sp>
+      <p:sp>
+        <p:nvSpPr>
+          <p:cNvPr id="3" name="Notes Placeholder 2"/>
+          <p:cNvSpPr>
+            <a:spLocks noGrp="1"/>
+          </p:cNvSpPr>
+          <p:nvPr>
+            <p:ph type="body" idx="3" sz="quarter"/>
+          </p:nvPr>
+        </p:nvSpPr>
+        <p:spPr/>
+        <p:txBody>
+          <a:bodyPr/>
+          <a:lstStyle/>
+          <a:p>
+            <a:r>
+              <a:t>Hands-on: module1/examples/adder/</a:t>
+            </a:r>
+          </a:p>
+        </p:txBody>
+      </p:sp>
+      <p:sp>
+        <p:nvSpPr>
+          <p:cNvPr id="4" name="Slide Number Placeholder 3"/>
+          <p:cNvSpPr>
+            <a:spLocks noGrp="1"/>
+          </p:cNvSpPr>
+          <p:nvPr>
+            <p:ph type="sldNum" idx="5" sz="quarter"/>
+          </p:nvPr>
+        </p:nvSpPr>
+        <p:spPr/>
+      </p:sp>
+    </p:spTree>
+  </p:cSld>
+  <p:clrMapOvr>
+    <a:masterClrMapping/>
+  </p:clrMapOvr>
+</p:notes>
+</file>
+
+<file path=ppt/notesSlides/notesSlide25.xml><?xml version="1.0" encoding="utf-8"?>
+<p:notes xmlns:a="http://schemas.openxmlformats.org/drawingml/2006/main" xmlns:p="http://schemas.openxmlformats.org/presentationml/2006/main" xmlns:r="http://schemas.openxmlformats.org/officeDocument/2006/relationships">
+  <p:cSld>
+    <p:spTree>
+      <p:nvGrpSpPr>
+        <p:cNvPr id="1" name=""/>
+        <p:cNvGrpSpPr/>
+        <p:nvPr/>
+      </p:nvGrpSpPr>
+      <p:grpSpPr>
+        <a:xfrm>
+          <a:off x="0" y="0"/>
+          <a:ext cx="0" cy="0"/>
+          <a:chOff x="0" y="0"/>
+          <a:chExt cx="0" cy="0"/>
+        </a:xfrm>
+      </p:grpSpPr>
+      <p:sp>
+        <p:nvSpPr>
+          <p:cNvPr id="2" name="Slide Image Placeholder 1"/>
+          <p:cNvSpPr>
+            <a:spLocks noGrp="1"/>
+          </p:cNvSpPr>
+          <p:nvPr>
+            <p:ph type="sldImg" idx="2"/>
+          </p:nvPr>
+        </p:nvSpPr>
+        <p:spPr/>
+      </p:sp>
+      <p:sp>
+        <p:nvSpPr>
+          <p:cNvPr id="3" name="Notes Placeholder 2"/>
+          <p:cNvSpPr>
+            <a:spLocks noGrp="1"/>
+          </p:cNvSpPr>
+          <p:nvPr>
+            <p:ph type="body" idx="3" sz="quarter"/>
+          </p:nvPr>
+        </p:nvSpPr>
+        <p:spPr/>
+        <p:txBody>
+          <a:bodyPr/>
+          <a:lstStyle/>
+          <a:p>
+            <a:r>
+              <a:t>module1/examples/procedural/README.md</a:t>
+            </a:r>
+          </a:p>
+        </p:txBody>
+      </p:sp>
+      <p:sp>
+        <p:nvSpPr>
+          <p:cNvPr id="4" name="Slide Number Placeholder 3"/>
+          <p:cNvSpPr>
+            <a:spLocks noGrp="1"/>
+          </p:cNvSpPr>
+          <p:nvPr>
+            <p:ph type="sldNum" idx="5" sz="quarter"/>
+          </p:nvPr>
+        </p:nvSpPr>
+        <p:spPr/>
+      </p:sp>
+    </p:spTree>
+  </p:cSld>
+  <p:clrMapOvr>
+    <a:masterClrMapping/>
+  </p:clrMapOvr>
+</p:notes>
+</file>
+
+<file path=ppt/notesSlides/notesSlide26.xml><?xml version="1.0" encoding="utf-8"?>
+<p:notes xmlns:a="http://schemas.openxmlformats.org/drawingml/2006/main" xmlns:p="http://schemas.openxmlformats.org/presentationml/2006/main" xmlns:r="http://schemas.openxmlformats.org/officeDocument/2006/relationships">
+  <p:cSld>
+    <p:spTree>
+      <p:nvGrpSpPr>
+        <p:cNvPr id="1" name=""/>
+        <p:cNvGrpSpPr/>
+        <p:nvPr/>
+      </p:nvGrpSpPr>
+      <p:grpSpPr>
+        <a:xfrm>
+          <a:off x="0" y="0"/>
+          <a:ext cx="0" cy="0"/>
+          <a:chOff x="0" y="0"/>
+          <a:chExt cx="0" cy="0"/>
+        </a:xfrm>
+      </p:grpSpPr>
+      <p:sp>
+        <p:nvSpPr>
+          <p:cNvPr id="2" name="Slide Image Placeholder 1"/>
+          <p:cNvSpPr>
+            <a:spLocks noGrp="1"/>
+          </p:cNvSpPr>
+          <p:nvPr>
+            <p:ph type="sldImg" idx="2"/>
+          </p:nvPr>
+        </p:nvSpPr>
+        <p:spPr/>
+      </p:sp>
+      <p:sp>
+        <p:nvSpPr>
+          <p:cNvPr id="3" name="Notes Placeholder 2"/>
+          <p:cNvSpPr>
+            <a:spLocks noGrp="1"/>
+          </p:cNvSpPr>
+          <p:nvPr>
+            <p:ph type="body" idx="3" sz="quarter"/>
+          </p:nvPr>
+        </p:nvSpPr>
+        <p:spPr/>
+        <p:txBody>
+          <a:bodyPr/>
+          <a:lstStyle/>
+          <a:p>
+            <a:r>
+              <a:t>Hands-on: module1/examples/procedural/</a:t>
+            </a:r>
+          </a:p>
+        </p:txBody>
+      </p:sp>
+      <p:sp>
+        <p:nvSpPr>
+          <p:cNvPr id="4" name="Slide Number Placeholder 3"/>
+          <p:cNvSpPr>
+            <a:spLocks noGrp="1"/>
+          </p:cNvSpPr>
+          <p:nvPr>
+            <p:ph type="sldNum" idx="5" sz="quarter"/>
+          </p:nvPr>
+        </p:nvSpPr>
+        <p:spPr/>
+      </p:sp>
+    </p:spTree>
+  </p:cSld>
+  <p:clrMapOvr>
+    <a:masterClrMapping/>
+  </p:clrMapOvr>
+</p:notes>
+</file>
+
+<file path=ppt/notesSlides/notesSlide27.xml><?xml version="1.0" encoding="utf-8"?>
+<p:notes xmlns:a="http://schemas.openxmlformats.org/drawingml/2006/main" xmlns:p="http://schemas.openxmlformats.org/presentationml/2006/main" xmlns:r="http://schemas.openxmlformats.org/officeDocument/2006/relationships">
+  <p:cSld>
+    <p:spTree>
+      <p:nvGrpSpPr>
+        <p:cNvPr id="1" name=""/>
+        <p:cNvGrpSpPr/>
+        <p:nvPr/>
+      </p:nvGrpSpPr>
+      <p:grpSpPr>
+        <a:xfrm>
+          <a:off x="0" y="0"/>
+          <a:ext cx="0" cy="0"/>
+          <a:chOff x="0" y="0"/>
+          <a:chExt cx="0" cy="0"/>
+        </a:xfrm>
+      </p:grpSpPr>
+      <p:sp>
+        <p:nvSpPr>
+          <p:cNvPr id="2" name="Slide Image Placeholder 1"/>
+          <p:cNvSpPr>
+            <a:spLocks noGrp="1"/>
+          </p:cNvSpPr>
+          <p:nvPr>
+            <p:ph type="sldImg" idx="2"/>
+          </p:nvPr>
+        </p:nvSpPr>
+        <p:spPr/>
+      </p:sp>
+      <p:sp>
+        <p:nvSpPr>
+          <p:cNvPr id="3" name="Notes Placeholder 2"/>
+          <p:cNvSpPr>
+            <a:spLocks noGrp="1"/>
+          </p:cNvSpPr>
+          <p:nvPr>
+            <p:ph type="body" idx="3" sz="quarter"/>
+          </p:nvPr>
+        </p:nvSpPr>
+        <p:spPr/>
+        <p:txBody>
+          <a:bodyPr/>
+          <a:lstStyle/>
+          <a:p>
+            <a:r>
+              <a:t>module1/examples/sequential_dff/README.md</a:t>
+            </a:r>
+          </a:p>
+        </p:txBody>
+      </p:sp>
+      <p:sp>
+        <p:nvSpPr>
+          <p:cNvPr id="4" name="Slide Number Placeholder 3"/>
+          <p:cNvSpPr>
+            <a:spLocks noGrp="1"/>
+          </p:cNvSpPr>
+          <p:nvPr>
+            <p:ph type="sldNum" idx="5" sz="quarter"/>
+          </p:nvPr>
+        </p:nvSpPr>
+        <p:spPr/>
+      </p:sp>
+    </p:spTree>
+  </p:cSld>
+  <p:clrMapOvr>
+    <a:masterClrMapping/>
+  </p:clrMapOvr>
+</p:notes>
+</file>
+
+<file path=ppt/notesSlides/notesSlide28.xml><?xml version="1.0" encoding="utf-8"?>
+<p:notes xmlns:a="http://schemas.openxmlformats.org/drawingml/2006/main" xmlns:p="http://schemas.openxmlformats.org/presentationml/2006/main" xmlns:r="http://schemas.openxmlformats.org/officeDocument/2006/relationships">
+  <p:cSld>
+    <p:spTree>
+      <p:nvGrpSpPr>
+        <p:cNvPr id="1" name=""/>
+        <p:cNvGrpSpPr/>
+        <p:nvPr/>
+      </p:nvGrpSpPr>
+      <p:grpSpPr>
+        <a:xfrm>
+          <a:off x="0" y="0"/>
+          <a:ext cx="0" cy="0"/>
+          <a:chOff x="0" y="0"/>
+          <a:chExt cx="0" cy="0"/>
+        </a:xfrm>
+      </p:grpSpPr>
+      <p:sp>
+        <p:nvSpPr>
+          <p:cNvPr id="2" name="Slide Image Placeholder 1"/>
+          <p:cNvSpPr>
+            <a:spLocks noGrp="1"/>
+          </p:cNvSpPr>
+          <p:nvPr>
+            <p:ph type="sldImg" idx="2"/>
+          </p:nvPr>
+        </p:nvSpPr>
+        <p:spPr/>
+      </p:sp>
+      <p:sp>
+        <p:nvSpPr>
+          <p:cNvPr id="3" name="Notes Placeholder 2"/>
+          <p:cNvSpPr>
+            <a:spLocks noGrp="1"/>
+          </p:cNvSpPr>
+          <p:nvPr>
+            <p:ph type="body" idx="3" sz="quarter"/>
+          </p:nvPr>
+        </p:nvSpPr>
+        <p:spPr/>
+        <p:txBody>
+          <a:bodyPr/>
+          <a:lstStyle/>
+          <a:p>
+            <a:r>
+              <a:t>Hands-on: module1/examples/sequential_dff/</a:t>
+            </a:r>
+          </a:p>
+        </p:txBody>
+      </p:sp>
+      <p:sp>
+        <p:nvSpPr>
+          <p:cNvPr id="4" name="Slide Number Placeholder 3"/>
+          <p:cNvSpPr>
+            <a:spLocks noGrp="1"/>
+          </p:cNvSpPr>
+          <p:nvPr>
+            <p:ph type="sldNum" idx="5" sz="quarter"/>
+          </p:nvPr>
+        </p:nvSpPr>
+        <p:spPr/>
+      </p:sp>
+    </p:spTree>
+  </p:cSld>
+  <p:clrMapOvr>
+    <a:masterClrMapping/>
+  </p:clrMapOvr>
+</p:notes>
+</file>
+
+<file path=ppt/notesSlides/notesSlide29.xml><?xml version="1.0" encoding="utf-8"?>
+<p:notes xmlns:a="http://schemas.openxmlformats.org/drawingml/2006/main" xmlns:p="http://schemas.openxmlformats.org/presentationml/2006/main" xmlns:r="http://schemas.openxmlformats.org/officeDocument/2006/relationships">
+  <p:cSld>
+    <p:spTree>
+      <p:nvGrpSpPr>
+        <p:cNvPr id="1" name=""/>
+        <p:cNvGrpSpPr/>
+        <p:nvPr/>
+      </p:nvGrpSpPr>
+      <p:grpSpPr>
+        <a:xfrm>
+          <a:off x="0" y="0"/>
+          <a:ext cx="0" cy="0"/>
+          <a:chOff x="0" y="0"/>
+          <a:chExt cx="0" cy="0"/>
+        </a:xfrm>
+      </p:grpSpPr>
+      <p:sp>
+        <p:nvSpPr>
+          <p:cNvPr id="2" name="Slide Image Placeholder 1"/>
+          <p:cNvSpPr>
+            <a:spLocks noGrp="1"/>
+          </p:cNvSpPr>
+          <p:nvPr>
+            <p:ph type="sldImg" idx="2"/>
+          </p:nvPr>
+        </p:nvSpPr>
+        <p:spPr/>
+      </p:sp>
+      <p:sp>
+        <p:nvSpPr>
+          <p:cNvPr id="3" name="Notes Placeholder 2"/>
+          <p:cNvSpPr>
+            <a:spLocks noGrp="1"/>
+          </p:cNvSpPr>
+          <p:nvPr>
+            <p:ph type="body" idx="3" sz="quarter"/>
+          </p:nvPr>
+        </p:nvSpPr>
+        <p:spPr/>
+        <p:txBody>
+          <a:bodyPr/>
+          <a:lstStyle/>
+          <a:p>
+            <a:r>
+              <a:t>module1/examples/delays_timing/README.md</a:t>
             </a:r>
           </a:p>
         </p:txBody>
@@ -1514,6 +2094,706 @@
           <a:p>
             <a:r>
               <a:t>From MODULE1 Topics Covered.</a:t>
+            </a:r>
+          </a:p>
+        </p:txBody>
+      </p:sp>
+      <p:sp>
+        <p:nvSpPr>
+          <p:cNvPr id="4" name="Slide Number Placeholder 3"/>
+          <p:cNvSpPr>
+            <a:spLocks noGrp="1"/>
+          </p:cNvSpPr>
+          <p:nvPr>
+            <p:ph type="sldNum" idx="5" sz="quarter"/>
+          </p:nvPr>
+        </p:nvSpPr>
+        <p:spPr/>
+      </p:sp>
+    </p:spTree>
+  </p:cSld>
+  <p:clrMapOvr>
+    <a:masterClrMapping/>
+  </p:clrMapOvr>
+</p:notes>
+</file>
+
+<file path=ppt/notesSlides/notesSlide30.xml><?xml version="1.0" encoding="utf-8"?>
+<p:notes xmlns:a="http://schemas.openxmlformats.org/drawingml/2006/main" xmlns:p="http://schemas.openxmlformats.org/presentationml/2006/main" xmlns:r="http://schemas.openxmlformats.org/officeDocument/2006/relationships">
+  <p:cSld>
+    <p:spTree>
+      <p:nvGrpSpPr>
+        <p:cNvPr id="1" name=""/>
+        <p:cNvGrpSpPr/>
+        <p:nvPr/>
+      </p:nvGrpSpPr>
+      <p:grpSpPr>
+        <a:xfrm>
+          <a:off x="0" y="0"/>
+          <a:ext cx="0" cy="0"/>
+          <a:chOff x="0" y="0"/>
+          <a:chExt cx="0" cy="0"/>
+        </a:xfrm>
+      </p:grpSpPr>
+      <p:sp>
+        <p:nvSpPr>
+          <p:cNvPr id="2" name="Slide Image Placeholder 1"/>
+          <p:cNvSpPr>
+            <a:spLocks noGrp="1"/>
+          </p:cNvSpPr>
+          <p:nvPr>
+            <p:ph type="sldImg" idx="2"/>
+          </p:nvPr>
+        </p:nvSpPr>
+        <p:spPr/>
+      </p:sp>
+      <p:sp>
+        <p:nvSpPr>
+          <p:cNvPr id="3" name="Notes Placeholder 2"/>
+          <p:cNvSpPr>
+            <a:spLocks noGrp="1"/>
+          </p:cNvSpPr>
+          <p:nvPr>
+            <p:ph type="body" idx="3" sz="quarter"/>
+          </p:nvPr>
+        </p:nvSpPr>
+        <p:spPr/>
+        <p:txBody>
+          <a:bodyPr/>
+          <a:lstStyle/>
+          <a:p>
+            <a:r>
+              <a:t>Hands-on: module1/examples/delays_timing/</a:t>
+            </a:r>
+          </a:p>
+        </p:txBody>
+      </p:sp>
+      <p:sp>
+        <p:nvSpPr>
+          <p:cNvPr id="4" name="Slide Number Placeholder 3"/>
+          <p:cNvSpPr>
+            <a:spLocks noGrp="1"/>
+          </p:cNvSpPr>
+          <p:nvPr>
+            <p:ph type="sldNum" idx="5" sz="quarter"/>
+          </p:nvPr>
+        </p:nvSpPr>
+        <p:spPr/>
+      </p:sp>
+    </p:spTree>
+  </p:cSld>
+  <p:clrMapOvr>
+    <a:masterClrMapping/>
+  </p:clrMapOvr>
+</p:notes>
+</file>
+
+<file path=ppt/notesSlides/notesSlide31.xml><?xml version="1.0" encoding="utf-8"?>
+<p:notes xmlns:a="http://schemas.openxmlformats.org/drawingml/2006/main" xmlns:p="http://schemas.openxmlformats.org/presentationml/2006/main" xmlns:r="http://schemas.openxmlformats.org/officeDocument/2006/relationships">
+  <p:cSld>
+    <p:spTree>
+      <p:nvGrpSpPr>
+        <p:cNvPr id="1" name=""/>
+        <p:cNvGrpSpPr/>
+        <p:nvPr/>
+      </p:nvGrpSpPr>
+      <p:grpSpPr>
+        <a:xfrm>
+          <a:off x="0" y="0"/>
+          <a:ext cx="0" cy="0"/>
+          <a:chOff x="0" y="0"/>
+          <a:chExt cx="0" cy="0"/>
+        </a:xfrm>
+      </p:grpSpPr>
+      <p:sp>
+        <p:nvSpPr>
+          <p:cNvPr id="2" name="Slide Image Placeholder 1"/>
+          <p:cNvSpPr>
+            <a:spLocks noGrp="1"/>
+          </p:cNvSpPr>
+          <p:nvPr>
+            <p:ph type="sldImg" idx="2"/>
+          </p:nvPr>
+        </p:nvSpPr>
+        <p:spPr/>
+      </p:sp>
+      <p:sp>
+        <p:nvSpPr>
+          <p:cNvPr id="3" name="Notes Placeholder 2"/>
+          <p:cNvSpPr>
+            <a:spLocks noGrp="1"/>
+          </p:cNvSpPr>
+          <p:nvPr>
+            <p:ph type="body" idx="3" sz="quarter"/>
+          </p:nvPr>
+        </p:nvSpPr>
+        <p:spPr/>
+        <p:txBody>
+          <a:bodyPr/>
+          <a:lstStyle/>
+          <a:p>
+            <a:r>
+              <a:t>module1/examples/testbenches/README.md</a:t>
+            </a:r>
+          </a:p>
+        </p:txBody>
+      </p:sp>
+      <p:sp>
+        <p:nvSpPr>
+          <p:cNvPr id="4" name="Slide Number Placeholder 3"/>
+          <p:cNvSpPr>
+            <a:spLocks noGrp="1"/>
+          </p:cNvSpPr>
+          <p:nvPr>
+            <p:ph type="sldNum" idx="5" sz="quarter"/>
+          </p:nvPr>
+        </p:nvSpPr>
+        <p:spPr/>
+      </p:sp>
+    </p:spTree>
+  </p:cSld>
+  <p:clrMapOvr>
+    <a:masterClrMapping/>
+  </p:clrMapOvr>
+</p:notes>
+</file>
+
+<file path=ppt/notesSlides/notesSlide32.xml><?xml version="1.0" encoding="utf-8"?>
+<p:notes xmlns:a="http://schemas.openxmlformats.org/drawingml/2006/main" xmlns:p="http://schemas.openxmlformats.org/presentationml/2006/main" xmlns:r="http://schemas.openxmlformats.org/officeDocument/2006/relationships">
+  <p:cSld>
+    <p:spTree>
+      <p:nvGrpSpPr>
+        <p:cNvPr id="1" name=""/>
+        <p:cNvGrpSpPr/>
+        <p:nvPr/>
+      </p:nvGrpSpPr>
+      <p:grpSpPr>
+        <a:xfrm>
+          <a:off x="0" y="0"/>
+          <a:ext cx="0" cy="0"/>
+          <a:chOff x="0" y="0"/>
+          <a:chExt cx="0" cy="0"/>
+        </a:xfrm>
+      </p:grpSpPr>
+      <p:sp>
+        <p:nvSpPr>
+          <p:cNvPr id="2" name="Slide Image Placeholder 1"/>
+          <p:cNvSpPr>
+            <a:spLocks noGrp="1"/>
+          </p:cNvSpPr>
+          <p:nvPr>
+            <p:ph type="sldImg" idx="2"/>
+          </p:nvPr>
+        </p:nvSpPr>
+        <p:spPr/>
+      </p:sp>
+      <p:sp>
+        <p:nvSpPr>
+          <p:cNvPr id="3" name="Notes Placeholder 2"/>
+          <p:cNvSpPr>
+            <a:spLocks noGrp="1"/>
+          </p:cNvSpPr>
+          <p:nvPr>
+            <p:ph type="body" idx="3" sz="quarter"/>
+          </p:nvPr>
+        </p:nvSpPr>
+        <p:spPr/>
+        <p:txBody>
+          <a:bodyPr/>
+          <a:lstStyle/>
+          <a:p>
+            <a:r>
+              <a:t>Hands-on: module1/examples/testbenches/</a:t>
+            </a:r>
+          </a:p>
+        </p:txBody>
+      </p:sp>
+      <p:sp>
+        <p:nvSpPr>
+          <p:cNvPr id="4" name="Slide Number Placeholder 3"/>
+          <p:cNvSpPr>
+            <a:spLocks noGrp="1"/>
+          </p:cNvSpPr>
+          <p:nvPr>
+            <p:ph type="sldNum" idx="5" sz="quarter"/>
+          </p:nvPr>
+        </p:nvSpPr>
+        <p:spPr/>
+      </p:sp>
+    </p:spTree>
+  </p:cSld>
+  <p:clrMapOvr>
+    <a:masterClrMapping/>
+  </p:clrMapOvr>
+</p:notes>
+</file>
+
+<file path=ppt/notesSlides/notesSlide33.xml><?xml version="1.0" encoding="utf-8"?>
+<p:notes xmlns:a="http://schemas.openxmlformats.org/drawingml/2006/main" xmlns:p="http://schemas.openxmlformats.org/presentationml/2006/main" xmlns:r="http://schemas.openxmlformats.org/officeDocument/2006/relationships">
+  <p:cSld>
+    <p:spTree>
+      <p:nvGrpSpPr>
+        <p:cNvPr id="1" name=""/>
+        <p:cNvGrpSpPr/>
+        <p:nvPr/>
+      </p:nvGrpSpPr>
+      <p:grpSpPr>
+        <a:xfrm>
+          <a:off x="0" y="0"/>
+          <a:ext cx="0" cy="0"/>
+          <a:chOff x="0" y="0"/>
+          <a:chExt cx="0" cy="0"/>
+        </a:xfrm>
+      </p:grpSpPr>
+      <p:sp>
+        <p:nvSpPr>
+          <p:cNvPr id="2" name="Slide Image Placeholder 1"/>
+          <p:cNvSpPr>
+            <a:spLocks noGrp="1"/>
+          </p:cNvSpPr>
+          <p:nvPr>
+            <p:ph type="sldImg" idx="2"/>
+          </p:nvPr>
+        </p:nvSpPr>
+        <p:spPr/>
+      </p:sp>
+      <p:sp>
+        <p:nvSpPr>
+          <p:cNvPr id="3" name="Notes Placeholder 2"/>
+          <p:cNvSpPr>
+            <a:spLocks noGrp="1"/>
+          </p:cNvSpPr>
+          <p:nvPr>
+            <p:ph type="body" idx="3" sz="quarter"/>
+          </p:nvPr>
+        </p:nvSpPr>
+        <p:spPr/>
+        <p:txBody>
+          <a:bodyPr/>
+          <a:lstStyle/>
+          <a:p>
+            <a:r>
+              <a:t>From MODULE1 Common Pitfalls.</a:t>
+            </a:r>
+          </a:p>
+        </p:txBody>
+      </p:sp>
+      <p:sp>
+        <p:nvSpPr>
+          <p:cNvPr id="4" name="Slide Number Placeholder 3"/>
+          <p:cNvSpPr>
+            <a:spLocks noGrp="1"/>
+          </p:cNvSpPr>
+          <p:nvPr>
+            <p:ph type="sldNum" idx="5" sz="quarter"/>
+          </p:nvPr>
+        </p:nvSpPr>
+        <p:spPr/>
+      </p:sp>
+    </p:spTree>
+  </p:cSld>
+  <p:clrMapOvr>
+    <a:masterClrMapping/>
+  </p:clrMapOvr>
+</p:notes>
+</file>
+
+<file path=ppt/notesSlides/notesSlide34.xml><?xml version="1.0" encoding="utf-8"?>
+<p:notes xmlns:a="http://schemas.openxmlformats.org/drawingml/2006/main" xmlns:p="http://schemas.openxmlformats.org/presentationml/2006/main" xmlns:r="http://schemas.openxmlformats.org/officeDocument/2006/relationships">
+  <p:cSld>
+    <p:spTree>
+      <p:nvGrpSpPr>
+        <p:cNvPr id="1" name=""/>
+        <p:cNvGrpSpPr/>
+        <p:nvPr/>
+      </p:nvGrpSpPr>
+      <p:grpSpPr>
+        <a:xfrm>
+          <a:off x="0" y="0"/>
+          <a:ext cx="0" cy="0"/>
+          <a:chOff x="0" y="0"/>
+          <a:chExt cx="0" cy="0"/>
+        </a:xfrm>
+      </p:grpSpPr>
+      <p:sp>
+        <p:nvSpPr>
+          <p:cNvPr id="2" name="Slide Image Placeholder 1"/>
+          <p:cNvSpPr>
+            <a:spLocks noGrp="1"/>
+          </p:cNvSpPr>
+          <p:nvPr>
+            <p:ph type="sldImg" idx="2"/>
+          </p:nvPr>
+        </p:nvSpPr>
+        <p:spPr/>
+      </p:sp>
+      <p:sp>
+        <p:nvSpPr>
+          <p:cNvPr id="3" name="Notes Placeholder 2"/>
+          <p:cNvSpPr>
+            <a:spLocks noGrp="1"/>
+          </p:cNvSpPr>
+          <p:nvPr>
+            <p:ph type="body" idx="3" sz="quarter"/>
+          </p:nvPr>
+        </p:nvSpPr>
+        <p:spPr/>
+        <p:txBody>
+          <a:bodyPr/>
+          <a:lstStyle/>
+          <a:p>
+            <a:r>
+              <a:t>From MODULE1 Common Pitfalls.</a:t>
+            </a:r>
+          </a:p>
+        </p:txBody>
+      </p:sp>
+      <p:sp>
+        <p:nvSpPr>
+          <p:cNvPr id="4" name="Slide Number Placeholder 3"/>
+          <p:cNvSpPr>
+            <a:spLocks noGrp="1"/>
+          </p:cNvSpPr>
+          <p:nvPr>
+            <p:ph type="sldNum" idx="5" sz="quarter"/>
+          </p:nvPr>
+        </p:nvSpPr>
+        <p:spPr/>
+      </p:sp>
+    </p:spTree>
+  </p:cSld>
+  <p:clrMapOvr>
+    <a:masterClrMapping/>
+  </p:clrMapOvr>
+</p:notes>
+</file>
+
+<file path=ppt/notesSlides/notesSlide35.xml><?xml version="1.0" encoding="utf-8"?>
+<p:notes xmlns:a="http://schemas.openxmlformats.org/drawingml/2006/main" xmlns:p="http://schemas.openxmlformats.org/presentationml/2006/main" xmlns:r="http://schemas.openxmlformats.org/officeDocument/2006/relationships">
+  <p:cSld>
+    <p:spTree>
+      <p:nvGrpSpPr>
+        <p:cNvPr id="1" name=""/>
+        <p:cNvGrpSpPr/>
+        <p:nvPr/>
+      </p:nvGrpSpPr>
+      <p:grpSpPr>
+        <a:xfrm>
+          <a:off x="0" y="0"/>
+          <a:ext cx="0" cy="0"/>
+          <a:chOff x="0" y="0"/>
+          <a:chExt cx="0" cy="0"/>
+        </a:xfrm>
+      </p:grpSpPr>
+      <p:sp>
+        <p:nvSpPr>
+          <p:cNvPr id="2" name="Slide Image Placeholder 1"/>
+          <p:cNvSpPr>
+            <a:spLocks noGrp="1"/>
+          </p:cNvSpPr>
+          <p:nvPr>
+            <p:ph type="sldImg" idx="2"/>
+          </p:nvPr>
+        </p:nvSpPr>
+        <p:spPr/>
+      </p:sp>
+      <p:sp>
+        <p:nvSpPr>
+          <p:cNvPr id="3" name="Notes Placeholder 2"/>
+          <p:cNvSpPr>
+            <a:spLocks noGrp="1"/>
+          </p:cNvSpPr>
+          <p:nvPr>
+            <p:ph type="body" idx="3" sz="quarter"/>
+          </p:nvPr>
+        </p:nvSpPr>
+        <p:spPr/>
+        <p:txBody>
+          <a:bodyPr/>
+          <a:lstStyle/>
+          <a:p>
+            <a:r>
+              <a:t>From MODULE1 Common Pitfalls.</a:t>
+            </a:r>
+          </a:p>
+        </p:txBody>
+      </p:sp>
+      <p:sp>
+        <p:nvSpPr>
+          <p:cNvPr id="4" name="Slide Number Placeholder 3"/>
+          <p:cNvSpPr>
+            <a:spLocks noGrp="1"/>
+          </p:cNvSpPr>
+          <p:nvPr>
+            <p:ph type="sldNum" idx="5" sz="quarter"/>
+          </p:nvPr>
+        </p:nvSpPr>
+        <p:spPr/>
+      </p:sp>
+    </p:spTree>
+  </p:cSld>
+  <p:clrMapOvr>
+    <a:masterClrMapping/>
+  </p:clrMapOvr>
+</p:notes>
+</file>
+
+<file path=ppt/notesSlides/notesSlide36.xml><?xml version="1.0" encoding="utf-8"?>
+<p:notes xmlns:a="http://schemas.openxmlformats.org/drawingml/2006/main" xmlns:p="http://schemas.openxmlformats.org/presentationml/2006/main" xmlns:r="http://schemas.openxmlformats.org/officeDocument/2006/relationships">
+  <p:cSld>
+    <p:spTree>
+      <p:nvGrpSpPr>
+        <p:cNvPr id="1" name=""/>
+        <p:cNvGrpSpPr/>
+        <p:nvPr/>
+      </p:nvGrpSpPr>
+      <p:grpSpPr>
+        <a:xfrm>
+          <a:off x="0" y="0"/>
+          <a:ext cx="0" cy="0"/>
+          <a:chOff x="0" y="0"/>
+          <a:chExt cx="0" cy="0"/>
+        </a:xfrm>
+      </p:grpSpPr>
+      <p:sp>
+        <p:nvSpPr>
+          <p:cNvPr id="2" name="Slide Image Placeholder 1"/>
+          <p:cNvSpPr>
+            <a:spLocks noGrp="1"/>
+          </p:cNvSpPr>
+          <p:nvPr>
+            <p:ph type="sldImg" idx="2"/>
+          </p:nvPr>
+        </p:nvSpPr>
+        <p:spPr/>
+      </p:sp>
+      <p:sp>
+        <p:nvSpPr>
+          <p:cNvPr id="3" name="Notes Placeholder 2"/>
+          <p:cNvSpPr>
+            <a:spLocks noGrp="1"/>
+          </p:cNvSpPr>
+          <p:nvPr>
+            <p:ph type="body" idx="3" sz="quarter"/>
+          </p:nvPr>
+        </p:nvSpPr>
+        <p:spPr/>
+        <p:txBody>
+          <a:bodyPr/>
+          <a:lstStyle/>
+          <a:p>
+            <a:r>
+              <a:t>From MODULE1 Common Pitfalls.</a:t>
+            </a:r>
+          </a:p>
+        </p:txBody>
+      </p:sp>
+      <p:sp>
+        <p:nvSpPr>
+          <p:cNvPr id="4" name="Slide Number Placeholder 3"/>
+          <p:cNvSpPr>
+            <a:spLocks noGrp="1"/>
+          </p:cNvSpPr>
+          <p:nvPr>
+            <p:ph type="sldNum" idx="5" sz="quarter"/>
+          </p:nvPr>
+        </p:nvSpPr>
+        <p:spPr/>
+      </p:sp>
+    </p:spTree>
+  </p:cSld>
+  <p:clrMapOvr>
+    <a:masterClrMapping/>
+  </p:clrMapOvr>
+</p:notes>
+</file>
+
+<file path=ppt/notesSlides/notesSlide37.xml><?xml version="1.0" encoding="utf-8"?>
+<p:notes xmlns:a="http://schemas.openxmlformats.org/drawingml/2006/main" xmlns:p="http://schemas.openxmlformats.org/presentationml/2006/main" xmlns:r="http://schemas.openxmlformats.org/officeDocument/2006/relationships">
+  <p:cSld>
+    <p:spTree>
+      <p:nvGrpSpPr>
+        <p:cNvPr id="1" name=""/>
+        <p:cNvGrpSpPr/>
+        <p:nvPr/>
+      </p:nvGrpSpPr>
+      <p:grpSpPr>
+        <a:xfrm>
+          <a:off x="0" y="0"/>
+          <a:ext cx="0" cy="0"/>
+          <a:chOff x="0" y="0"/>
+          <a:chExt cx="0" cy="0"/>
+        </a:xfrm>
+      </p:grpSpPr>
+      <p:sp>
+        <p:nvSpPr>
+          <p:cNvPr id="2" name="Slide Image Placeholder 1"/>
+          <p:cNvSpPr>
+            <a:spLocks noGrp="1"/>
+          </p:cNvSpPr>
+          <p:nvPr>
+            <p:ph type="sldImg" idx="2"/>
+          </p:nvPr>
+        </p:nvSpPr>
+        <p:spPr/>
+      </p:sp>
+      <p:sp>
+        <p:nvSpPr>
+          <p:cNvPr id="3" name="Notes Placeholder 2"/>
+          <p:cNvSpPr>
+            <a:spLocks noGrp="1"/>
+          </p:cNvSpPr>
+          <p:nvPr>
+            <p:ph type="body" idx="3" sz="quarter"/>
+          </p:nvPr>
+        </p:nvSpPr>
+        <p:spPr/>
+        <p:txBody>
+          <a:bodyPr/>
+          <a:lstStyle/>
+          <a:p>
+            <a:r>
+              <a:t>From MODULE1 Common Pitfalls.</a:t>
+            </a:r>
+          </a:p>
+        </p:txBody>
+      </p:sp>
+      <p:sp>
+        <p:nvSpPr>
+          <p:cNvPr id="4" name="Slide Number Placeholder 3"/>
+          <p:cNvSpPr>
+            <a:spLocks noGrp="1"/>
+          </p:cNvSpPr>
+          <p:nvPr>
+            <p:ph type="sldNum" idx="5" sz="quarter"/>
+          </p:nvPr>
+        </p:nvSpPr>
+        <p:spPr/>
+      </p:sp>
+    </p:spTree>
+  </p:cSld>
+  <p:clrMapOvr>
+    <a:masterClrMapping/>
+  </p:clrMapOvr>
+</p:notes>
+</file>
+
+<file path=ppt/notesSlides/notesSlide38.xml><?xml version="1.0" encoding="utf-8"?>
+<p:notes xmlns:a="http://schemas.openxmlformats.org/drawingml/2006/main" xmlns:p="http://schemas.openxmlformats.org/presentationml/2006/main" xmlns:r="http://schemas.openxmlformats.org/officeDocument/2006/relationships">
+  <p:cSld>
+    <p:spTree>
+      <p:nvGrpSpPr>
+        <p:cNvPr id="1" name=""/>
+        <p:cNvGrpSpPr/>
+        <p:nvPr/>
+      </p:nvGrpSpPr>
+      <p:grpSpPr>
+        <a:xfrm>
+          <a:off x="0" y="0"/>
+          <a:ext cx="0" cy="0"/>
+          <a:chOff x="0" y="0"/>
+          <a:chExt cx="0" cy="0"/>
+        </a:xfrm>
+      </p:grpSpPr>
+      <p:sp>
+        <p:nvSpPr>
+          <p:cNvPr id="2" name="Slide Image Placeholder 1"/>
+          <p:cNvSpPr>
+            <a:spLocks noGrp="1"/>
+          </p:cNvSpPr>
+          <p:nvPr>
+            <p:ph type="sldImg" idx="2"/>
+          </p:nvPr>
+        </p:nvSpPr>
+        <p:spPr/>
+      </p:sp>
+      <p:sp>
+        <p:nvSpPr>
+          <p:cNvPr id="3" name="Notes Placeholder 2"/>
+          <p:cNvSpPr>
+            <a:spLocks noGrp="1"/>
+          </p:cNvSpPr>
+          <p:nvPr>
+            <p:ph type="body" idx="3" sz="quarter"/>
+          </p:nvPr>
+        </p:nvSpPr>
+        <p:spPr/>
+        <p:txBody>
+          <a:bodyPr/>
+          <a:lstStyle/>
+          <a:p>
+            <a:r>
+              <a:t>From MODULE1 Learning Outcomes.</a:t>
+            </a:r>
+          </a:p>
+        </p:txBody>
+      </p:sp>
+      <p:sp>
+        <p:nvSpPr>
+          <p:cNvPr id="4" name="Slide Number Placeholder 3"/>
+          <p:cNvSpPr>
+            <a:spLocks noGrp="1"/>
+          </p:cNvSpPr>
+          <p:nvPr>
+            <p:ph type="sldNum" idx="5" sz="quarter"/>
+          </p:nvPr>
+        </p:nvSpPr>
+        <p:spPr/>
+      </p:sp>
+    </p:spTree>
+  </p:cSld>
+  <p:clrMapOvr>
+    <a:masterClrMapping/>
+  </p:clrMapOvr>
+</p:notes>
+</file>
+
+<file path=ppt/notesSlides/notesSlide39.xml><?xml version="1.0" encoding="utf-8"?>
+<p:notes xmlns:a="http://schemas.openxmlformats.org/drawingml/2006/main" xmlns:p="http://schemas.openxmlformats.org/presentationml/2006/main" xmlns:r="http://schemas.openxmlformats.org/officeDocument/2006/relationships">
+  <p:cSld>
+    <p:spTree>
+      <p:nvGrpSpPr>
+        <p:cNvPr id="1" name=""/>
+        <p:cNvGrpSpPr/>
+        <p:nvPr/>
+      </p:nvGrpSpPr>
+      <p:grpSpPr>
+        <a:xfrm>
+          <a:off x="0" y="0"/>
+          <a:ext cx="0" cy="0"/>
+          <a:chOff x="0" y="0"/>
+          <a:chExt cx="0" cy="0"/>
+        </a:xfrm>
+      </p:grpSpPr>
+      <p:sp>
+        <p:nvSpPr>
+          <p:cNvPr id="2" name="Slide Image Placeholder 1"/>
+          <p:cNvSpPr>
+            <a:spLocks noGrp="1"/>
+          </p:cNvSpPr>
+          <p:nvPr>
+            <p:ph type="sldImg" idx="2"/>
+          </p:nvPr>
+        </p:nvSpPr>
+        <p:spPr/>
+      </p:sp>
+      <p:sp>
+        <p:nvSpPr>
+          <p:cNvPr id="3" name="Notes Placeholder 2"/>
+          <p:cNvSpPr>
+            <a:spLocks noGrp="1"/>
+          </p:cNvSpPr>
+          <p:nvPr>
+            <p:ph type="body" idx="3" sz="quarter"/>
+          </p:nvPr>
+        </p:nvSpPr>
+        <p:spPr/>
+        <p:txBody>
+          <a:bodyPr/>
+          <a:lstStyle/>
+          <a:p>
+            <a:r>
+              <a:t>From MODULE1 Learning Outcomes.</a:t>
             </a:r>
           </a:p>
         </p:txBody>
@@ -5091,7 +6371,7 @@
               </a:defRPr>
             </a:pPr>
             <a:r>
-              <a:t>2. Modules, Ports, and Hierarchy (1364-1995)</a:t>
+              <a:t>1. IEEE 1364-1995 Context (1/3)</a:t>
             </a:r>
           </a:p>
         </p:txBody>
@@ -5133,140 +6413,178 @@
               </a:defRPr>
             </a:pPr>
             <a:r>
-              <a:t>• Port list: Only port names: `(a, b, y)`.</a:t>
-            </a:r>
-          </a:p>
-          <a:p>
-            <a:pPr>
-              <a:lnSpc>
-                <a:spcPts val="2200"/>
-              </a:lnSpc>
-              <a:spcAft>
-                <a:spcPts val="1000"/>
-              </a:spcAft>
-              <a:defRPr sz="2000" b="0">
-                <a:solidFill>
-                  <a:srgbClr val="333333"/>
-                </a:solidFill>
-                <a:latin typeface="Calibri"/>
-              </a:defRPr>
-            </a:pPr>
-            <a:r>
-              <a:t>• Port direction: Declared inside the module: `input`,</a:t>
-            </a:r>
-          </a:p>
-          <a:p>
-            <a:pPr>
-              <a:lnSpc>
-                <a:spcPts val="2200"/>
-              </a:lnSpc>
-              <a:spcAft>
-                <a:spcPts val="1000"/>
-              </a:spcAft>
-              <a:defRPr sz="2000" b="0">
-                <a:solidFill>
-                  <a:srgbClr val="333333"/>
-                </a:solidFill>
-                <a:latin typeface="Calibri"/>
-              </a:defRPr>
-            </a:pPr>
-            <a:r>
-              <a:t>      `output`.</a:t>
-            </a:r>
-          </a:p>
-          <a:p>
-            <a:pPr>
-              <a:lnSpc>
-                <a:spcPts val="2200"/>
-              </a:lnSpc>
-              <a:spcAft>
-                <a:spcPts val="1000"/>
-              </a:spcAft>
-              <a:defRPr sz="2000" b="0">
-                <a:solidFill>
-                  <a:srgbClr val="333333"/>
-                </a:solidFill>
-                <a:latin typeface="Calibri"/>
-              </a:defRPr>
-            </a:pPr>
-            <a:r>
-              <a:t>• Port type: Declared inside the module: `wire` or</a:t>
-            </a:r>
-          </a:p>
-          <a:p>
-            <a:pPr>
-              <a:lnSpc>
-                <a:spcPts val="2200"/>
-              </a:lnSpc>
-              <a:spcAft>
-                <a:spcPts val="1000"/>
-              </a:spcAft>
-              <a:defRPr sz="2000" b="0">
-                <a:solidFill>
-                  <a:srgbClr val="333333"/>
-                </a:solidFill>
-                <a:latin typeface="Calibri"/>
-              </a:defRPr>
-            </a:pPr>
-            <a:r>
-              <a:t>      `reg` (default for `input` is `wire`; for `output`…</a:t>
-            </a:r>
-          </a:p>
-          <a:p>
-            <a:pPr>
-              <a:lnSpc>
-                <a:spcPts val="2200"/>
-              </a:lnSpc>
-              <a:spcAft>
-                <a:spcPts val="1000"/>
-              </a:spcAft>
-              <a:defRPr sz="2000" b="0">
-                <a:solidFill>
-                  <a:srgbClr val="333333"/>
-                </a:solidFill>
-                <a:latin typeface="Calibri"/>
-              </a:defRPr>
-            </a:pPr>
-            <a:r>
-              <a:t>• Named port connection: `.port_name(signal_name)` —</a:t>
-            </a:r>
-          </a:p>
-          <a:p>
-            <a:pPr>
-              <a:lnSpc>
-                <a:spcPts val="2200"/>
-              </a:lnSpc>
-              <a:spcAft>
-                <a:spcPts val="1000"/>
-              </a:spcAft>
-              <a:defRPr sz="2000" b="0">
-                <a:solidFill>
-                  <a:srgbClr val="333333"/>
-                </a:solidFill>
-                <a:latin typeface="Calibri"/>
-              </a:defRPr>
-            </a:pPr>
-            <a:r>
-              <a:t>      recommended for readability.</a:t>
-            </a:r>
-          </a:p>
-          <a:p>
-            <a:pPr>
-              <a:lnSpc>
-                <a:spcPts val="2200"/>
-              </a:lnSpc>
-              <a:spcAft>
-                <a:spcPts val="1000"/>
-              </a:spcAft>
-              <a:defRPr sz="2000" b="0">
-                <a:solidFill>
-                  <a:srgbClr val="333333"/>
-                </a:solidFill>
-                <a:latin typeface="Calibri"/>
-              </a:defRPr>
-            </a:pPr>
-            <a:r>
-              <a:t>• Positional: Order must match port list.</a:t>
+              <a:t>• Modules and hierarchy: Module declaration, port</a:t>
+            </a:r>
+          </a:p>
+          <a:p>
+            <a:pPr>
+              <a:lnSpc>
+                <a:spcPts val="2200"/>
+              </a:lnSpc>
+              <a:spcAft>
+                <a:spcPts val="1000"/>
+              </a:spcAft>
+              <a:defRPr sz="2000" b="0">
+                <a:solidFill>
+                  <a:srgbClr val="333333"/>
+                </a:solidFill>
+                <a:latin typeface="Calibri"/>
+              </a:defRPr>
+            </a:pPr>
+            <a:r>
+              <a:t>      list, instantiation</a:t>
+            </a:r>
+          </a:p>
+          <a:p>
+            <a:pPr>
+              <a:lnSpc>
+                <a:spcPts val="2200"/>
+              </a:lnSpc>
+              <a:spcAft>
+                <a:spcPts val="1000"/>
+              </a:spcAft>
+              <a:defRPr sz="2000" b="0">
+                <a:solidFill>
+                  <a:srgbClr val="333333"/>
+                </a:solidFill>
+                <a:latin typeface="Calibri"/>
+              </a:defRPr>
+            </a:pPr>
+            <a:r>
+              <a:t>• Nets: `wire` (and `wand`, `wor`, `tri`; rarely used</a:t>
+            </a:r>
+          </a:p>
+          <a:p>
+            <a:pPr>
+              <a:lnSpc>
+                <a:spcPts val="2200"/>
+              </a:lnSpc>
+              <a:spcAft>
+                <a:spcPts val="1000"/>
+              </a:spcAft>
+              <a:defRPr sz="2000" b="0">
+                <a:solidFill>
+                  <a:srgbClr val="333333"/>
+                </a:solidFill>
+                <a:latin typeface="Calibri"/>
+              </a:defRPr>
+            </a:pPr>
+            <a:r>
+              <a:t>      in RTL)</a:t>
+            </a:r>
+          </a:p>
+          <a:p>
+            <a:pPr>
+              <a:lnSpc>
+                <a:spcPts val="2200"/>
+              </a:lnSpc>
+              <a:spcAft>
+                <a:spcPts val="1000"/>
+              </a:spcAft>
+              <a:defRPr sz="2000" b="0">
+                <a:solidFill>
+                  <a:srgbClr val="333333"/>
+                </a:solidFill>
+                <a:latin typeface="Calibri"/>
+              </a:defRPr>
+            </a:pPr>
+            <a:r>
+              <a:t>• Variables: `reg` for procedural assignment outputs</a:t>
+            </a:r>
+          </a:p>
+          <a:p>
+            <a:pPr>
+              <a:lnSpc>
+                <a:spcPts val="2200"/>
+              </a:lnSpc>
+              <a:spcAft>
+                <a:spcPts val="1000"/>
+              </a:spcAft>
+              <a:defRPr sz="2000" b="0">
+                <a:solidFill>
+                  <a:srgbClr val="333333"/>
+                </a:solidFill>
+                <a:latin typeface="Calibri"/>
+              </a:defRPr>
+            </a:pPr>
+            <a:r>
+              <a:t>• Continuous assignment: `assign` for combinational</a:t>
+            </a:r>
+          </a:p>
+          <a:p>
+            <a:pPr>
+              <a:lnSpc>
+                <a:spcPts val="2200"/>
+              </a:lnSpc>
+              <a:spcAft>
+                <a:spcPts val="1000"/>
+              </a:spcAft>
+              <a:defRPr sz="2000" b="0">
+                <a:solidFill>
+                  <a:srgbClr val="333333"/>
+                </a:solidFill>
+                <a:latin typeface="Calibri"/>
+              </a:defRPr>
+            </a:pPr>
+            <a:r>
+              <a:t>      logic</a:t>
+            </a:r>
+          </a:p>
+          <a:p>
+            <a:pPr>
+              <a:lnSpc>
+                <a:spcPts val="2200"/>
+              </a:lnSpc>
+              <a:spcAft>
+                <a:spcPts val="1000"/>
+              </a:spcAft>
+              <a:defRPr sz="2000" b="0">
+                <a:solidFill>
+                  <a:srgbClr val="333333"/>
+                </a:solidFill>
+                <a:latin typeface="Calibri"/>
+              </a:defRPr>
+            </a:pPr>
+            <a:r>
+              <a:t>• Procedural blocks: `always`, `initial` with explicit</a:t>
+            </a:r>
+          </a:p>
+          <a:p>
+            <a:pPr>
+              <a:lnSpc>
+                <a:spcPts val="2200"/>
+              </a:lnSpc>
+              <a:spcAft>
+                <a:spcPts val="1000"/>
+              </a:spcAft>
+              <a:defRPr sz="2000" b="0">
+                <a:solidFill>
+                  <a:srgbClr val="333333"/>
+                </a:solidFill>
+                <a:latin typeface="Calibri"/>
+              </a:defRPr>
+            </a:pPr>
+            <a:r>
+              <a:t>      sensitivity lists</a:t>
+            </a:r>
+          </a:p>
+          <a:p>
+            <a:pPr>
+              <a:lnSpc>
+                <a:spcPts val="2200"/>
+              </a:lnSpc>
+              <a:spcAft>
+                <a:spcPts val="1000"/>
+              </a:spcAft>
+              <a:defRPr sz="2000" b="0">
+                <a:solidFill>
+                  <a:srgbClr val="333333"/>
+                </a:solidFill>
+                <a:latin typeface="Calibri"/>
+              </a:defRPr>
+            </a:pPr>
+            <a:r>
+              <a:t>• Delays and timing: `#`, `@`, `wait`</a:t>
             </a:r>
           </a:p>
         </p:txBody>
@@ -5362,7 +6680,7 @@
               </a:defRPr>
             </a:pPr>
             <a:r>
-              <a:t>3. Nets and Variables: wire and reg (1/2)</a:t>
+              <a:t>1. IEEE 1364-1995 Context (2/3)</a:t>
             </a:r>
           </a:p>
         </p:txBody>
@@ -5404,178 +6722,159 @@
               </a:defRPr>
             </a:pPr>
             <a:r>
-              <a:t>• Represents a physical connection between components.</a:t>
-            </a:r>
-          </a:p>
-          <a:p>
-            <a:pPr>
-              <a:lnSpc>
-                <a:spcPts val="2200"/>
-              </a:lnSpc>
-              <a:spcAft>
-                <a:spcPts val="1000"/>
-              </a:spcAft>
-              <a:defRPr sz="2000" b="0">
-                <a:solidFill>
-                  <a:srgbClr val="333333"/>
-                </a:solidFill>
-                <a:latin typeface="Calibri"/>
-              </a:defRPr>
-            </a:pPr>
-            <a:r>
-              <a:t>• Driven by continuous assignment (`assign`) or by</a:t>
-            </a:r>
-          </a:p>
-          <a:p>
-            <a:pPr>
-              <a:lnSpc>
-                <a:spcPts val="2200"/>
-              </a:lnSpc>
-              <a:spcAft>
-                <a:spcPts val="1000"/>
-              </a:spcAft>
-              <a:defRPr sz="2000" b="0">
-                <a:solidFill>
-                  <a:srgbClr val="333333"/>
-                </a:solidFill>
-                <a:latin typeface="Calibri"/>
-              </a:defRPr>
-            </a:pPr>
-            <a:r>
-              <a:t>      module output.</a:t>
-            </a:r>
-          </a:p>
-          <a:p>
-            <a:pPr>
-              <a:lnSpc>
-                <a:spcPts val="2200"/>
-              </a:lnSpc>
-              <a:spcAft>
-                <a:spcPts val="1000"/>
-              </a:spcAft>
-              <a:defRPr sz="2000" b="0">
-                <a:solidFill>
-                  <a:srgbClr val="333333"/>
-                </a:solidFill>
-                <a:latin typeface="Calibri"/>
-              </a:defRPr>
-            </a:pPr>
-            <a:r>
-              <a:t>• Cannot be assigned inside `always` or `initial` (use</a:t>
-            </a:r>
-          </a:p>
-          <a:p>
-            <a:pPr>
-              <a:lnSpc>
-                <a:spcPts val="2200"/>
-              </a:lnSpc>
-              <a:spcAft>
-                <a:spcPts val="1000"/>
-              </a:spcAft>
-              <a:defRPr sz="2000" b="0">
-                <a:solidFill>
-                  <a:srgbClr val="333333"/>
-                </a:solidFill>
-                <a:latin typeface="Calibri"/>
-              </a:defRPr>
-            </a:pPr>
-            <a:r>
-              <a:t>      `reg` for that).</a:t>
-            </a:r>
-          </a:p>
-          <a:p>
-            <a:pPr>
-              <a:lnSpc>
-                <a:spcPts val="2200"/>
-              </a:lnSpc>
-              <a:spcAft>
-                <a:spcPts val="1000"/>
-              </a:spcAft>
-              <a:defRPr sz="2000" b="0">
-                <a:solidFill>
-                  <a:srgbClr val="333333"/>
-                </a:solidFill>
-                <a:latin typeface="Calibri"/>
-              </a:defRPr>
-            </a:pPr>
-            <a:r>
-              <a:t>• Holds a value; can be assigned in `always` or</a:t>
-            </a:r>
-          </a:p>
-          <a:p>
-            <a:pPr>
-              <a:lnSpc>
-                <a:spcPts val="2200"/>
-              </a:lnSpc>
-              <a:spcAft>
-                <a:spcPts val="1000"/>
-              </a:spcAft>
-              <a:defRPr sz="2000" b="0">
-                <a:solidFill>
-                  <a:srgbClr val="333333"/>
-                </a:solidFill>
-                <a:latin typeface="Calibri"/>
-              </a:defRPr>
-            </a:pPr>
-            <a:r>
-              <a:t>      `initial`.</a:t>
-            </a:r>
-          </a:p>
-          <a:p>
-            <a:pPr>
-              <a:lnSpc>
-                <a:spcPts val="2200"/>
-              </a:lnSpc>
-              <a:spcAft>
-                <a:spcPts val="1000"/>
-              </a:spcAft>
-              <a:defRPr sz="2000" b="0">
-                <a:solidFill>
-                  <a:srgbClr val="333333"/>
-                </a:solidFill>
-                <a:latin typeface="Calibri"/>
-              </a:defRPr>
-            </a:pPr>
-            <a:r>
-              <a:t>• Does not imply a flip-flop; flip-flops come from</a:t>
-            </a:r>
-          </a:p>
-          <a:p>
-            <a:pPr>
-              <a:lnSpc>
-                <a:spcPts val="2200"/>
-              </a:lnSpc>
-              <a:spcAft>
-                <a:spcPts val="1000"/>
-              </a:spcAft>
-              <a:defRPr sz="2000" b="0">
-                <a:solidFill>
-                  <a:srgbClr val="333333"/>
-                </a:solidFill>
-                <a:latin typeface="Calibri"/>
-              </a:defRPr>
-            </a:pPr>
-            <a:r>
-              <a:t>      `always @(posedge clk)` (or similar).</a:t>
-            </a:r>
-          </a:p>
-          <a:p>
-            <a:pPr>
-              <a:lnSpc>
-                <a:spcPts val="2200"/>
-              </a:lnSpc>
-              <a:spcAft>
-                <a:spcPts val="1000"/>
-              </a:spcAft>
-              <a:defRPr sz="2000" b="0">
-                <a:solidFill>
-                  <a:srgbClr val="333333"/>
-                </a:solidFill>
-                <a:latin typeface="Calibri"/>
-              </a:defRPr>
-            </a:pPr>
-            <a:r>
-              <a:t>• Used for outputs that are driven procedurally.</a:t>
+              <a:t>• Tasks and functions: Non-ANSI style (declarations</a:t>
+            </a:r>
+          </a:p>
+          <a:p>
+            <a:pPr>
+              <a:lnSpc>
+                <a:spcPts val="2200"/>
+              </a:lnSpc>
+              <a:spcAft>
+                <a:spcPts val="1000"/>
+              </a:spcAft>
+              <a:defRPr sz="2000" b="0">
+                <a:solidFill>
+                  <a:srgbClr val="333333"/>
+                </a:solidFill>
+                <a:latin typeface="Calibri"/>
+              </a:defRPr>
+            </a:pPr>
+            <a:r>
+              <a:t>      separate from port list)</a:t>
+            </a:r>
+          </a:p>
+          <a:p>
+            <a:pPr>
+              <a:lnSpc>
+                <a:spcPts val="2200"/>
+              </a:lnSpc>
+              <a:spcAft>
+                <a:spcPts val="1000"/>
+              </a:spcAft>
+              <a:defRPr sz="2000" b="0">
+                <a:solidFill>
+                  <a:srgbClr val="333333"/>
+                </a:solidFill>
+                <a:latin typeface="Calibri"/>
+              </a:defRPr>
+            </a:pPr>
+            <a:r>
+              <a:t>• System tasks: `$display`, `$monitor`, `$finish`,</a:t>
+            </a:r>
+          </a:p>
+          <a:p>
+            <a:pPr>
+              <a:lnSpc>
+                <a:spcPts val="2200"/>
+              </a:lnSpc>
+              <a:spcAft>
+                <a:spcPts val="1000"/>
+              </a:spcAft>
+              <a:defRPr sz="2000" b="0">
+                <a:solidFill>
+                  <a:srgbClr val="333333"/>
+                </a:solidFill>
+                <a:latin typeface="Calibri"/>
+              </a:defRPr>
+            </a:pPr>
+            <a:r>
+              <a:t>      `$stop`, `$time`</a:t>
+            </a:r>
+          </a:p>
+          <a:p>
+            <a:pPr>
+              <a:lnSpc>
+                <a:spcPts val="2200"/>
+              </a:lnSpc>
+              <a:spcAft>
+                <a:spcPts val="1000"/>
+              </a:spcAft>
+              <a:defRPr sz="2000" b="0">
+                <a:solidFill>
+                  <a:srgbClr val="333333"/>
+                </a:solidFill>
+                <a:latin typeface="Calibri"/>
+              </a:defRPr>
+            </a:pPr>
+            <a:r>
+              <a:t>• No ANSI-style port declarations (added in 1364-2001)</a:t>
+            </a:r>
+          </a:p>
+          <a:p>
+            <a:pPr>
+              <a:lnSpc>
+                <a:spcPts val="2200"/>
+              </a:lnSpc>
+              <a:spcAft>
+                <a:spcPts val="1000"/>
+              </a:spcAft>
+              <a:defRPr sz="2000" b="0">
+                <a:solidFill>
+                  <a:srgbClr val="333333"/>
+                </a:solidFill>
+                <a:latin typeface="Calibri"/>
+              </a:defRPr>
+            </a:pPr>
+            <a:r>
+              <a:t>• No **`always @*`** (added in 1364-2001)</a:t>
+            </a:r>
+          </a:p>
+          <a:p>
+            <a:pPr>
+              <a:lnSpc>
+                <a:spcPts val="2200"/>
+              </a:lnSpc>
+              <a:spcAft>
+                <a:spcPts val="1000"/>
+              </a:spcAft>
+              <a:defRPr sz="2000" b="0">
+                <a:solidFill>
+                  <a:srgbClr val="333333"/>
+                </a:solidFill>
+                <a:latin typeface="Calibri"/>
+              </a:defRPr>
+            </a:pPr>
+            <a:r>
+              <a:t>• No generate (added in 1364-2001)</a:t>
+            </a:r>
+          </a:p>
+          <a:p>
+            <a:pPr>
+              <a:lnSpc>
+                <a:spcPts val="2200"/>
+              </a:lnSpc>
+              <a:spcAft>
+                <a:spcPts val="1000"/>
+              </a:spcAft>
+              <a:defRPr sz="2000" b="0">
+                <a:solidFill>
+                  <a:srgbClr val="333333"/>
+                </a:solidFill>
+                <a:latin typeface="Calibri"/>
+              </a:defRPr>
+            </a:pPr>
+            <a:r>
+              <a:t>• No signed keyword, no multi-dimensional arrays</a:t>
+            </a:r>
+          </a:p>
+          <a:p>
+            <a:pPr>
+              <a:lnSpc>
+                <a:spcPts val="2200"/>
+              </a:lnSpc>
+              <a:spcAft>
+                <a:spcPts val="1000"/>
+              </a:spcAft>
+              <a:defRPr sz="2000" b="0">
+                <a:solidFill>
+                  <a:srgbClr val="333333"/>
+                </a:solidFill>
+                <a:latin typeface="Calibri"/>
+              </a:defRPr>
+            </a:pPr>
+            <a:r>
+              <a:t>      (1364-2001)</a:t>
             </a:r>
           </a:p>
         </p:txBody>
@@ -5671,7 +6970,7 @@
               </a:defRPr>
             </a:pPr>
             <a:r>
-              <a:t>3. Nets and Variables: wire and reg (2/2)</a:t>
+              <a:t>1. IEEE 1364-1995 Context (3/3)</a:t>
             </a:r>
           </a:p>
         </p:txBody>
@@ -5713,26 +7012,26 @@
               </a:defRPr>
             </a:pPr>
             <a:r>
-              <a:t>• Both `wire` and `reg` are 4-state: `0`, `1`, `X`</a:t>
-            </a:r>
-          </a:p>
-          <a:p>
-            <a:pPr>
-              <a:lnSpc>
-                <a:spcPts val="2200"/>
-              </a:lnSpc>
-              <a:spcAft>
-                <a:spcPts val="1000"/>
-              </a:spcAft>
-              <a:defRPr sz="2000" b="0">
-                <a:solidFill>
-                  <a:srgbClr val="333333"/>
-                </a:solidFill>
-                <a:latin typeface="Calibri"/>
-              </a:defRPr>
-            </a:pPr>
-            <a:r>
-              <a:t>      (unknown), `Z` (high-impedance).</a:t>
+              <a:t>• No SystemVerilog: no `logic`, `always_comb`,</a:t>
+            </a:r>
+          </a:p>
+          <a:p>
+            <a:pPr>
+              <a:lnSpc>
+                <a:spcPts val="2200"/>
+              </a:lnSpc>
+              <a:spcAft>
+                <a:spcPts val="1000"/>
+              </a:spcAft>
+              <a:defRPr sz="2000" b="0">
+                <a:solidFill>
+                  <a:srgbClr val="333333"/>
+                </a:solidFill>
+                <a:latin typeface="Calibri"/>
+              </a:defRPr>
+            </a:pPr>
+            <a:r>
+              <a:t>      `always_ff`, interfaces, packages</a:t>
             </a:r>
           </a:p>
         </p:txBody>
@@ -5828,7 +7127,7 @@
               </a:defRPr>
             </a:pPr>
             <a:r>
-              <a:t>4. Continuous Assignment (assign)</a:t>
+              <a:t>2. Modules, Ports, and Hierarchy (1364-1995)</a:t>
             </a:r>
           </a:p>
         </p:txBody>
@@ -5870,45 +7169,140 @@
               </a:defRPr>
             </a:pPr>
             <a:r>
-              <a:t>• Right-hand side: Any expression of `wire`/`reg` and</a:t>
-            </a:r>
-          </a:p>
-          <a:p>
-            <a:pPr>
-              <a:lnSpc>
-                <a:spcPts val="2200"/>
-              </a:lnSpc>
-              <a:spcAft>
-                <a:spcPts val="1000"/>
-              </a:spcAft>
-              <a:defRPr sz="2000" b="0">
-                <a:solidFill>
-                  <a:srgbClr val="333333"/>
-                </a:solidFill>
-                <a:latin typeface="Calibri"/>
-              </a:defRPr>
-            </a:pPr>
-            <a:r>
-              <a:t>      operators.</a:t>
-            </a:r>
-          </a:p>
-          <a:p>
-            <a:pPr>
-              <a:lnSpc>
-                <a:spcPts val="2200"/>
-              </a:lnSpc>
-              <a:spcAft>
-                <a:spcPts val="1000"/>
-              </a:spcAft>
-              <a:defRPr sz="2000" b="0">
-                <a:solidFill>
-                  <a:srgbClr val="333333"/>
-                </a:solidFill>
-                <a:latin typeface="Calibri"/>
-              </a:defRPr>
-            </a:pPr>
-            <a:r>
-              <a:t>• Left-hand side: Must be a `wire` (or similar net).</a:t>
+              <a:t>• Port list: Only port names: `(a, b, y)`.</a:t>
+            </a:r>
+          </a:p>
+          <a:p>
+            <a:pPr>
+              <a:lnSpc>
+                <a:spcPts val="2200"/>
+              </a:lnSpc>
+              <a:spcAft>
+                <a:spcPts val="1000"/>
+              </a:spcAft>
+              <a:defRPr sz="2000" b="0">
+                <a:solidFill>
+                  <a:srgbClr val="333333"/>
+                </a:solidFill>
+                <a:latin typeface="Calibri"/>
+              </a:defRPr>
+            </a:pPr>
+            <a:r>
+              <a:t>• Port direction: Declared inside the module: `input`,</a:t>
+            </a:r>
+          </a:p>
+          <a:p>
+            <a:pPr>
+              <a:lnSpc>
+                <a:spcPts val="2200"/>
+              </a:lnSpc>
+              <a:spcAft>
+                <a:spcPts val="1000"/>
+              </a:spcAft>
+              <a:defRPr sz="2000" b="0">
+                <a:solidFill>
+                  <a:srgbClr val="333333"/>
+                </a:solidFill>
+                <a:latin typeface="Calibri"/>
+              </a:defRPr>
+            </a:pPr>
+            <a:r>
+              <a:t>      `output`.</a:t>
+            </a:r>
+          </a:p>
+          <a:p>
+            <a:pPr>
+              <a:lnSpc>
+                <a:spcPts val="2200"/>
+              </a:lnSpc>
+              <a:spcAft>
+                <a:spcPts val="1000"/>
+              </a:spcAft>
+              <a:defRPr sz="2000" b="0">
+                <a:solidFill>
+                  <a:srgbClr val="333333"/>
+                </a:solidFill>
+                <a:latin typeface="Calibri"/>
+              </a:defRPr>
+            </a:pPr>
+            <a:r>
+              <a:t>• Port type: Declared inside the module: `wire` or</a:t>
+            </a:r>
+          </a:p>
+          <a:p>
+            <a:pPr>
+              <a:lnSpc>
+                <a:spcPts val="2200"/>
+              </a:lnSpc>
+              <a:spcAft>
+                <a:spcPts val="1000"/>
+              </a:spcAft>
+              <a:defRPr sz="2000" b="0">
+                <a:solidFill>
+                  <a:srgbClr val="333333"/>
+                </a:solidFill>
+                <a:latin typeface="Calibri"/>
+              </a:defRPr>
+            </a:pPr>
+            <a:r>
+              <a:t>      `reg` (default for `input` is `wire`; for `output`…</a:t>
+            </a:r>
+          </a:p>
+          <a:p>
+            <a:pPr>
+              <a:lnSpc>
+                <a:spcPts val="2200"/>
+              </a:lnSpc>
+              <a:spcAft>
+                <a:spcPts val="1000"/>
+              </a:spcAft>
+              <a:defRPr sz="2000" b="0">
+                <a:solidFill>
+                  <a:srgbClr val="333333"/>
+                </a:solidFill>
+                <a:latin typeface="Calibri"/>
+              </a:defRPr>
+            </a:pPr>
+            <a:r>
+              <a:t>• Named port connection: `.port_name(signal_name)` —</a:t>
+            </a:r>
+          </a:p>
+          <a:p>
+            <a:pPr>
+              <a:lnSpc>
+                <a:spcPts val="2200"/>
+              </a:lnSpc>
+              <a:spcAft>
+                <a:spcPts val="1000"/>
+              </a:spcAft>
+              <a:defRPr sz="2000" b="0">
+                <a:solidFill>
+                  <a:srgbClr val="333333"/>
+                </a:solidFill>
+                <a:latin typeface="Calibri"/>
+              </a:defRPr>
+            </a:pPr>
+            <a:r>
+              <a:t>      recommended for readability.</a:t>
+            </a:r>
+          </a:p>
+          <a:p>
+            <a:pPr>
+              <a:lnSpc>
+                <a:spcPts val="2200"/>
+              </a:lnSpc>
+              <a:spcAft>
+                <a:spcPts val="1000"/>
+              </a:spcAft>
+              <a:defRPr sz="2000" b="0">
+                <a:solidFill>
+                  <a:srgbClr val="333333"/>
+                </a:solidFill>
+                <a:latin typeface="Calibri"/>
+              </a:defRPr>
+            </a:pPr>
+            <a:r>
+              <a:t>• Positional: Order must match port list.</a:t>
             </a:r>
           </a:p>
         </p:txBody>
@@ -6004,7 +7398,7 @@
               </a:defRPr>
             </a:pPr>
             <a:r>
-              <a:t>5. Procedural Blocks: always and initial (1364-1995)</a:t>
+              <a:t>3. Nets and Variables: wire and reg (1/2)</a:t>
             </a:r>
           </a:p>
         </p:txBody>
@@ -6046,178 +7440,178 @@
               </a:defRPr>
             </a:pPr>
             <a:r>
-              <a:t>• Repeated execution; sensitivity list defines when it</a:t>
-            </a:r>
-          </a:p>
-          <a:p>
-            <a:pPr>
-              <a:lnSpc>
-                <a:spcPts val="2200"/>
-              </a:lnSpc>
-              <a:spcAft>
-                <a:spcPts val="1000"/>
-              </a:spcAft>
-              <a:defRPr sz="2000" b="0">
-                <a:solidFill>
-                  <a:srgbClr val="333333"/>
-                </a:solidFill>
-                <a:latin typeface="Calibri"/>
-              </a:defRPr>
-            </a:pPr>
-            <a:r>
-              <a:t>      runs.</a:t>
-            </a:r>
-          </a:p>
-          <a:p>
-            <a:pPr>
-              <a:lnSpc>
-                <a:spcPts val="2200"/>
-              </a:lnSpc>
-              <a:spcAft>
-                <a:spcPts val="1000"/>
-              </a:spcAft>
-              <a:defRPr sz="2000" b="0">
-                <a:solidFill>
-                  <a:srgbClr val="333333"/>
-                </a:solidFill>
-                <a:latin typeface="Calibri"/>
-              </a:defRPr>
-            </a:pPr>
-            <a:r>
-              <a:t>• 1364-1995: Sensitivity list is mandatory and</a:t>
-            </a:r>
-          </a:p>
-          <a:p>
-            <a:pPr>
-              <a:lnSpc>
-                <a:spcPts val="2200"/>
-              </a:lnSpc>
-              <a:spcAft>
-                <a:spcPts val="1000"/>
-              </a:spcAft>
-              <a:defRPr sz="2000" b="0">
-                <a:solidFill>
-                  <a:srgbClr val="333333"/>
-                </a:solidFill>
-                <a:latin typeface="Calibri"/>
-              </a:defRPr>
-            </a:pPr>
-            <a:r>
-              <a:t>      explicit — no `@*`.</a:t>
-            </a:r>
-          </a:p>
-          <a:p>
-            <a:pPr>
-              <a:lnSpc>
-                <a:spcPts val="2200"/>
-              </a:lnSpc>
-              <a:spcAft>
-                <a:spcPts val="1000"/>
-              </a:spcAft>
-              <a:defRPr sz="2000" b="0">
-                <a:solidFill>
-                  <a:srgbClr val="333333"/>
-                </a:solidFill>
-                <a:latin typeface="Calibri"/>
-              </a:defRPr>
-            </a:pPr>
-            <a:r>
-              <a:t>• Use blocking `=` for combinational, nonblocking `&lt;=`</a:t>
-            </a:r>
-          </a:p>
-          <a:p>
-            <a:pPr>
-              <a:lnSpc>
-                <a:spcPts val="2200"/>
-              </a:lnSpc>
-              <a:spcAft>
-                <a:spcPts val="1000"/>
-              </a:spcAft>
-              <a:defRPr sz="2000" b="0">
-                <a:solidFill>
-                  <a:srgbClr val="333333"/>
-                </a:solidFill>
-                <a:latin typeface="Calibri"/>
-              </a:defRPr>
-            </a:pPr>
-            <a:r>
-              <a:t>      for sequential (flip-flops).</a:t>
-            </a:r>
-          </a:p>
-          <a:p>
-            <a:pPr>
-              <a:lnSpc>
-                <a:spcPts val="2200"/>
-              </a:lnSpc>
-              <a:spcAft>
-                <a:spcPts val="1000"/>
-              </a:spcAft>
-              <a:defRPr sz="2000" b="0">
-                <a:solidFill>
-                  <a:srgbClr val="333333"/>
-                </a:solidFill>
-                <a:latin typeface="Calibri"/>
-              </a:defRPr>
-            </a:pPr>
-            <a:r>
-              <a:t>• Example (D flip-flop):</a:t>
-            </a:r>
-          </a:p>
-          <a:p>
-            <a:pPr>
-              <a:lnSpc>
-                <a:spcPts val="2200"/>
-              </a:lnSpc>
-              <a:spcAft>
-                <a:spcPts val="1000"/>
-              </a:spcAft>
-              <a:defRPr sz="2000" b="0">
-                <a:solidFill>
-                  <a:srgbClr val="333333"/>
-                </a:solidFill>
-                <a:latin typeface="Calibri"/>
-              </a:defRPr>
-            </a:pPr>
-            <a:r>
-              <a:t>      `module1/examples/sequential_dff/dff.v`</a:t>
-            </a:r>
-          </a:p>
-          <a:p>
-            <a:pPr>
-              <a:lnSpc>
-                <a:spcPts val="2200"/>
-              </a:lnSpc>
-              <a:spcAft>
-                <a:spcPts val="1000"/>
-              </a:spcAft>
-              <a:defRPr sz="2000" b="0">
-                <a:solidFill>
-                  <a:srgbClr val="333333"/>
-                </a:solidFill>
-                <a:latin typeface="Calibri"/>
-              </a:defRPr>
-            </a:pPr>
-            <a:r>
-              <a:t>• Runs once at time zero. Used for testbenches:</a:t>
-            </a:r>
-          </a:p>
-          <a:p>
-            <a:pPr>
-              <a:lnSpc>
-                <a:spcPts val="2200"/>
-              </a:lnSpc>
-              <a:spcAft>
-                <a:spcPts val="1000"/>
-              </a:spcAft>
-              <a:defRPr sz="2000" b="0">
-                <a:solidFill>
-                  <a:srgbClr val="333333"/>
-                </a:solidFill>
-                <a:latin typeface="Calibri"/>
-              </a:defRPr>
-            </a:pPr>
-            <a:r>
-              <a:t>      stimulus, `$display`, `$finish`.</a:t>
+              <a:t>• Represents a physical connection between components.</a:t>
+            </a:r>
+          </a:p>
+          <a:p>
+            <a:pPr>
+              <a:lnSpc>
+                <a:spcPts val="2200"/>
+              </a:lnSpc>
+              <a:spcAft>
+                <a:spcPts val="1000"/>
+              </a:spcAft>
+              <a:defRPr sz="2000" b="0">
+                <a:solidFill>
+                  <a:srgbClr val="333333"/>
+                </a:solidFill>
+                <a:latin typeface="Calibri"/>
+              </a:defRPr>
+            </a:pPr>
+            <a:r>
+              <a:t>• Driven by continuous assignment (`assign`) or by</a:t>
+            </a:r>
+          </a:p>
+          <a:p>
+            <a:pPr>
+              <a:lnSpc>
+                <a:spcPts val="2200"/>
+              </a:lnSpc>
+              <a:spcAft>
+                <a:spcPts val="1000"/>
+              </a:spcAft>
+              <a:defRPr sz="2000" b="0">
+                <a:solidFill>
+                  <a:srgbClr val="333333"/>
+                </a:solidFill>
+                <a:latin typeface="Calibri"/>
+              </a:defRPr>
+            </a:pPr>
+            <a:r>
+              <a:t>      module output.</a:t>
+            </a:r>
+          </a:p>
+          <a:p>
+            <a:pPr>
+              <a:lnSpc>
+                <a:spcPts val="2200"/>
+              </a:lnSpc>
+              <a:spcAft>
+                <a:spcPts val="1000"/>
+              </a:spcAft>
+              <a:defRPr sz="2000" b="0">
+                <a:solidFill>
+                  <a:srgbClr val="333333"/>
+                </a:solidFill>
+                <a:latin typeface="Calibri"/>
+              </a:defRPr>
+            </a:pPr>
+            <a:r>
+              <a:t>• Cannot be assigned inside `always` or `initial` (use</a:t>
+            </a:r>
+          </a:p>
+          <a:p>
+            <a:pPr>
+              <a:lnSpc>
+                <a:spcPts val="2200"/>
+              </a:lnSpc>
+              <a:spcAft>
+                <a:spcPts val="1000"/>
+              </a:spcAft>
+              <a:defRPr sz="2000" b="0">
+                <a:solidFill>
+                  <a:srgbClr val="333333"/>
+                </a:solidFill>
+                <a:latin typeface="Calibri"/>
+              </a:defRPr>
+            </a:pPr>
+            <a:r>
+              <a:t>      `reg` for that).</a:t>
+            </a:r>
+          </a:p>
+          <a:p>
+            <a:pPr>
+              <a:lnSpc>
+                <a:spcPts val="2200"/>
+              </a:lnSpc>
+              <a:spcAft>
+                <a:spcPts val="1000"/>
+              </a:spcAft>
+              <a:defRPr sz="2000" b="0">
+                <a:solidFill>
+                  <a:srgbClr val="333333"/>
+                </a:solidFill>
+                <a:latin typeface="Calibri"/>
+              </a:defRPr>
+            </a:pPr>
+            <a:r>
+              <a:t>• Holds a value; can be assigned in `always` or</a:t>
+            </a:r>
+          </a:p>
+          <a:p>
+            <a:pPr>
+              <a:lnSpc>
+                <a:spcPts val="2200"/>
+              </a:lnSpc>
+              <a:spcAft>
+                <a:spcPts val="1000"/>
+              </a:spcAft>
+              <a:defRPr sz="2000" b="0">
+                <a:solidFill>
+                  <a:srgbClr val="333333"/>
+                </a:solidFill>
+                <a:latin typeface="Calibri"/>
+              </a:defRPr>
+            </a:pPr>
+            <a:r>
+              <a:t>      `initial`.</a:t>
+            </a:r>
+          </a:p>
+          <a:p>
+            <a:pPr>
+              <a:lnSpc>
+                <a:spcPts val="2200"/>
+              </a:lnSpc>
+              <a:spcAft>
+                <a:spcPts val="1000"/>
+              </a:spcAft>
+              <a:defRPr sz="2000" b="0">
+                <a:solidFill>
+                  <a:srgbClr val="333333"/>
+                </a:solidFill>
+                <a:latin typeface="Calibri"/>
+              </a:defRPr>
+            </a:pPr>
+            <a:r>
+              <a:t>• Does not imply a flip-flop; flip-flops come from</a:t>
+            </a:r>
+          </a:p>
+          <a:p>
+            <a:pPr>
+              <a:lnSpc>
+                <a:spcPts val="2200"/>
+              </a:lnSpc>
+              <a:spcAft>
+                <a:spcPts val="1000"/>
+              </a:spcAft>
+              <a:defRPr sz="2000" b="0">
+                <a:solidFill>
+                  <a:srgbClr val="333333"/>
+                </a:solidFill>
+                <a:latin typeface="Calibri"/>
+              </a:defRPr>
+            </a:pPr>
+            <a:r>
+              <a:t>      `always @(posedge clk)` (or similar).</a:t>
+            </a:r>
+          </a:p>
+          <a:p>
+            <a:pPr>
+              <a:lnSpc>
+                <a:spcPts val="2200"/>
+              </a:lnSpc>
+              <a:spcAft>
+                <a:spcPts val="1000"/>
+              </a:spcAft>
+              <a:defRPr sz="2000" b="0">
+                <a:solidFill>
+                  <a:srgbClr val="333333"/>
+                </a:solidFill>
+                <a:latin typeface="Calibri"/>
+              </a:defRPr>
+            </a:pPr>
+            <a:r>
+              <a:t>• Used for outputs that are driven procedurally.</a:t>
             </a:r>
           </a:p>
         </p:txBody>
@@ -6313,7 +7707,7 @@
               </a:defRPr>
             </a:pPr>
             <a:r>
-              <a:t>6. Delays and Timing</a:t>
+              <a:t>3. Nets and Variables: wire and reg (2/2)</a:t>
             </a:r>
           </a:p>
         </p:txBody>
@@ -6355,45 +7749,26 @@
               </a:defRPr>
             </a:pPr>
             <a:r>
-              <a:t>• `#n`: Delay by `n` time units (e.g. `#10`).</a:t>
-            </a:r>
-          </a:p>
-          <a:p>
-            <a:pPr>
-              <a:lnSpc>
-                <a:spcPts val="2200"/>
-              </a:lnSpc>
-              <a:spcAft>
-                <a:spcPts val="1000"/>
-              </a:spcAft>
-              <a:defRPr sz="2000" b="0">
-                <a:solidFill>
-                  <a:srgbClr val="333333"/>
-                </a:solidFill>
-                <a:latin typeface="Calibri"/>
-              </a:defRPr>
-            </a:pPr>
-            <a:r>
-              <a:t>• `@(event)`: Wait for event (e.g. `@(posedge clk)`).</a:t>
-            </a:r>
-          </a:p>
-          <a:p>
-            <a:pPr>
-              <a:lnSpc>
-                <a:spcPts val="2200"/>
-              </a:lnSpc>
-              <a:spcAft>
-                <a:spcPts val="1000"/>
-              </a:spcAft>
-              <a:defRPr sz="2000" b="0">
-                <a:solidFill>
-                  <a:srgbClr val="333333"/>
-                </a:solidFill>
-                <a:latin typeface="Calibri"/>
-              </a:defRPr>
-            </a:pPr>
-            <a:r>
-              <a:t>• `wait(condition)`: Wait until condition is true.</a:t>
+              <a:t>• Both `wire` and `reg` are 4-state: `0`, `1`, `X`</a:t>
+            </a:r>
+          </a:p>
+          <a:p>
+            <a:pPr>
+              <a:lnSpc>
+                <a:spcPts val="2200"/>
+              </a:lnSpc>
+              <a:spcAft>
+                <a:spcPts val="1000"/>
+              </a:spcAft>
+              <a:defRPr sz="2000" b="0">
+                <a:solidFill>
+                  <a:srgbClr val="333333"/>
+                </a:solidFill>
+                <a:latin typeface="Calibri"/>
+              </a:defRPr>
+            </a:pPr>
+            <a:r>
+              <a:t>      (unknown), `Z` (high-impedance).</a:t>
             </a:r>
           </a:p>
         </p:txBody>
@@ -6489,7 +7864,7 @@
               </a:defRPr>
             </a:pPr>
             <a:r>
-              <a:t>7. Tasks and Functions (1995 Style)</a:t>
+              <a:t>4. Continuous Assignment (assign)</a:t>
             </a:r>
           </a:p>
         </p:txBody>
@@ -6531,64 +7906,45 @@
               </a:defRPr>
             </a:pPr>
             <a:r>
-              <a:t>• Function: Returns a single value; no delays (zero-</a:t>
-            </a:r>
-          </a:p>
-          <a:p>
-            <a:pPr>
-              <a:lnSpc>
-                <a:spcPts val="2200"/>
-              </a:lnSpc>
-              <a:spcAft>
-                <a:spcPts val="1000"/>
-              </a:spcAft>
-              <a:defRPr sz="2000" b="0">
-                <a:solidFill>
-                  <a:srgbClr val="333333"/>
-                </a:solidFill>
-                <a:latin typeface="Calibri"/>
-              </a:defRPr>
-            </a:pPr>
-            <a:r>
-              <a:t>      time).</a:t>
-            </a:r>
-          </a:p>
-          <a:p>
-            <a:pPr>
-              <a:lnSpc>
-                <a:spcPts val="2200"/>
-              </a:lnSpc>
-              <a:spcAft>
-                <a:spcPts val="1000"/>
-              </a:spcAft>
-              <a:defRPr sz="2000" b="0">
-                <a:solidFill>
-                  <a:srgbClr val="333333"/>
-                </a:solidFill>
-                <a:latin typeface="Calibri"/>
-              </a:defRPr>
-            </a:pPr>
-            <a:r>
-              <a:t>• Task: Can have delays and multiple outputs</a:t>
-            </a:r>
-          </a:p>
-          <a:p>
-            <a:pPr>
-              <a:lnSpc>
-                <a:spcPts val="2200"/>
-              </a:lnSpc>
-              <a:spcAft>
-                <a:spcPts val="1000"/>
-              </a:spcAft>
-              <a:defRPr sz="2000" b="0">
-                <a:solidFill>
-                  <a:srgbClr val="333333"/>
-                </a:solidFill>
-                <a:latin typeface="Calibri"/>
-              </a:defRPr>
-            </a:pPr>
-            <a:r>
-              <a:t>      (output/inout args).</a:t>
+              <a:t>• Right-hand side: Any expression of `wire`/`reg` and</a:t>
+            </a:r>
+          </a:p>
+          <a:p>
+            <a:pPr>
+              <a:lnSpc>
+                <a:spcPts val="2200"/>
+              </a:lnSpc>
+              <a:spcAft>
+                <a:spcPts val="1000"/>
+              </a:spcAft>
+              <a:defRPr sz="2000" b="0">
+                <a:solidFill>
+                  <a:srgbClr val="333333"/>
+                </a:solidFill>
+                <a:latin typeface="Calibri"/>
+              </a:defRPr>
+            </a:pPr>
+            <a:r>
+              <a:t>      operators.</a:t>
+            </a:r>
+          </a:p>
+          <a:p>
+            <a:pPr>
+              <a:lnSpc>
+                <a:spcPts val="2200"/>
+              </a:lnSpc>
+              <a:spcAft>
+                <a:spcPts val="1000"/>
+              </a:spcAft>
+              <a:defRPr sz="2000" b="0">
+                <a:solidFill>
+                  <a:srgbClr val="333333"/>
+                </a:solidFill>
+                <a:latin typeface="Calibri"/>
+              </a:defRPr>
+            </a:pPr>
+            <a:r>
+              <a:t>• Left-hand side: Must be a `wire` (or similar net).</a:t>
             </a:r>
           </a:p>
         </p:txBody>
@@ -6684,7 +8040,7 @@
               </a:defRPr>
             </a:pPr>
             <a:r>
-              <a:t>8. Simple Testbench (1364-1995)</a:t>
+              <a:t>5. Procedural Blocks: always and initial (1364-1995)</a:t>
             </a:r>
           </a:p>
         </p:txBody>
@@ -6726,64 +8082,178 @@
               </a:defRPr>
             </a:pPr>
             <a:r>
-              <a:t>• `$display`: Print once.</a:t>
-            </a:r>
-          </a:p>
-          <a:p>
-            <a:pPr>
-              <a:lnSpc>
-                <a:spcPts val="2200"/>
-              </a:lnSpc>
-              <a:spcAft>
-                <a:spcPts val="1000"/>
-              </a:spcAft>
-              <a:defRPr sz="2000" b="0">
-                <a:solidFill>
-                  <a:srgbClr val="333333"/>
-                </a:solidFill>
-                <a:latin typeface="Calibri"/>
-              </a:defRPr>
-            </a:pPr>
-            <a:r>
-              <a:t>• `$monitor`: Print whenever a listed signal changes</a:t>
-            </a:r>
-          </a:p>
-          <a:p>
-            <a:pPr>
-              <a:lnSpc>
-                <a:spcPts val="2200"/>
-              </a:lnSpc>
-              <a:spcAft>
-                <a:spcPts val="1000"/>
-              </a:spcAft>
-              <a:defRPr sz="2000" b="0">
-                <a:solidFill>
-                  <a:srgbClr val="333333"/>
-                </a:solidFill>
-                <a:latin typeface="Calibri"/>
-              </a:defRPr>
-            </a:pPr>
-            <a:r>
-              <a:t>      (optional).</a:t>
-            </a:r>
-          </a:p>
-          <a:p>
-            <a:pPr>
-              <a:lnSpc>
-                <a:spcPts val="2200"/>
-              </a:lnSpc>
-              <a:spcAft>
-                <a:spcPts val="1000"/>
-              </a:spcAft>
-              <a:defRPr sz="2000" b="0">
-                <a:solidFill>
-                  <a:srgbClr val="333333"/>
-                </a:solidFill>
-                <a:latin typeface="Calibri"/>
-              </a:defRPr>
-            </a:pPr>
-            <a:r>
-              <a:t>• `$finish`: End simulation.</a:t>
+              <a:t>• Repeated execution; sensitivity list defines when it</a:t>
+            </a:r>
+          </a:p>
+          <a:p>
+            <a:pPr>
+              <a:lnSpc>
+                <a:spcPts val="2200"/>
+              </a:lnSpc>
+              <a:spcAft>
+                <a:spcPts val="1000"/>
+              </a:spcAft>
+              <a:defRPr sz="2000" b="0">
+                <a:solidFill>
+                  <a:srgbClr val="333333"/>
+                </a:solidFill>
+                <a:latin typeface="Calibri"/>
+              </a:defRPr>
+            </a:pPr>
+            <a:r>
+              <a:t>      runs.</a:t>
+            </a:r>
+          </a:p>
+          <a:p>
+            <a:pPr>
+              <a:lnSpc>
+                <a:spcPts val="2200"/>
+              </a:lnSpc>
+              <a:spcAft>
+                <a:spcPts val="1000"/>
+              </a:spcAft>
+              <a:defRPr sz="2000" b="0">
+                <a:solidFill>
+                  <a:srgbClr val="333333"/>
+                </a:solidFill>
+                <a:latin typeface="Calibri"/>
+              </a:defRPr>
+            </a:pPr>
+            <a:r>
+              <a:t>• 1364-1995: Sensitivity list is mandatory and</a:t>
+            </a:r>
+          </a:p>
+          <a:p>
+            <a:pPr>
+              <a:lnSpc>
+                <a:spcPts val="2200"/>
+              </a:lnSpc>
+              <a:spcAft>
+                <a:spcPts val="1000"/>
+              </a:spcAft>
+              <a:defRPr sz="2000" b="0">
+                <a:solidFill>
+                  <a:srgbClr val="333333"/>
+                </a:solidFill>
+                <a:latin typeface="Calibri"/>
+              </a:defRPr>
+            </a:pPr>
+            <a:r>
+              <a:t>      explicit — no `@*`.</a:t>
+            </a:r>
+          </a:p>
+          <a:p>
+            <a:pPr>
+              <a:lnSpc>
+                <a:spcPts val="2200"/>
+              </a:lnSpc>
+              <a:spcAft>
+                <a:spcPts val="1000"/>
+              </a:spcAft>
+              <a:defRPr sz="2000" b="0">
+                <a:solidFill>
+                  <a:srgbClr val="333333"/>
+                </a:solidFill>
+                <a:latin typeface="Calibri"/>
+              </a:defRPr>
+            </a:pPr>
+            <a:r>
+              <a:t>• Use blocking `=` for combinational, nonblocking `&lt;=`</a:t>
+            </a:r>
+          </a:p>
+          <a:p>
+            <a:pPr>
+              <a:lnSpc>
+                <a:spcPts val="2200"/>
+              </a:lnSpc>
+              <a:spcAft>
+                <a:spcPts val="1000"/>
+              </a:spcAft>
+              <a:defRPr sz="2000" b="0">
+                <a:solidFill>
+                  <a:srgbClr val="333333"/>
+                </a:solidFill>
+                <a:latin typeface="Calibri"/>
+              </a:defRPr>
+            </a:pPr>
+            <a:r>
+              <a:t>      for sequential (flip-flops).</a:t>
+            </a:r>
+          </a:p>
+          <a:p>
+            <a:pPr>
+              <a:lnSpc>
+                <a:spcPts val="2200"/>
+              </a:lnSpc>
+              <a:spcAft>
+                <a:spcPts val="1000"/>
+              </a:spcAft>
+              <a:defRPr sz="2000" b="0">
+                <a:solidFill>
+                  <a:srgbClr val="333333"/>
+                </a:solidFill>
+                <a:latin typeface="Calibri"/>
+              </a:defRPr>
+            </a:pPr>
+            <a:r>
+              <a:t>• Example (D flip-flop):</a:t>
+            </a:r>
+          </a:p>
+          <a:p>
+            <a:pPr>
+              <a:lnSpc>
+                <a:spcPts val="2200"/>
+              </a:lnSpc>
+              <a:spcAft>
+                <a:spcPts val="1000"/>
+              </a:spcAft>
+              <a:defRPr sz="2000" b="0">
+                <a:solidFill>
+                  <a:srgbClr val="333333"/>
+                </a:solidFill>
+                <a:latin typeface="Calibri"/>
+              </a:defRPr>
+            </a:pPr>
+            <a:r>
+              <a:t>      `module1/examples/sequential_dff/dff.v`</a:t>
+            </a:r>
+          </a:p>
+          <a:p>
+            <a:pPr>
+              <a:lnSpc>
+                <a:spcPts val="2200"/>
+              </a:lnSpc>
+              <a:spcAft>
+                <a:spcPts val="1000"/>
+              </a:spcAft>
+              <a:defRPr sz="2000" b="0">
+                <a:solidFill>
+                  <a:srgbClr val="333333"/>
+                </a:solidFill>
+                <a:latin typeface="Calibri"/>
+              </a:defRPr>
+            </a:pPr>
+            <a:r>
+              <a:t>• Runs once at time zero. Used for testbenches:</a:t>
+            </a:r>
+          </a:p>
+          <a:p>
+            <a:pPr>
+              <a:lnSpc>
+                <a:spcPts val="2200"/>
+              </a:lnSpc>
+              <a:spcAft>
+                <a:spcPts val="1000"/>
+              </a:spcAft>
+              <a:defRPr sz="2000" b="0">
+                <a:solidFill>
+                  <a:srgbClr val="333333"/>
+                </a:solidFill>
+                <a:latin typeface="Calibri"/>
+              </a:defRPr>
+            </a:pPr>
+            <a:r>
+              <a:t>      stimulus, `$display`, `$finish`.</a:t>
             </a:r>
           </a:p>
         </p:txBody>
@@ -6853,8 +8323,8 @@
         </p:nvSpPr>
         <p:spPr>
           <a:xfrm>
-            <a:off x="548640" y="2743200"/>
-            <a:ext cx="11064240" cy="1371600"/>
+            <a:off x="548640" y="411480"/>
+            <a:ext cx="11064240" cy="777240"/>
           </a:xfrm>
           <a:prstGeom prst="rect">
             <a:avLst/>
@@ -6867,11 +8337,11 @@
           </a:bodyPr>
           <a:lstStyle/>
           <a:p>
-            <a:pPr algn="ctr">
-              <a:lnSpc>
-                <a:spcPts val="2200"/>
-              </a:lnSpc>
-              <a:defRPr sz="3600" b="1">
+            <a:pPr>
+              <a:lnSpc>
+                <a:spcPts val="2200"/>
+              </a:lnSpc>
+              <a:defRPr sz="2800" b="1">
                 <a:solidFill>
                   <a:srgbClr val="1A1A2E"/>
                 </a:solidFill>
@@ -6879,7 +8349,7 @@
               </a:defRPr>
             </a:pPr>
             <a:r>
-              <a:t>Hands-on examples</a:t>
+              <a:t>6. Delays and Timing</a:t>
             </a:r>
           </a:p>
         </p:txBody>
@@ -6887,6 +8357,86 @@
       <p:sp>
         <p:nvSpPr>
           <p:cNvPr id="3" name="TextBox 2"/>
+          <p:cNvSpPr txBox="1"/>
+          <p:nvPr/>
+        </p:nvSpPr>
+        <p:spPr>
+          <a:xfrm>
+            <a:off x="548640" y="1234440"/>
+            <a:ext cx="11064240" cy="4937760"/>
+          </a:xfrm>
+          <a:prstGeom prst="rect">
+            <a:avLst/>
+          </a:prstGeom>
+          <a:noFill/>
+        </p:spPr>
+        <p:txBody>
+          <a:bodyPr wrap="square">
+            <a:noAutofit/>
+          </a:bodyPr>
+          <a:lstStyle/>
+          <a:p>
+            <a:pPr>
+              <a:lnSpc>
+                <a:spcPts val="2200"/>
+              </a:lnSpc>
+              <a:spcAft>
+                <a:spcPts val="1000"/>
+              </a:spcAft>
+              <a:defRPr sz="2000" b="0">
+                <a:solidFill>
+                  <a:srgbClr val="333333"/>
+                </a:solidFill>
+                <a:latin typeface="Calibri"/>
+              </a:defRPr>
+            </a:pPr>
+            <a:r>
+              <a:t>• `#n`: Delay by `n` time units (e.g. `#10`).</a:t>
+            </a:r>
+          </a:p>
+          <a:p>
+            <a:pPr>
+              <a:lnSpc>
+                <a:spcPts val="2200"/>
+              </a:lnSpc>
+              <a:spcAft>
+                <a:spcPts val="1000"/>
+              </a:spcAft>
+              <a:defRPr sz="2000" b="0">
+                <a:solidFill>
+                  <a:srgbClr val="333333"/>
+                </a:solidFill>
+                <a:latin typeface="Calibri"/>
+              </a:defRPr>
+            </a:pPr>
+            <a:r>
+              <a:t>• `@(event)`: Wait for event (e.g. `@(posedge clk)`).</a:t>
+            </a:r>
+          </a:p>
+          <a:p>
+            <a:pPr>
+              <a:lnSpc>
+                <a:spcPts val="2200"/>
+              </a:lnSpc>
+              <a:spcAft>
+                <a:spcPts val="1000"/>
+              </a:spcAft>
+              <a:defRPr sz="2000" b="0">
+                <a:solidFill>
+                  <a:srgbClr val="333333"/>
+                </a:solidFill>
+                <a:latin typeface="Calibri"/>
+              </a:defRPr>
+            </a:pPr>
+            <a:r>
+              <a:t>• `wait(condition)`: Wait until condition is true.</a:t>
+            </a:r>
+          </a:p>
+        </p:txBody>
+      </p:sp>
+      <p:sp>
+        <p:nvSpPr>
+          <p:cNvPr id="4" name="TextBox 3"/>
           <p:cNvSpPr txBox="1"/>
           <p:nvPr/>
         </p:nvSpPr>
@@ -6975,7 +8525,7 @@
               </a:defRPr>
             </a:pPr>
             <a:r>
-              <a:t>Module 1 toolchain check</a:t>
+              <a:t>7. Tasks and Functions (1995 Style)</a:t>
             </a:r>
           </a:p>
         </p:txBody>
@@ -6988,15 +8538,13 @@
         </p:nvSpPr>
         <p:spPr>
           <a:xfrm>
-            <a:off x="548640" y="1051560"/>
-            <a:ext cx="11064240" cy="914400"/>
-          </a:xfrm>
-          <a:prstGeom prst="rect">
-            <a:avLst/>
-          </a:prstGeom>
-          <a:solidFill>
-            <a:srgbClr val="F4F4F4"/>
-          </a:solidFill>
+            <a:off x="548640" y="1234440"/>
+            <a:ext cx="11064240" cy="4937760"/>
+          </a:xfrm>
+          <a:prstGeom prst="rect">
+            <a:avLst/>
+          </a:prstGeom>
+          <a:noFill/>
         </p:spPr>
         <p:txBody>
           <a:bodyPr wrap="square">
@@ -7009,67 +8557,81 @@
                 <a:spcPts val="2200"/>
               </a:lnSpc>
               <a:spcAft>
-                <a:spcPts val="200"/>
-              </a:spcAft>
-              <a:defRPr sz="2000" b="0">
-                <a:solidFill>
-                  <a:srgbClr val="333333"/>
-                </a:solidFill>
-                <a:latin typeface="Consolas"/>
-              </a:defRPr>
-            </a:pPr>
-            <a:r>
-              <a:t>$ command -v iverilog &gt;/dev/null &amp;&amp; echo "Toolchain ready: $(iverilog</a:t>
-            </a:r>
-          </a:p>
-          <a:p>
-            <a:pPr>
-              <a:lnSpc>
-                <a:spcPts val="2200"/>
-              </a:lnSpc>
-              <a:spcAft>
-                <a:spcPts val="200"/>
-              </a:spcAft>
-              <a:defRPr sz="2000" b="0">
-                <a:solidFill>
-                  <a:srgbClr val="333333"/>
-                </a:solidFill>
-                <a:latin typeface="Consolas"/>
-              </a:defRPr>
-            </a:pPr>
-            <a:r>
-              <a:t>      -V 2&gt;&amp;1 | head -1)"</a:t>
-            </a:r>
-          </a:p>
-        </p:txBody>
-      </p:sp>
-      <p:pic>
-        <p:nvPicPr>
-          <p:cNvPr id="4" name="Picture 3" descr="module1_check.png"/>
-          <p:cNvPicPr>
-            <a:picLocks noChangeAspect="1"/>
-          </p:cNvPicPr>
-          <p:nvPr/>
-        </p:nvPicPr>
-        <p:blipFill>
-          <a:blip r:embed="rId2"/>
-          <a:stretch>
-            <a:fillRect/>
-          </a:stretch>
-        </p:blipFill>
-        <p:spPr>
-          <a:xfrm>
-            <a:off x="548640" y="1965960"/>
-            <a:ext cx="7071358" cy="3977639"/>
-          </a:xfrm>
-          <a:prstGeom prst="rect">
-            <a:avLst/>
-          </a:prstGeom>
-        </p:spPr>
-      </p:pic>
-      <p:sp>
-        <p:nvSpPr>
-          <p:cNvPr id="5" name="TextBox 4"/>
+                <a:spcPts val="1000"/>
+              </a:spcAft>
+              <a:defRPr sz="2000" b="0">
+                <a:solidFill>
+                  <a:srgbClr val="333333"/>
+                </a:solidFill>
+                <a:latin typeface="Calibri"/>
+              </a:defRPr>
+            </a:pPr>
+            <a:r>
+              <a:t>• Function: Returns a single value; no delays (zero-</a:t>
+            </a:r>
+          </a:p>
+          <a:p>
+            <a:pPr>
+              <a:lnSpc>
+                <a:spcPts val="2200"/>
+              </a:lnSpc>
+              <a:spcAft>
+                <a:spcPts val="1000"/>
+              </a:spcAft>
+              <a:defRPr sz="2000" b="0">
+                <a:solidFill>
+                  <a:srgbClr val="333333"/>
+                </a:solidFill>
+                <a:latin typeface="Calibri"/>
+              </a:defRPr>
+            </a:pPr>
+            <a:r>
+              <a:t>      time).</a:t>
+            </a:r>
+          </a:p>
+          <a:p>
+            <a:pPr>
+              <a:lnSpc>
+                <a:spcPts val="2200"/>
+              </a:lnSpc>
+              <a:spcAft>
+                <a:spcPts val="1000"/>
+              </a:spcAft>
+              <a:defRPr sz="2000" b="0">
+                <a:solidFill>
+                  <a:srgbClr val="333333"/>
+                </a:solidFill>
+                <a:latin typeface="Calibri"/>
+              </a:defRPr>
+            </a:pPr>
+            <a:r>
+              <a:t>• Task: Can have delays and multiple outputs</a:t>
+            </a:r>
+          </a:p>
+          <a:p>
+            <a:pPr>
+              <a:lnSpc>
+                <a:spcPts val="2200"/>
+              </a:lnSpc>
+              <a:spcAft>
+                <a:spcPts val="1000"/>
+              </a:spcAft>
+              <a:defRPr sz="2000" b="0">
+                <a:solidFill>
+                  <a:srgbClr val="333333"/>
+                </a:solidFill>
+                <a:latin typeface="Calibri"/>
+              </a:defRPr>
+            </a:pPr>
+            <a:r>
+              <a:t>      (output/inout args).</a:t>
+            </a:r>
+          </a:p>
+        </p:txBody>
+      </p:sp>
+      <p:sp>
+        <p:nvSpPr>
+          <p:cNvPr id="4" name="TextBox 3"/>
           <p:cNvSpPr txBox="1"/>
           <p:nvPr/>
         </p:nvSpPr>
@@ -7315,7 +8877,7 @@
               </a:defRPr>
             </a:pPr>
             <a:r>
-              <a:t>Demo: Modules and Ports</a:t>
+              <a:t>8. Simple Testbench (1364-1995)</a:t>
             </a:r>
           </a:p>
         </p:txBody>
@@ -7328,15 +8890,13 @@
         </p:nvSpPr>
         <p:spPr>
           <a:xfrm>
-            <a:off x="548640" y="1051560"/>
-            <a:ext cx="11064240" cy="914400"/>
-          </a:xfrm>
-          <a:prstGeom prst="rect">
-            <a:avLst/>
-          </a:prstGeom>
-          <a:solidFill>
-            <a:srgbClr val="F4F4F4"/>
-          </a:solidFill>
+            <a:off x="548640" y="1234440"/>
+            <a:ext cx="11064240" cy="4937760"/>
+          </a:xfrm>
+          <a:prstGeom prst="rect">
+            <a:avLst/>
+          </a:prstGeom>
+          <a:noFill/>
         </p:spPr>
         <p:txBody>
           <a:bodyPr wrap="square">
@@ -7349,48 +8909,81 @@
                 <a:spcPts val="2200"/>
               </a:lnSpc>
               <a:spcAft>
-                <a:spcPts val="200"/>
-              </a:spcAft>
-              <a:defRPr sz="2000" b="0">
-                <a:solidFill>
-                  <a:srgbClr val="333333"/>
-                </a:solidFill>
-                <a:latin typeface="Consolas"/>
-              </a:defRPr>
-            </a:pPr>
-            <a:r>
-              <a:t>$ cd module1/examples/modules_ports &amp;&amp; make clean &amp;&amp; make run</a:t>
-            </a:r>
-          </a:p>
-        </p:txBody>
-      </p:sp>
-      <p:pic>
-        <p:nvPicPr>
-          <p:cNvPr id="4" name="Picture 3" descr="ex01_modules_ports.png"/>
-          <p:cNvPicPr>
-            <a:picLocks noChangeAspect="1"/>
-          </p:cNvPicPr>
-          <p:nvPr/>
-        </p:nvPicPr>
-        <p:blipFill>
-          <a:blip r:embed="rId2"/>
-          <a:stretch>
-            <a:fillRect/>
-          </a:stretch>
-        </p:blipFill>
-        <p:spPr>
-          <a:xfrm>
-            <a:off x="548640" y="1965960"/>
-            <a:ext cx="7071358" cy="3977639"/>
-          </a:xfrm>
-          <a:prstGeom prst="rect">
-            <a:avLst/>
-          </a:prstGeom>
-        </p:spPr>
-      </p:pic>
-      <p:sp>
-        <p:nvSpPr>
-          <p:cNvPr id="5" name="TextBox 4"/>
+                <a:spcPts val="1000"/>
+              </a:spcAft>
+              <a:defRPr sz="2000" b="0">
+                <a:solidFill>
+                  <a:srgbClr val="333333"/>
+                </a:solidFill>
+                <a:latin typeface="Calibri"/>
+              </a:defRPr>
+            </a:pPr>
+            <a:r>
+              <a:t>• `$display`: Print once.</a:t>
+            </a:r>
+          </a:p>
+          <a:p>
+            <a:pPr>
+              <a:lnSpc>
+                <a:spcPts val="2200"/>
+              </a:lnSpc>
+              <a:spcAft>
+                <a:spcPts val="1000"/>
+              </a:spcAft>
+              <a:defRPr sz="2000" b="0">
+                <a:solidFill>
+                  <a:srgbClr val="333333"/>
+                </a:solidFill>
+                <a:latin typeface="Calibri"/>
+              </a:defRPr>
+            </a:pPr>
+            <a:r>
+              <a:t>• `$monitor`: Print whenever a listed signal changes</a:t>
+            </a:r>
+          </a:p>
+          <a:p>
+            <a:pPr>
+              <a:lnSpc>
+                <a:spcPts val="2200"/>
+              </a:lnSpc>
+              <a:spcAft>
+                <a:spcPts val="1000"/>
+              </a:spcAft>
+              <a:defRPr sz="2000" b="0">
+                <a:solidFill>
+                  <a:srgbClr val="333333"/>
+                </a:solidFill>
+                <a:latin typeface="Calibri"/>
+              </a:defRPr>
+            </a:pPr>
+            <a:r>
+              <a:t>      (optional).</a:t>
+            </a:r>
+          </a:p>
+          <a:p>
+            <a:pPr>
+              <a:lnSpc>
+                <a:spcPts val="2200"/>
+              </a:lnSpc>
+              <a:spcAft>
+                <a:spcPts val="1000"/>
+              </a:spcAft>
+              <a:defRPr sz="2000" b="0">
+                <a:solidFill>
+                  <a:srgbClr val="333333"/>
+                </a:solidFill>
+                <a:latin typeface="Calibri"/>
+              </a:defRPr>
+            </a:pPr>
+            <a:r>
+              <a:t>• `$finish`: End simulation.</a:t>
+            </a:r>
+          </a:p>
+        </p:txBody>
+      </p:sp>
+      <p:sp>
+        <p:nvSpPr>
+          <p:cNvPr id="4" name="TextBox 3"/>
           <p:cNvSpPr txBox="1"/>
           <p:nvPr/>
         </p:nvSpPr>
@@ -7453,8 +9046,8 @@
         </p:nvSpPr>
         <p:spPr>
           <a:xfrm>
-            <a:off x="548640" y="411480"/>
-            <a:ext cx="11064240" cy="777240"/>
+            <a:off x="548640" y="2743200"/>
+            <a:ext cx="11064240" cy="1371600"/>
           </a:xfrm>
           <a:prstGeom prst="rect">
             <a:avLst/>
@@ -7467,11 +9060,11 @@
           </a:bodyPr>
           <a:lstStyle/>
           <a:p>
-            <a:pPr>
-              <a:lnSpc>
-                <a:spcPts val="2200"/>
-              </a:lnSpc>
-              <a:defRPr sz="2800" b="1">
+            <a:pPr algn="ctr">
+              <a:lnSpc>
+                <a:spcPts val="2200"/>
+              </a:lnSpc>
+              <a:defRPr sz="3600" b="1">
                 <a:solidFill>
                   <a:srgbClr val="1A1A2E"/>
                 </a:solidFill>
@@ -7479,7 +9072,7 @@
               </a:defRPr>
             </a:pPr>
             <a:r>
-              <a:t>Demo: Nets and Variables</a:t>
+              <a:t>Hands-on examples</a:t>
             </a:r>
           </a:p>
         </p:txBody>
@@ -7487,74 +9080,6 @@
       <p:sp>
         <p:nvSpPr>
           <p:cNvPr id="3" name="TextBox 2"/>
-          <p:cNvSpPr txBox="1"/>
-          <p:nvPr/>
-        </p:nvSpPr>
-        <p:spPr>
-          <a:xfrm>
-            <a:off x="548640" y="1051560"/>
-            <a:ext cx="11064240" cy="914400"/>
-          </a:xfrm>
-          <a:prstGeom prst="rect">
-            <a:avLst/>
-          </a:prstGeom>
-          <a:solidFill>
-            <a:srgbClr val="F4F4F4"/>
-          </a:solidFill>
-        </p:spPr>
-        <p:txBody>
-          <a:bodyPr wrap="square">
-            <a:noAutofit/>
-          </a:bodyPr>
-          <a:lstStyle/>
-          <a:p>
-            <a:pPr>
-              <a:lnSpc>
-                <a:spcPts val="2200"/>
-              </a:lnSpc>
-              <a:spcAft>
-                <a:spcPts val="200"/>
-              </a:spcAft>
-              <a:defRPr sz="2000" b="0">
-                <a:solidFill>
-                  <a:srgbClr val="333333"/>
-                </a:solidFill>
-                <a:latin typeface="Consolas"/>
-              </a:defRPr>
-            </a:pPr>
-            <a:r>
-              <a:t>$ cd module1/examples/nets_variables &amp;&amp; make clean &amp;&amp; make run</a:t>
-            </a:r>
-          </a:p>
-        </p:txBody>
-      </p:sp>
-      <p:pic>
-        <p:nvPicPr>
-          <p:cNvPr id="4" name="Picture 3" descr="ex02_nets_variables.png"/>
-          <p:cNvPicPr>
-            <a:picLocks noChangeAspect="1"/>
-          </p:cNvPicPr>
-          <p:nvPr/>
-        </p:nvPicPr>
-        <p:blipFill>
-          <a:blip r:embed="rId2"/>
-          <a:stretch>
-            <a:fillRect/>
-          </a:stretch>
-        </p:blipFill>
-        <p:spPr>
-          <a:xfrm>
-            <a:off x="548640" y="1965960"/>
-            <a:ext cx="7071358" cy="3977639"/>
-          </a:xfrm>
-          <a:prstGeom prst="rect">
-            <a:avLst/>
-          </a:prstGeom>
-        </p:spPr>
-      </p:pic>
-      <p:sp>
-        <p:nvSpPr>
-          <p:cNvPr id="5" name="TextBox 4"/>
           <p:cNvSpPr txBox="1"/>
           <p:nvPr/>
         </p:nvSpPr>
@@ -7643,7 +9168,7 @@
               </a:defRPr>
             </a:pPr>
             <a:r>
-              <a:t>Demo: Continuous Assignment</a:t>
+              <a:t>Module 1 toolchain check</a:t>
             </a:r>
           </a:p>
         </p:txBody>
@@ -7687,14 +9212,33 @@
               </a:defRPr>
             </a:pPr>
             <a:r>
-              <a:t>$ cd module1/examples/continuous_assign &amp;&amp; make clean &amp;&amp; make run</a:t>
+              <a:t>$ command -v iverilog &gt;/dev/null &amp;&amp; echo "Toolchain ready: $(iverilog</a:t>
+            </a:r>
+          </a:p>
+          <a:p>
+            <a:pPr>
+              <a:lnSpc>
+                <a:spcPts val="2200"/>
+              </a:lnSpc>
+              <a:spcAft>
+                <a:spcPts val="200"/>
+              </a:spcAft>
+              <a:defRPr sz="2000" b="0">
+                <a:solidFill>
+                  <a:srgbClr val="333333"/>
+                </a:solidFill>
+                <a:latin typeface="Consolas"/>
+              </a:defRPr>
+            </a:pPr>
+            <a:r>
+              <a:t>      -V 2&gt;&amp;1 | head -1)"</a:t>
             </a:r>
           </a:p>
         </p:txBody>
       </p:sp>
       <p:pic>
         <p:nvPicPr>
-          <p:cNvPr id="4" name="Picture 3" descr="ex03_continuous_assign.png"/>
+          <p:cNvPr id="4" name="Picture 3" descr="module1_check.png"/>
           <p:cNvPicPr>
             <a:picLocks noChangeAspect="1"/>
           </p:cNvPicPr>
@@ -7807,7 +9351,7 @@
               </a:defRPr>
             </a:pPr>
             <a:r>
-              <a:t>Demo: Continuous Assignment Gates</a:t>
+              <a:t>Example 1: Modules and Ports</a:t>
             </a:r>
           </a:p>
         </p:txBody>
@@ -7820,15 +9364,13 @@
         </p:nvSpPr>
         <p:spPr>
           <a:xfrm>
-            <a:off x="548640" y="1051560"/>
-            <a:ext cx="11064240" cy="914400"/>
-          </a:xfrm>
-          <a:prstGeom prst="rect">
-            <a:avLst/>
-          </a:prstGeom>
-          <a:solidFill>
-            <a:srgbClr val="F4F4F4"/>
-          </a:solidFill>
+            <a:off x="548640" y="1234440"/>
+            <a:ext cx="11064240" cy="4937760"/>
+          </a:xfrm>
+          <a:prstGeom prst="rect">
+            <a:avLst/>
+          </a:prstGeom>
+          <a:noFill/>
         </p:spPr>
         <p:txBody>
           <a:bodyPr wrap="square">
@@ -7841,67 +9383,62 @@
                 <a:spcPts val="2200"/>
               </a:lnSpc>
               <a:spcAft>
-                <a:spcPts val="200"/>
-              </a:spcAft>
-              <a:defRPr sz="2000" b="0">
-                <a:solidFill>
-                  <a:srgbClr val="333333"/>
-                </a:solidFill>
-                <a:latin typeface="Consolas"/>
-              </a:defRPr>
-            </a:pPr>
-            <a:r>
-              <a:t>$ cd module1/examples/continuous_assign_gates &amp;&amp; make clean &amp;&amp; make</a:t>
-            </a:r>
-          </a:p>
-          <a:p>
-            <a:pPr>
-              <a:lnSpc>
-                <a:spcPts val="2200"/>
-              </a:lnSpc>
-              <a:spcAft>
-                <a:spcPts val="200"/>
-              </a:spcAft>
-              <a:defRPr sz="2000" b="0">
-                <a:solidFill>
-                  <a:srgbClr val="333333"/>
-                </a:solidFill>
-                <a:latin typeface="Consolas"/>
-              </a:defRPr>
-            </a:pPr>
-            <a:r>
-              <a:t>      run</a:t>
-            </a:r>
-          </a:p>
-        </p:txBody>
-      </p:sp>
-      <p:pic>
-        <p:nvPicPr>
-          <p:cNvPr id="4" name="Picture 3" descr="ex04_continuous_assign_gates.png"/>
-          <p:cNvPicPr>
-            <a:picLocks noChangeAspect="1"/>
-          </p:cNvPicPr>
-          <p:nvPr/>
-        </p:nvPicPr>
-        <p:blipFill>
-          <a:blip r:embed="rId2"/>
-          <a:stretch>
-            <a:fillRect/>
-          </a:stretch>
-        </p:blipFill>
-        <p:spPr>
-          <a:xfrm>
-            <a:off x="548640" y="1965960"/>
-            <a:ext cx="7071358" cy="3977639"/>
-          </a:xfrm>
-          <a:prstGeom prst="rect">
-            <a:avLst/>
-          </a:prstGeom>
-        </p:spPr>
-      </p:pic>
-      <p:sp>
-        <p:nvSpPr>
-          <p:cNvPr id="5" name="TextBox 4"/>
+                <a:spcPts val="1000"/>
+              </a:spcAft>
+              <a:defRPr sz="2000" b="0">
+                <a:solidFill>
+                  <a:srgbClr val="333333"/>
+                </a:solidFill>
+                <a:latin typeface="Calibri"/>
+              </a:defRPr>
+            </a:pPr>
+            <a:r>
+              <a:t>• 1995-style module declaration and port list</a:t>
+            </a:r>
+          </a:p>
+          <a:p>
+            <a:pPr>
+              <a:lnSpc>
+                <a:spcPts val="2200"/>
+              </a:lnSpc>
+              <a:spcAft>
+                <a:spcPts val="1000"/>
+              </a:spcAft>
+              <a:defRPr sz="2000" b="0">
+                <a:solidFill>
+                  <a:srgbClr val="333333"/>
+                </a:solidFill>
+                <a:latin typeface="Calibri"/>
+              </a:defRPr>
+            </a:pPr>
+            <a:r>
+              <a:t>• Named and positional instantiation</a:t>
+            </a:r>
+          </a:p>
+          <a:p>
+            <a:pPr>
+              <a:lnSpc>
+                <a:spcPts val="2200"/>
+              </a:lnSpc>
+              <a:spcAft>
+                <a:spcPts val="1000"/>
+              </a:spcAft>
+              <a:defRPr sz="2000" b="0">
+                <a:solidFill>
+                  <a:srgbClr val="333333"/>
+                </a:solidFill>
+                <a:latin typeface="Calibri"/>
+              </a:defRPr>
+            </a:pPr>
+            <a:r>
+              <a:t>• Non-ANSI ports, separate direction/type declarations</a:t>
+            </a:r>
+          </a:p>
+        </p:txBody>
+      </p:sp>
+      <p:sp>
+        <p:nvSpPr>
+          <p:cNvPr id="4" name="TextBox 3"/>
           <p:cNvSpPr txBox="1"/>
           <p:nvPr/>
         </p:nvSpPr>
@@ -7990,7 +9527,7 @@
               </a:defRPr>
             </a:pPr>
             <a:r>
-              <a:t>Demo: Adder</a:t>
+              <a:t>Demo: Modules and Ports</a:t>
             </a:r>
           </a:p>
         </p:txBody>
@@ -8034,14 +9571,14 @@
               </a:defRPr>
             </a:pPr>
             <a:r>
-              <a:t>$ cd module1/examples/adder &amp;&amp; make clean &amp;&amp; make run</a:t>
+              <a:t>$ cd module1/examples/modules_ports &amp;&amp; make clean &amp;&amp; make run</a:t>
             </a:r>
           </a:p>
         </p:txBody>
       </p:sp>
       <p:pic>
         <p:nvPicPr>
-          <p:cNvPr id="4" name="Picture 3" descr="ex05_adder.png"/>
+          <p:cNvPr id="4" name="Picture 3" descr="ex01_modules_ports.png"/>
           <p:cNvPicPr>
             <a:picLocks noChangeAspect="1"/>
           </p:cNvPicPr>
@@ -8154,7 +9691,7 @@
               </a:defRPr>
             </a:pPr>
             <a:r>
-              <a:t>Demo: Procedural Blocks</a:t>
+              <a:t>Example 2: Nets and Variables</a:t>
             </a:r>
           </a:p>
         </p:txBody>
@@ -8167,15 +9704,13 @@
         </p:nvSpPr>
         <p:spPr>
           <a:xfrm>
-            <a:off x="548640" y="1051560"/>
-            <a:ext cx="11064240" cy="914400"/>
-          </a:xfrm>
-          <a:prstGeom prst="rect">
-            <a:avLst/>
-          </a:prstGeom>
-          <a:solidFill>
-            <a:srgbClr val="F4F4F4"/>
-          </a:solidFill>
+            <a:off x="548640" y="1234440"/>
+            <a:ext cx="11064240" cy="4937760"/>
+          </a:xfrm>
+          <a:prstGeom prst="rect">
+            <a:avLst/>
+          </a:prstGeom>
+          <a:noFill/>
         </p:spPr>
         <p:txBody>
           <a:bodyPr wrap="square">
@@ -8188,48 +9723,43 @@
                 <a:spcPts val="2200"/>
               </a:lnSpc>
               <a:spcAft>
-                <a:spcPts val="200"/>
-              </a:spcAft>
-              <a:defRPr sz="2000" b="0">
-                <a:solidFill>
-                  <a:srgbClr val="333333"/>
-                </a:solidFill>
-                <a:latin typeface="Consolas"/>
-              </a:defRPr>
-            </a:pPr>
-            <a:r>
-              <a:t>$ cd module1/examples/procedural &amp;&amp; make clean &amp;&amp; make run</a:t>
-            </a:r>
-          </a:p>
-        </p:txBody>
-      </p:sp>
-      <p:pic>
-        <p:nvPicPr>
-          <p:cNvPr id="4" name="Picture 3" descr="ex06_procedural.png"/>
-          <p:cNvPicPr>
-            <a:picLocks noChangeAspect="1"/>
-          </p:cNvPicPr>
-          <p:nvPr/>
-        </p:nvPicPr>
-        <p:blipFill>
-          <a:blip r:embed="rId2"/>
-          <a:stretch>
-            <a:fillRect/>
-          </a:stretch>
-        </p:blipFill>
-        <p:spPr>
-          <a:xfrm>
-            <a:off x="548640" y="1965960"/>
-            <a:ext cx="7071358" cy="3977639"/>
-          </a:xfrm>
-          <a:prstGeom prst="rect">
-            <a:avLst/>
-          </a:prstGeom>
-        </p:spPr>
-      </p:pic>
-      <p:sp>
-        <p:nvSpPr>
-          <p:cNvPr id="5" name="TextBox 4"/>
+                <a:spcPts val="1000"/>
+              </a:spcAft>
+              <a:defRPr sz="2000" b="0">
+                <a:solidFill>
+                  <a:srgbClr val="333333"/>
+                </a:solidFill>
+                <a:latin typeface="Calibri"/>
+              </a:defRPr>
+            </a:pPr>
+            <a:r>
+              <a:t>• wire vs reg, vectors, 4-state values</a:t>
+            </a:r>
+          </a:p>
+          <a:p>
+            <a:pPr>
+              <a:lnSpc>
+                <a:spcPts val="2200"/>
+              </a:lnSpc>
+              <a:spcAft>
+                <a:spcPts val="1000"/>
+              </a:spcAft>
+              <a:defRPr sz="2000" b="0">
+                <a:solidFill>
+                  <a:srgbClr val="333333"/>
+                </a:solidFill>
+                <a:latin typeface="Calibri"/>
+              </a:defRPr>
+            </a:pPr>
+            <a:r>
+              <a:t>• When to use wire vs reg, single driver per net</a:t>
+            </a:r>
+          </a:p>
+        </p:txBody>
+      </p:sp>
+      <p:sp>
+        <p:nvSpPr>
+          <p:cNvPr id="4" name="TextBox 3"/>
           <p:cNvSpPr txBox="1"/>
           <p:nvPr/>
         </p:nvSpPr>
@@ -8318,7 +9848,7 @@
               </a:defRPr>
             </a:pPr>
             <a:r>
-              <a:t>Demo: Sequential D Flip-Flop</a:t>
+              <a:t>Demo: Nets and Variables</a:t>
             </a:r>
           </a:p>
         </p:txBody>
@@ -8362,14 +9892,14 @@
               </a:defRPr>
             </a:pPr>
             <a:r>
-              <a:t>$ cd module1/examples/sequential_dff &amp;&amp; make clean &amp;&amp; make run</a:t>
+              <a:t>$ cd module1/examples/nets_variables &amp;&amp; make clean &amp;&amp; make run</a:t>
             </a:r>
           </a:p>
         </p:txBody>
       </p:sp>
       <p:pic>
         <p:nvPicPr>
-          <p:cNvPr id="4" name="Picture 3" descr="ex07_sequential_dff.png"/>
+          <p:cNvPr id="4" name="Picture 3" descr="ex02_nets_variables.png"/>
           <p:cNvPicPr>
             <a:picLocks noChangeAspect="1"/>
           </p:cNvPicPr>
@@ -8482,7 +10012,7 @@
               </a:defRPr>
             </a:pPr>
             <a:r>
-              <a:t>Demo: Delays and Timing</a:t>
+              <a:t>Example 3: Continuous Assignment</a:t>
             </a:r>
           </a:p>
         </p:txBody>
@@ -8495,15 +10025,13 @@
         </p:nvSpPr>
         <p:spPr>
           <a:xfrm>
-            <a:off x="548640" y="1051560"/>
-            <a:ext cx="11064240" cy="914400"/>
-          </a:xfrm>
-          <a:prstGeom prst="rect">
-            <a:avLst/>
-          </a:prstGeom>
-          <a:solidFill>
-            <a:srgbClr val="F4F4F4"/>
-          </a:solidFill>
+            <a:off x="548640" y="1234440"/>
+            <a:ext cx="11064240" cy="4937760"/>
+          </a:xfrm>
+          <a:prstGeom prst="rect">
+            <a:avLst/>
+          </a:prstGeom>
+          <a:noFill/>
         </p:spPr>
         <p:txBody>
           <a:bodyPr wrap="square">
@@ -8516,48 +10044,43 @@
                 <a:spcPts val="2200"/>
               </a:lnSpc>
               <a:spcAft>
-                <a:spcPts val="200"/>
-              </a:spcAft>
-              <a:defRPr sz="2000" b="0">
-                <a:solidFill>
-                  <a:srgbClr val="333333"/>
-                </a:solidFill>
-                <a:latin typeface="Consolas"/>
-              </a:defRPr>
-            </a:pPr>
-            <a:r>
-              <a:t>$ cd module1/examples/delays_timing &amp;&amp; make clean &amp;&amp; make run</a:t>
-            </a:r>
-          </a:p>
-        </p:txBody>
-      </p:sp>
-      <p:pic>
-        <p:nvPicPr>
-          <p:cNvPr id="4" name="Picture 3" descr="ex08_delays_timing.png"/>
-          <p:cNvPicPr>
-            <a:picLocks noChangeAspect="1"/>
-          </p:cNvPicPr>
-          <p:nvPr/>
-        </p:nvPicPr>
-        <p:blipFill>
-          <a:blip r:embed="rId2"/>
-          <a:stretch>
-            <a:fillRect/>
-          </a:stretch>
-        </p:blipFill>
-        <p:spPr>
-          <a:xfrm>
-            <a:off x="548640" y="1965960"/>
-            <a:ext cx="7071358" cy="3977639"/>
-          </a:xfrm>
-          <a:prstGeom prst="rect">
-            <a:avLst/>
-          </a:prstGeom>
-        </p:spPr>
-      </p:pic>
-      <p:sp>
-        <p:nvSpPr>
-          <p:cNvPr id="5" name="TextBox 4"/>
+                <a:spcPts val="1000"/>
+              </a:spcAft>
+              <a:defRPr sz="2000" b="0">
+                <a:solidFill>
+                  <a:srgbClr val="333333"/>
+                </a:solidFill>
+                <a:latin typeface="Calibri"/>
+              </a:defRPr>
+            </a:pPr>
+            <a:r>
+              <a:t>• assign for combinational logic (2:1 mux)</a:t>
+            </a:r>
+          </a:p>
+          <a:p>
+            <a:pPr>
+              <a:lnSpc>
+                <a:spcPts val="2200"/>
+              </a:lnSpc>
+              <a:spcAft>
+                <a:spcPts val="1000"/>
+              </a:spcAft>
+              <a:defRPr sz="2000" b="0">
+                <a:solidFill>
+                  <a:srgbClr val="333333"/>
+                </a:solidFill>
+                <a:latin typeface="Calibri"/>
+              </a:defRPr>
+            </a:pPr>
+            <a:r>
+              <a:t>• Left-hand side must be net; expression on right</a:t>
+            </a:r>
+          </a:p>
+        </p:txBody>
+      </p:sp>
+      <p:sp>
+        <p:nvSpPr>
+          <p:cNvPr id="4" name="TextBox 3"/>
           <p:cNvSpPr txBox="1"/>
           <p:nvPr/>
         </p:nvSpPr>
@@ -8646,7 +10169,7 @@
               </a:defRPr>
             </a:pPr>
             <a:r>
-              <a:t>Demo: Testbenches</a:t>
+              <a:t>Demo: Continuous Assignment</a:t>
             </a:r>
           </a:p>
         </p:txBody>
@@ -8690,14 +10213,14 @@
               </a:defRPr>
             </a:pPr>
             <a:r>
-              <a:t>$ cd module1/examples/testbenches &amp;&amp; make clean &amp;&amp; make run</a:t>
+              <a:t>$ cd module1/examples/continuous_assign &amp;&amp; make clean &amp;&amp; make run</a:t>
             </a:r>
           </a:p>
         </p:txBody>
       </p:sp>
       <p:pic>
         <p:nvPicPr>
-          <p:cNvPr id="4" name="Picture 3" descr="ex09_testbenches.png"/>
+          <p:cNvPr id="4" name="Picture 3" descr="ex03_continuous_assign.png"/>
           <p:cNvPicPr>
             <a:picLocks noChangeAspect="1"/>
           </p:cNvPicPr>
@@ -8784,8 +10307,8 @@
         </p:nvSpPr>
         <p:spPr>
           <a:xfrm>
-            <a:off x="548640" y="2743200"/>
-            <a:ext cx="11064240" cy="1371600"/>
+            <a:off x="548640" y="411480"/>
+            <a:ext cx="11064240" cy="777240"/>
           </a:xfrm>
           <a:prstGeom prst="rect">
             <a:avLst/>
@@ -8798,11 +10321,11 @@
           </a:bodyPr>
           <a:lstStyle/>
           <a:p>
-            <a:pPr algn="ctr">
-              <a:lnSpc>
-                <a:spcPts val="2200"/>
-              </a:lnSpc>
-              <a:defRPr sz="3600" b="1">
+            <a:pPr>
+              <a:lnSpc>
+                <a:spcPts val="2200"/>
+              </a:lnSpc>
+              <a:defRPr sz="2800" b="1">
                 <a:solidFill>
                   <a:srgbClr val="1A1A2E"/>
                 </a:solidFill>
@@ -8810,7 +10333,7 @@
               </a:defRPr>
             </a:pPr>
             <a:r>
-              <a:t>Practice &amp; assessment</a:t>
+              <a:t>Example 4: Continuous Assignment Gates</a:t>
             </a:r>
           </a:p>
         </p:txBody>
@@ -8818,6 +10341,67 @@
       <p:sp>
         <p:nvSpPr>
           <p:cNvPr id="3" name="TextBox 2"/>
+          <p:cNvSpPr txBox="1"/>
+          <p:nvPr/>
+        </p:nvSpPr>
+        <p:spPr>
+          <a:xfrm>
+            <a:off x="548640" y="1234440"/>
+            <a:ext cx="11064240" cy="4937760"/>
+          </a:xfrm>
+          <a:prstGeom prst="rect">
+            <a:avLst/>
+          </a:prstGeom>
+          <a:noFill/>
+        </p:spPr>
+        <p:txBody>
+          <a:bodyPr wrap="square">
+            <a:noAutofit/>
+          </a:bodyPr>
+          <a:lstStyle/>
+          <a:p>
+            <a:pPr>
+              <a:lnSpc>
+                <a:spcPts val="2200"/>
+              </a:lnSpc>
+              <a:spcAft>
+                <a:spcPts val="1000"/>
+              </a:spcAft>
+              <a:defRPr sz="2000" b="0">
+                <a:solidFill>
+                  <a:srgbClr val="333333"/>
+                </a:solidFill>
+                <a:latin typeface="Calibri"/>
+              </a:defRPr>
+            </a:pPr>
+            <a:r>
+              <a:t>• XOR, NAND, NOR with assign</a:t>
+            </a:r>
+          </a:p>
+          <a:p>
+            <a:pPr>
+              <a:lnSpc>
+                <a:spcPts val="2200"/>
+              </a:lnSpc>
+              <a:spcAft>
+                <a:spcPts val="1000"/>
+              </a:spcAft>
+              <a:defRPr sz="2000" b="0">
+                <a:solidFill>
+                  <a:srgbClr val="333333"/>
+                </a:solidFill>
+                <a:latin typeface="Calibri"/>
+              </a:defRPr>
+            </a:pPr>
+            <a:r>
+              <a:t>• Same as above; multiple gates in one example</a:t>
+            </a:r>
+          </a:p>
+        </p:txBody>
+      </p:sp>
+      <p:sp>
+        <p:nvSpPr>
+          <p:cNvPr id="4" name="TextBox 3"/>
           <p:cNvSpPr txBox="1"/>
           <p:nvPr/>
         </p:nvSpPr>
@@ -9044,7 +10628,7 @@
               </a:defRPr>
             </a:pPr>
             <a:r>
-              <a:t>Exercises</a:t>
+              <a:t>Demo: Continuous Assignment Gates</a:t>
             </a:r>
           </a:p>
         </p:txBody>
@@ -9057,13 +10641,15 @@
         </p:nvSpPr>
         <p:spPr>
           <a:xfrm>
-            <a:off x="548640" y="1234440"/>
-            <a:ext cx="11064240" cy="4937760"/>
-          </a:xfrm>
-          <a:prstGeom prst="rect">
-            <a:avLst/>
-          </a:prstGeom>
-          <a:noFill/>
+            <a:off x="548640" y="1051560"/>
+            <a:ext cx="11064240" cy="914400"/>
+          </a:xfrm>
+          <a:prstGeom prst="rect">
+            <a:avLst/>
+          </a:prstGeom>
+          <a:solidFill>
+            <a:srgbClr val="F4F4F4"/>
+          </a:solidFill>
         </p:spPr>
         <p:txBody>
           <a:bodyPr wrap="square">
@@ -9076,100 +10662,67 @@
                 <a:spcPts val="2200"/>
               </a:lnSpc>
               <a:spcAft>
-                <a:spcPts val="1000"/>
-              </a:spcAft>
-              <a:defRPr sz="2000" b="0">
-                <a:solidFill>
-                  <a:srgbClr val="333333"/>
-                </a:solidFill>
-                <a:latin typeface="Calibri"/>
-              </a:defRPr>
-            </a:pPr>
-            <a:r>
-              <a:t>• Module and Ports (1995)</a:t>
-            </a:r>
-          </a:p>
-          <a:p>
-            <a:pPr>
-              <a:lnSpc>
-                <a:spcPts val="2200"/>
-              </a:lnSpc>
-              <a:spcAft>
-                <a:spcPts val="1000"/>
-              </a:spcAft>
-              <a:defRPr sz="2000" b="0">
-                <a:solidFill>
-                  <a:srgbClr val="333333"/>
-                </a:solidFill>
-                <a:latin typeface="Calibri"/>
-              </a:defRPr>
-            </a:pPr>
-            <a:r>
-              <a:t>• wire vs reg</a:t>
-            </a:r>
-          </a:p>
-          <a:p>
-            <a:pPr>
-              <a:lnSpc>
-                <a:spcPts val="2200"/>
-              </a:lnSpc>
-              <a:spcAft>
-                <a:spcPts val="1000"/>
-              </a:spcAft>
-              <a:defRPr sz="2000" b="0">
-                <a:solidFill>
-                  <a:srgbClr val="333333"/>
-                </a:solidFill>
-                <a:latin typeface="Calibri"/>
-              </a:defRPr>
-            </a:pPr>
-            <a:r>
-              <a:t>• Simple Testbench</a:t>
-            </a:r>
-          </a:p>
-          <a:p>
-            <a:pPr>
-              <a:lnSpc>
-                <a:spcPts val="2200"/>
-              </a:lnSpc>
-              <a:spcAft>
-                <a:spcPts val="1000"/>
-              </a:spcAft>
-              <a:defRPr sz="2000" b="0">
-                <a:solidFill>
-                  <a:srgbClr val="333333"/>
-                </a:solidFill>
-                <a:latin typeface="Calibri"/>
-              </a:defRPr>
-            </a:pPr>
-            <a:r>
-              <a:t>• Limitations</a:t>
-            </a:r>
-          </a:p>
-          <a:p>
-            <a:pPr>
-              <a:lnSpc>
-                <a:spcPts val="2200"/>
-              </a:lnSpc>
-              <a:spcAft>
-                <a:spcPts val="1000"/>
-              </a:spcAft>
-              <a:defRPr sz="2000" b="0">
-                <a:solidFill>
-                  <a:srgbClr val="333333"/>
-                </a:solidFill>
-                <a:latin typeface="Calibri"/>
-              </a:defRPr>
-            </a:pPr>
-            <a:r>
-              <a:t>• Incomplete Sensitivity List</a:t>
-            </a:r>
-          </a:p>
-        </p:txBody>
-      </p:sp>
-      <p:sp>
-        <p:nvSpPr>
-          <p:cNvPr id="4" name="TextBox 3"/>
+                <a:spcPts val="200"/>
+              </a:spcAft>
+              <a:defRPr sz="2000" b="0">
+                <a:solidFill>
+                  <a:srgbClr val="333333"/>
+                </a:solidFill>
+                <a:latin typeface="Consolas"/>
+              </a:defRPr>
+            </a:pPr>
+            <a:r>
+              <a:t>$ cd module1/examples/continuous_assign_gates &amp;&amp; make clean &amp;&amp; make</a:t>
+            </a:r>
+          </a:p>
+          <a:p>
+            <a:pPr>
+              <a:lnSpc>
+                <a:spcPts val="2200"/>
+              </a:lnSpc>
+              <a:spcAft>
+                <a:spcPts val="200"/>
+              </a:spcAft>
+              <a:defRPr sz="2000" b="0">
+                <a:solidFill>
+                  <a:srgbClr val="333333"/>
+                </a:solidFill>
+                <a:latin typeface="Consolas"/>
+              </a:defRPr>
+            </a:pPr>
+            <a:r>
+              <a:t>      run</a:t>
+            </a:r>
+          </a:p>
+        </p:txBody>
+      </p:sp>
+      <p:pic>
+        <p:nvPicPr>
+          <p:cNvPr id="4" name="Picture 3" descr="ex04_continuous_assign_gates.png"/>
+          <p:cNvPicPr>
+            <a:picLocks noChangeAspect="1"/>
+          </p:cNvPicPr>
+          <p:nvPr/>
+        </p:nvPicPr>
+        <p:blipFill>
+          <a:blip r:embed="rId2"/>
+          <a:stretch>
+            <a:fillRect/>
+          </a:stretch>
+        </p:blipFill>
+        <p:spPr>
+          <a:xfrm>
+            <a:off x="548640" y="1965960"/>
+            <a:ext cx="7071358" cy="3977639"/>
+          </a:xfrm>
+          <a:prstGeom prst="rect">
+            <a:avLst/>
+          </a:prstGeom>
+        </p:spPr>
+      </p:pic>
+      <p:sp>
+        <p:nvSpPr>
+          <p:cNvPr id="5" name="TextBox 4"/>
           <p:cNvSpPr txBox="1"/>
           <p:nvPr/>
         </p:nvSpPr>
@@ -9258,7 +10811,7 @@
               </a:defRPr>
             </a:pPr>
             <a:r>
-              <a:t>Exercises</a:t>
+              <a:t>Example 5: Adder</a:t>
             </a:r>
           </a:p>
         </p:txBody>
@@ -9300,64 +10853,64 @@
               </a:defRPr>
             </a:pPr>
             <a:r>
-              <a:t>• Port Type Mismatch</a:t>
-            </a:r>
-          </a:p>
-          <a:p>
-            <a:pPr>
-              <a:lnSpc>
-                <a:spcPts val="2200"/>
-              </a:lnSpc>
-              <a:spcAft>
-                <a:spcPts val="1000"/>
-              </a:spcAft>
-              <a:defRPr sz="2000" b="0">
-                <a:solidFill>
-                  <a:srgbClr val="333333"/>
-                </a:solidFill>
-                <a:latin typeface="Calibri"/>
-              </a:defRPr>
-            </a:pPr>
-            <a:r>
-              <a:t>• Simulation Never Ends</a:t>
-            </a:r>
-          </a:p>
-          <a:p>
-            <a:pPr>
-              <a:lnSpc>
-                <a:spcPts val="2200"/>
-              </a:lnSpc>
-              <a:spcAft>
-                <a:spcPts val="1000"/>
-              </a:spcAft>
-              <a:defRPr sz="2000" b="0">
-                <a:solidFill>
-                  <a:srgbClr val="333333"/>
-                </a:solidFill>
-                <a:latin typeface="Calibri"/>
-              </a:defRPr>
-            </a:pPr>
-            <a:r>
-              <a:t>• Using 2001/SystemVerilog Constructs in 1995</a:t>
-            </a:r>
-          </a:p>
-          <a:p>
-            <a:pPr>
-              <a:lnSpc>
-                <a:spcPts val="2200"/>
-              </a:lnSpc>
-              <a:spcAft>
-                <a:spcPts val="1000"/>
-              </a:spcAft>
-              <a:defRPr sz="2000" b="0">
-                <a:solidFill>
-                  <a:srgbClr val="333333"/>
-                </a:solidFill>
-                <a:latin typeface="Calibri"/>
-              </a:defRPr>
-            </a:pPr>
-            <a:r>
-              <a:t>• Confusing reg with Registers</a:t>
+              <a:t>• Half adder and full adder with assign (sum and</a:t>
+            </a:r>
+          </a:p>
+          <a:p>
+            <a:pPr>
+              <a:lnSpc>
+                <a:spcPts val="2200"/>
+              </a:lnSpc>
+              <a:spcAft>
+                <a:spcPts val="1000"/>
+              </a:spcAft>
+              <a:defRPr sz="2000" b="0">
+                <a:solidFill>
+                  <a:srgbClr val="333333"/>
+                </a:solidFill>
+                <a:latin typeface="Calibri"/>
+              </a:defRPr>
+            </a:pPr>
+            <a:r>
+              <a:t>      carry)</a:t>
+            </a:r>
+          </a:p>
+          <a:p>
+            <a:pPr>
+              <a:lnSpc>
+                <a:spcPts val="2200"/>
+              </a:lnSpc>
+              <a:spcAft>
+                <a:spcPts val="1000"/>
+              </a:spcAft>
+              <a:defRPr sz="2000" b="0">
+                <a:solidFill>
+                  <a:srgbClr val="333333"/>
+                </a:solidFill>
+                <a:latin typeface="Calibri"/>
+              </a:defRPr>
+            </a:pPr>
+            <a:r>
+              <a:t>• Multi-output combinational logic; wire for all</a:t>
+            </a:r>
+          </a:p>
+          <a:p>
+            <a:pPr>
+              <a:lnSpc>
+                <a:spcPts val="2200"/>
+              </a:lnSpc>
+              <a:spcAft>
+                <a:spcPts val="1000"/>
+              </a:spcAft>
+              <a:defRPr sz="2000" b="0">
+                <a:solidFill>
+                  <a:srgbClr val="333333"/>
+                </a:solidFill>
+                <a:latin typeface="Calibri"/>
+              </a:defRPr>
+            </a:pPr>
+            <a:r>
+              <a:t>      outputs</a:t>
             </a:r>
           </a:p>
         </p:txBody>
@@ -9453,7 +11006,7 @@
               </a:defRPr>
             </a:pPr>
             <a:r>
-              <a:t>Summary &amp; next steps</a:t>
+              <a:t>Demo: Adder</a:t>
             </a:r>
           </a:p>
         </p:txBody>
@@ -9466,13 +11019,15 @@
         </p:nvSpPr>
         <p:spPr>
           <a:xfrm>
-            <a:off x="548640" y="1234440"/>
-            <a:ext cx="11064240" cy="4937760"/>
-          </a:xfrm>
-          <a:prstGeom prst="rect">
-            <a:avLst/>
-          </a:prstGeom>
-          <a:noFill/>
+            <a:off x="548640" y="1051560"/>
+            <a:ext cx="11064240" cy="914400"/>
+          </a:xfrm>
+          <a:prstGeom prst="rect">
+            <a:avLst/>
+          </a:prstGeom>
+          <a:solidFill>
+            <a:srgbClr val="F4F4F4"/>
+          </a:solidFill>
         </p:spPr>
         <p:txBody>
           <a:bodyPr wrap="square">
@@ -9485,93 +11040,1256 @@
                 <a:spcPts val="2200"/>
               </a:lnSpc>
               <a:spcAft>
-                <a:spcPts val="1000"/>
-              </a:spcAft>
-              <a:defRPr sz="2000" b="0">
-                <a:solidFill>
-                  <a:srgbClr val="333333"/>
-                </a:solidFill>
-                <a:latin typeface="Calibri"/>
-              </a:defRPr>
-            </a:pPr>
-            <a:r>
-              <a:t>• Master the first standardized Verilog language (IEEE</a:t>
-            </a:r>
-          </a:p>
-          <a:p>
-            <a:pPr>
-              <a:lnSpc>
-                <a:spcPts val="2200"/>
-              </a:lnSpc>
-              <a:spcAft>
-                <a:spcPts val="1000"/>
-              </a:spcAft>
-              <a:defRPr sz="2000" b="0">
-                <a:solidFill>
-                  <a:srgbClr val="333333"/>
-                </a:solidFill>
-                <a:latin typeface="Calibri"/>
-              </a:defRPr>
-            </a:pPr>
-            <a:r>
-              <a:t>      1364-1995) and its core syntax for RTL design…</a:t>
-            </a:r>
-          </a:p>
-          <a:p>
-            <a:pPr>
-              <a:lnSpc>
-                <a:spcPts val="2200"/>
-              </a:lnSpc>
-              <a:spcAft>
-                <a:spcPts val="1000"/>
-              </a:spcAft>
-              <a:defRPr sz="2000" b="0">
-                <a:solidFill>
-                  <a:srgbClr val="333333"/>
-                </a:solidFill>
-                <a:latin typeface="Calibri"/>
-              </a:defRPr>
-            </a:pPr>
-            <a:r>
-              <a:t>• Complete module1/CHECKLIST.md</a:t>
-            </a:r>
-          </a:p>
-          <a:p>
-            <a:pPr>
-              <a:lnSpc>
-                <a:spcPts val="2200"/>
-              </a:lnSpc>
-              <a:spcAft>
-                <a:spcPts val="1000"/>
-              </a:spcAft>
-              <a:defRPr sz="2000" b="0">
-                <a:solidFill>
-                  <a:srgbClr val="333333"/>
-                </a:solidFill>
-                <a:latin typeface="Calibri"/>
-              </a:defRPr>
-            </a:pPr>
-            <a:r>
-              <a:t>• Run ./scripts/module1.sh --check</a:t>
-            </a:r>
-          </a:p>
-          <a:p>
-            <a:pPr>
-              <a:lnSpc>
-                <a:spcPts val="2200"/>
-              </a:lnSpc>
-              <a:spcAft>
-                <a:spcPts val="1000"/>
-              </a:spcAft>
-              <a:defRPr sz="2000" b="0">
-                <a:solidFill>
-                  <a:srgbClr val="333333"/>
-                </a:solidFill>
-                <a:latin typeface="Calibri"/>
-              </a:defRPr>
-            </a:pPr>
-            <a:r>
-              <a:t>• Next: Next module in course</a:t>
+                <a:spcPts val="200"/>
+              </a:spcAft>
+              <a:defRPr sz="2000" b="0">
+                <a:solidFill>
+                  <a:srgbClr val="333333"/>
+                </a:solidFill>
+                <a:latin typeface="Consolas"/>
+              </a:defRPr>
+            </a:pPr>
+            <a:r>
+              <a:t>$ cd module1/examples/adder &amp;&amp; make clean &amp;&amp; make run</a:t>
+            </a:r>
+          </a:p>
+        </p:txBody>
+      </p:sp>
+      <p:pic>
+        <p:nvPicPr>
+          <p:cNvPr id="4" name="Picture 3" descr="ex05_adder.png"/>
+          <p:cNvPicPr>
+            <a:picLocks noChangeAspect="1"/>
+          </p:cNvPicPr>
+          <p:nvPr/>
+        </p:nvPicPr>
+        <p:blipFill>
+          <a:blip r:embed="rId2"/>
+          <a:stretch>
+            <a:fillRect/>
+          </a:stretch>
+        </p:blipFill>
+        <p:spPr>
+          <a:xfrm>
+            <a:off x="548640" y="1965960"/>
+            <a:ext cx="7071358" cy="3977639"/>
+          </a:xfrm>
+          <a:prstGeom prst="rect">
+            <a:avLst/>
+          </a:prstGeom>
+        </p:spPr>
+      </p:pic>
+      <p:sp>
+        <p:nvSpPr>
+          <p:cNvPr id="5" name="TextBox 4"/>
+          <p:cNvSpPr txBox="1"/>
+          <p:nvPr/>
+        </p:nvSpPr>
+        <p:spPr>
+          <a:xfrm>
+            <a:off x="548640" y="6355080"/>
+            <a:ext cx="11064240" cy="320040"/>
+          </a:xfrm>
+          <a:prstGeom prst="rect">
+            <a:avLst/>
+          </a:prstGeom>
+          <a:noFill/>
+        </p:spPr>
+        <p:txBody>
+          <a:bodyPr wrap="square">
+            <a:noAutofit/>
+          </a:bodyPr>
+          <a:lstStyle/>
+          <a:p>
+            <a:pPr algn="r">
+              <a:lnSpc>
+                <a:spcPts val="2200"/>
+              </a:lnSpc>
+              <a:defRPr sz="1000" b="0">
+                <a:solidFill>
+                  <a:srgbClr val="666666"/>
+                </a:solidFill>
+                <a:latin typeface="Calibri"/>
+              </a:defRPr>
+            </a:pPr>
+            <a:r>
+              <a:t>learn_verilog_systemverilog / Module 1</a:t>
+            </a:r>
+          </a:p>
+        </p:txBody>
+      </p:sp>
+    </p:spTree>
+  </p:cSld>
+  <p:clrMapOvr>
+    <a:masterClrMapping/>
+  </p:clrMapOvr>
+</p:sld>
+</file>
+
+<file path=ppt/slides/slide33.xml><?xml version="1.0" encoding="utf-8"?>
+<p:sld xmlns:a="http://schemas.openxmlformats.org/drawingml/2006/main" xmlns:p="http://schemas.openxmlformats.org/presentationml/2006/main" xmlns:r="http://schemas.openxmlformats.org/officeDocument/2006/relationships">
+  <p:cSld>
+    <p:spTree>
+      <p:nvGrpSpPr>
+        <p:cNvPr id="1" name=""/>
+        <p:cNvGrpSpPr/>
+        <p:nvPr/>
+      </p:nvGrpSpPr>
+      <p:grpSpPr/>
+      <p:sp>
+        <p:nvSpPr>
+          <p:cNvPr id="2" name="TextBox 1"/>
+          <p:cNvSpPr txBox="1"/>
+          <p:nvPr/>
+        </p:nvSpPr>
+        <p:spPr>
+          <a:xfrm>
+            <a:off x="548640" y="411480"/>
+            <a:ext cx="11064240" cy="777240"/>
+          </a:xfrm>
+          <a:prstGeom prst="rect">
+            <a:avLst/>
+          </a:prstGeom>
+          <a:noFill/>
+        </p:spPr>
+        <p:txBody>
+          <a:bodyPr wrap="square">
+            <a:noAutofit/>
+          </a:bodyPr>
+          <a:lstStyle/>
+          <a:p>
+            <a:pPr>
+              <a:lnSpc>
+                <a:spcPts val="2200"/>
+              </a:lnSpc>
+              <a:defRPr sz="2800" b="1">
+                <a:solidFill>
+                  <a:srgbClr val="1A1A2E"/>
+                </a:solidFill>
+                <a:latin typeface="Calibri"/>
+              </a:defRPr>
+            </a:pPr>
+            <a:r>
+              <a:t>Example 6: Procedural Blocks</a:t>
+            </a:r>
+          </a:p>
+        </p:txBody>
+      </p:sp>
+      <p:sp>
+        <p:nvSpPr>
+          <p:cNvPr id="3" name="TextBox 2"/>
+          <p:cNvSpPr txBox="1"/>
+          <p:nvPr/>
+        </p:nvSpPr>
+        <p:spPr>
+          <a:xfrm>
+            <a:off x="548640" y="1234440"/>
+            <a:ext cx="11064240" cy="4937760"/>
+          </a:xfrm>
+          <a:prstGeom prst="rect">
+            <a:avLst/>
+          </a:prstGeom>
+          <a:noFill/>
+        </p:spPr>
+        <p:txBody>
+          <a:bodyPr wrap="square">
+            <a:noAutofit/>
+          </a:bodyPr>
+          <a:lstStyle/>
+          <a:p>
+            <a:pPr>
+              <a:lnSpc>
+                <a:spcPts val="2200"/>
+              </a:lnSpc>
+              <a:spcAft>
+                <a:spcPts val="1000"/>
+              </a:spcAft>
+              <a:defRPr sz="2000" b="0">
+                <a:solidFill>
+                  <a:srgbClr val="333333"/>
+                </a:solidFill>
+                <a:latin typeface="Calibri"/>
+              </a:defRPr>
+            </a:pPr>
+            <a:r>
+              <a:t>• always @(inputs) and always @(posedge clk) with</a:t>
+            </a:r>
+          </a:p>
+          <a:p>
+            <a:pPr>
+              <a:lnSpc>
+                <a:spcPts val="2200"/>
+              </a:lnSpc>
+              <a:spcAft>
+                <a:spcPts val="1000"/>
+              </a:spcAft>
+              <a:defRPr sz="2000" b="0">
+                <a:solidFill>
+                  <a:srgbClr val="333333"/>
+                </a:solidFill>
+                <a:latin typeface="Calibri"/>
+              </a:defRPr>
+            </a:pPr>
+            <a:r>
+              <a:t>      explicit sensitivity</a:t>
+            </a:r>
+          </a:p>
+          <a:p>
+            <a:pPr>
+              <a:lnSpc>
+                <a:spcPts val="2200"/>
+              </a:lnSpc>
+              <a:spcAft>
+                <a:spcPts val="1000"/>
+              </a:spcAft>
+              <a:defRPr sz="2000" b="0">
+                <a:solidFill>
+                  <a:srgbClr val="333333"/>
+                </a:solidFill>
+                <a:latin typeface="Calibri"/>
+              </a:defRPr>
+            </a:pPr>
+            <a:r>
+              <a:t>• initial for testbench; 1995-style task/function</a:t>
+            </a:r>
+          </a:p>
+          <a:p>
+            <a:pPr>
+              <a:lnSpc>
+                <a:spcPts val="2200"/>
+              </a:lnSpc>
+              <a:spcAft>
+                <a:spcPts val="1000"/>
+              </a:spcAft>
+              <a:defRPr sz="2000" b="0">
+                <a:solidFill>
+                  <a:srgbClr val="333333"/>
+                </a:solidFill>
+                <a:latin typeface="Calibri"/>
+              </a:defRPr>
+            </a:pPr>
+            <a:r>
+              <a:t>• No `always @*`; blocking vs nonblocking</a:t>
+            </a:r>
+          </a:p>
+        </p:txBody>
+      </p:sp>
+      <p:sp>
+        <p:nvSpPr>
+          <p:cNvPr id="4" name="TextBox 3"/>
+          <p:cNvSpPr txBox="1"/>
+          <p:nvPr/>
+        </p:nvSpPr>
+        <p:spPr>
+          <a:xfrm>
+            <a:off x="548640" y="6355080"/>
+            <a:ext cx="11064240" cy="320040"/>
+          </a:xfrm>
+          <a:prstGeom prst="rect">
+            <a:avLst/>
+          </a:prstGeom>
+          <a:noFill/>
+        </p:spPr>
+        <p:txBody>
+          <a:bodyPr wrap="square">
+            <a:noAutofit/>
+          </a:bodyPr>
+          <a:lstStyle/>
+          <a:p>
+            <a:pPr algn="r">
+              <a:lnSpc>
+                <a:spcPts val="2200"/>
+              </a:lnSpc>
+              <a:defRPr sz="1000" b="0">
+                <a:solidFill>
+                  <a:srgbClr val="666666"/>
+                </a:solidFill>
+                <a:latin typeface="Calibri"/>
+              </a:defRPr>
+            </a:pPr>
+            <a:r>
+              <a:t>learn_verilog_systemverilog / Module 1</a:t>
+            </a:r>
+          </a:p>
+        </p:txBody>
+      </p:sp>
+    </p:spTree>
+  </p:cSld>
+  <p:clrMapOvr>
+    <a:masterClrMapping/>
+  </p:clrMapOvr>
+</p:sld>
+</file>
+
+<file path=ppt/slides/slide34.xml><?xml version="1.0" encoding="utf-8"?>
+<p:sld xmlns:a="http://schemas.openxmlformats.org/drawingml/2006/main" xmlns:p="http://schemas.openxmlformats.org/presentationml/2006/main" xmlns:r="http://schemas.openxmlformats.org/officeDocument/2006/relationships">
+  <p:cSld>
+    <p:spTree>
+      <p:nvGrpSpPr>
+        <p:cNvPr id="1" name=""/>
+        <p:cNvGrpSpPr/>
+        <p:nvPr/>
+      </p:nvGrpSpPr>
+      <p:grpSpPr/>
+      <p:sp>
+        <p:nvSpPr>
+          <p:cNvPr id="2" name="TextBox 1"/>
+          <p:cNvSpPr txBox="1"/>
+          <p:nvPr/>
+        </p:nvSpPr>
+        <p:spPr>
+          <a:xfrm>
+            <a:off x="548640" y="411480"/>
+            <a:ext cx="11064240" cy="777240"/>
+          </a:xfrm>
+          <a:prstGeom prst="rect">
+            <a:avLst/>
+          </a:prstGeom>
+          <a:noFill/>
+        </p:spPr>
+        <p:txBody>
+          <a:bodyPr wrap="square">
+            <a:noAutofit/>
+          </a:bodyPr>
+          <a:lstStyle/>
+          <a:p>
+            <a:pPr>
+              <a:lnSpc>
+                <a:spcPts val="2200"/>
+              </a:lnSpc>
+              <a:defRPr sz="2800" b="1">
+                <a:solidFill>
+                  <a:srgbClr val="1A1A2E"/>
+                </a:solidFill>
+                <a:latin typeface="Calibri"/>
+              </a:defRPr>
+            </a:pPr>
+            <a:r>
+              <a:t>Demo: Procedural Blocks</a:t>
+            </a:r>
+          </a:p>
+        </p:txBody>
+      </p:sp>
+      <p:sp>
+        <p:nvSpPr>
+          <p:cNvPr id="3" name="TextBox 2"/>
+          <p:cNvSpPr txBox="1"/>
+          <p:nvPr/>
+        </p:nvSpPr>
+        <p:spPr>
+          <a:xfrm>
+            <a:off x="548640" y="1051560"/>
+            <a:ext cx="11064240" cy="914400"/>
+          </a:xfrm>
+          <a:prstGeom prst="rect">
+            <a:avLst/>
+          </a:prstGeom>
+          <a:solidFill>
+            <a:srgbClr val="F4F4F4"/>
+          </a:solidFill>
+        </p:spPr>
+        <p:txBody>
+          <a:bodyPr wrap="square">
+            <a:noAutofit/>
+          </a:bodyPr>
+          <a:lstStyle/>
+          <a:p>
+            <a:pPr>
+              <a:lnSpc>
+                <a:spcPts val="2200"/>
+              </a:lnSpc>
+              <a:spcAft>
+                <a:spcPts val="200"/>
+              </a:spcAft>
+              <a:defRPr sz="2000" b="0">
+                <a:solidFill>
+                  <a:srgbClr val="333333"/>
+                </a:solidFill>
+                <a:latin typeface="Consolas"/>
+              </a:defRPr>
+            </a:pPr>
+            <a:r>
+              <a:t>$ cd module1/examples/procedural &amp;&amp; make clean &amp;&amp; make run</a:t>
+            </a:r>
+          </a:p>
+        </p:txBody>
+      </p:sp>
+      <p:pic>
+        <p:nvPicPr>
+          <p:cNvPr id="4" name="Picture 3" descr="ex06_procedural.png"/>
+          <p:cNvPicPr>
+            <a:picLocks noChangeAspect="1"/>
+          </p:cNvPicPr>
+          <p:nvPr/>
+        </p:nvPicPr>
+        <p:blipFill>
+          <a:blip r:embed="rId2"/>
+          <a:stretch>
+            <a:fillRect/>
+          </a:stretch>
+        </p:blipFill>
+        <p:spPr>
+          <a:xfrm>
+            <a:off x="548640" y="1965960"/>
+            <a:ext cx="7071358" cy="3977639"/>
+          </a:xfrm>
+          <a:prstGeom prst="rect">
+            <a:avLst/>
+          </a:prstGeom>
+        </p:spPr>
+      </p:pic>
+      <p:sp>
+        <p:nvSpPr>
+          <p:cNvPr id="5" name="TextBox 4"/>
+          <p:cNvSpPr txBox="1"/>
+          <p:nvPr/>
+        </p:nvSpPr>
+        <p:spPr>
+          <a:xfrm>
+            <a:off x="548640" y="6355080"/>
+            <a:ext cx="11064240" cy="320040"/>
+          </a:xfrm>
+          <a:prstGeom prst="rect">
+            <a:avLst/>
+          </a:prstGeom>
+          <a:noFill/>
+        </p:spPr>
+        <p:txBody>
+          <a:bodyPr wrap="square">
+            <a:noAutofit/>
+          </a:bodyPr>
+          <a:lstStyle/>
+          <a:p>
+            <a:pPr algn="r">
+              <a:lnSpc>
+                <a:spcPts val="2200"/>
+              </a:lnSpc>
+              <a:defRPr sz="1000" b="0">
+                <a:solidFill>
+                  <a:srgbClr val="666666"/>
+                </a:solidFill>
+                <a:latin typeface="Calibri"/>
+              </a:defRPr>
+            </a:pPr>
+            <a:r>
+              <a:t>learn_verilog_systemverilog / Module 1</a:t>
+            </a:r>
+          </a:p>
+        </p:txBody>
+      </p:sp>
+    </p:spTree>
+  </p:cSld>
+  <p:clrMapOvr>
+    <a:masterClrMapping/>
+  </p:clrMapOvr>
+</p:sld>
+</file>
+
+<file path=ppt/slides/slide35.xml><?xml version="1.0" encoding="utf-8"?>
+<p:sld xmlns:a="http://schemas.openxmlformats.org/drawingml/2006/main" xmlns:p="http://schemas.openxmlformats.org/presentationml/2006/main" xmlns:r="http://schemas.openxmlformats.org/officeDocument/2006/relationships">
+  <p:cSld>
+    <p:spTree>
+      <p:nvGrpSpPr>
+        <p:cNvPr id="1" name=""/>
+        <p:cNvGrpSpPr/>
+        <p:nvPr/>
+      </p:nvGrpSpPr>
+      <p:grpSpPr/>
+      <p:sp>
+        <p:nvSpPr>
+          <p:cNvPr id="2" name="TextBox 1"/>
+          <p:cNvSpPr txBox="1"/>
+          <p:nvPr/>
+        </p:nvSpPr>
+        <p:spPr>
+          <a:xfrm>
+            <a:off x="548640" y="411480"/>
+            <a:ext cx="11064240" cy="777240"/>
+          </a:xfrm>
+          <a:prstGeom prst="rect">
+            <a:avLst/>
+          </a:prstGeom>
+          <a:noFill/>
+        </p:spPr>
+        <p:txBody>
+          <a:bodyPr wrap="square">
+            <a:noAutofit/>
+          </a:bodyPr>
+          <a:lstStyle/>
+          <a:p>
+            <a:pPr>
+              <a:lnSpc>
+                <a:spcPts val="2200"/>
+              </a:lnSpc>
+              <a:defRPr sz="2800" b="1">
+                <a:solidFill>
+                  <a:srgbClr val="1A1A2E"/>
+                </a:solidFill>
+                <a:latin typeface="Calibri"/>
+              </a:defRPr>
+            </a:pPr>
+            <a:r>
+              <a:t>Example 7: Sequential D Flip-Flop</a:t>
+            </a:r>
+          </a:p>
+        </p:txBody>
+      </p:sp>
+      <p:sp>
+        <p:nvSpPr>
+          <p:cNvPr id="3" name="TextBox 2"/>
+          <p:cNvSpPr txBox="1"/>
+          <p:nvPr/>
+        </p:nvSpPr>
+        <p:spPr>
+          <a:xfrm>
+            <a:off x="548640" y="1234440"/>
+            <a:ext cx="11064240" cy="4937760"/>
+          </a:xfrm>
+          <a:prstGeom prst="rect">
+            <a:avLst/>
+          </a:prstGeom>
+          <a:noFill/>
+        </p:spPr>
+        <p:txBody>
+          <a:bodyPr wrap="square">
+            <a:noAutofit/>
+          </a:bodyPr>
+          <a:lstStyle/>
+          <a:p>
+            <a:pPr>
+              <a:lnSpc>
+                <a:spcPts val="2200"/>
+              </a:lnSpc>
+              <a:spcAft>
+                <a:spcPts val="1000"/>
+              </a:spcAft>
+              <a:defRPr sz="2000" b="0">
+                <a:solidFill>
+                  <a:srgbClr val="333333"/>
+                </a:solidFill>
+                <a:latin typeface="Calibri"/>
+              </a:defRPr>
+            </a:pPr>
+            <a:r>
+              <a:t>• D flip-flop with async reset: always @(posedge clk</a:t>
+            </a:r>
+          </a:p>
+          <a:p>
+            <a:pPr>
+              <a:lnSpc>
+                <a:spcPts val="2200"/>
+              </a:lnSpc>
+              <a:spcAft>
+                <a:spcPts val="1000"/>
+              </a:spcAft>
+              <a:defRPr sz="2000" b="0">
+                <a:solidFill>
+                  <a:srgbClr val="333333"/>
+                </a:solidFill>
+                <a:latin typeface="Calibri"/>
+              </a:defRPr>
+            </a:pPr>
+            <a:r>
+              <a:t>      or negedge rst_n) and &lt;=</a:t>
+            </a:r>
+          </a:p>
+          <a:p>
+            <a:pPr>
+              <a:lnSpc>
+                <a:spcPts val="2200"/>
+              </a:lnSpc>
+              <a:spcAft>
+                <a:spcPts val="1000"/>
+              </a:spcAft>
+              <a:defRPr sz="2000" b="0">
+                <a:solidFill>
+                  <a:srgbClr val="333333"/>
+                </a:solidFill>
+                <a:latin typeface="Calibri"/>
+              </a:defRPr>
+            </a:pPr>
+            <a:r>
+              <a:t>• Edge-sensitive always; nonblocking for sequential</a:t>
+            </a:r>
+          </a:p>
+          <a:p>
+            <a:pPr>
+              <a:lnSpc>
+                <a:spcPts val="2200"/>
+              </a:lnSpc>
+              <a:spcAft>
+                <a:spcPts val="1000"/>
+              </a:spcAft>
+              <a:defRPr sz="2000" b="0">
+                <a:solidFill>
+                  <a:srgbClr val="333333"/>
+                </a:solidFill>
+                <a:latin typeface="Calibri"/>
+              </a:defRPr>
+            </a:pPr>
+            <a:r>
+              <a:t>      logic</a:t>
+            </a:r>
+          </a:p>
+        </p:txBody>
+      </p:sp>
+      <p:sp>
+        <p:nvSpPr>
+          <p:cNvPr id="4" name="TextBox 3"/>
+          <p:cNvSpPr txBox="1"/>
+          <p:nvPr/>
+        </p:nvSpPr>
+        <p:spPr>
+          <a:xfrm>
+            <a:off x="548640" y="6355080"/>
+            <a:ext cx="11064240" cy="320040"/>
+          </a:xfrm>
+          <a:prstGeom prst="rect">
+            <a:avLst/>
+          </a:prstGeom>
+          <a:noFill/>
+        </p:spPr>
+        <p:txBody>
+          <a:bodyPr wrap="square">
+            <a:noAutofit/>
+          </a:bodyPr>
+          <a:lstStyle/>
+          <a:p>
+            <a:pPr algn="r">
+              <a:lnSpc>
+                <a:spcPts val="2200"/>
+              </a:lnSpc>
+              <a:defRPr sz="1000" b="0">
+                <a:solidFill>
+                  <a:srgbClr val="666666"/>
+                </a:solidFill>
+                <a:latin typeface="Calibri"/>
+              </a:defRPr>
+            </a:pPr>
+            <a:r>
+              <a:t>learn_verilog_systemverilog / Module 1</a:t>
+            </a:r>
+          </a:p>
+        </p:txBody>
+      </p:sp>
+    </p:spTree>
+  </p:cSld>
+  <p:clrMapOvr>
+    <a:masterClrMapping/>
+  </p:clrMapOvr>
+</p:sld>
+</file>
+
+<file path=ppt/slides/slide36.xml><?xml version="1.0" encoding="utf-8"?>
+<p:sld xmlns:a="http://schemas.openxmlformats.org/drawingml/2006/main" xmlns:p="http://schemas.openxmlformats.org/presentationml/2006/main" xmlns:r="http://schemas.openxmlformats.org/officeDocument/2006/relationships">
+  <p:cSld>
+    <p:spTree>
+      <p:nvGrpSpPr>
+        <p:cNvPr id="1" name=""/>
+        <p:cNvGrpSpPr/>
+        <p:nvPr/>
+      </p:nvGrpSpPr>
+      <p:grpSpPr/>
+      <p:sp>
+        <p:nvSpPr>
+          <p:cNvPr id="2" name="TextBox 1"/>
+          <p:cNvSpPr txBox="1"/>
+          <p:nvPr/>
+        </p:nvSpPr>
+        <p:spPr>
+          <a:xfrm>
+            <a:off x="548640" y="411480"/>
+            <a:ext cx="11064240" cy="777240"/>
+          </a:xfrm>
+          <a:prstGeom prst="rect">
+            <a:avLst/>
+          </a:prstGeom>
+          <a:noFill/>
+        </p:spPr>
+        <p:txBody>
+          <a:bodyPr wrap="square">
+            <a:noAutofit/>
+          </a:bodyPr>
+          <a:lstStyle/>
+          <a:p>
+            <a:pPr>
+              <a:lnSpc>
+                <a:spcPts val="2200"/>
+              </a:lnSpc>
+              <a:defRPr sz="2800" b="1">
+                <a:solidFill>
+                  <a:srgbClr val="1A1A2E"/>
+                </a:solidFill>
+                <a:latin typeface="Calibri"/>
+              </a:defRPr>
+            </a:pPr>
+            <a:r>
+              <a:t>Demo: Sequential D Flip-Flop</a:t>
+            </a:r>
+          </a:p>
+        </p:txBody>
+      </p:sp>
+      <p:sp>
+        <p:nvSpPr>
+          <p:cNvPr id="3" name="TextBox 2"/>
+          <p:cNvSpPr txBox="1"/>
+          <p:nvPr/>
+        </p:nvSpPr>
+        <p:spPr>
+          <a:xfrm>
+            <a:off x="548640" y="1051560"/>
+            <a:ext cx="11064240" cy="914400"/>
+          </a:xfrm>
+          <a:prstGeom prst="rect">
+            <a:avLst/>
+          </a:prstGeom>
+          <a:solidFill>
+            <a:srgbClr val="F4F4F4"/>
+          </a:solidFill>
+        </p:spPr>
+        <p:txBody>
+          <a:bodyPr wrap="square">
+            <a:noAutofit/>
+          </a:bodyPr>
+          <a:lstStyle/>
+          <a:p>
+            <a:pPr>
+              <a:lnSpc>
+                <a:spcPts val="2200"/>
+              </a:lnSpc>
+              <a:spcAft>
+                <a:spcPts val="200"/>
+              </a:spcAft>
+              <a:defRPr sz="2000" b="0">
+                <a:solidFill>
+                  <a:srgbClr val="333333"/>
+                </a:solidFill>
+                <a:latin typeface="Consolas"/>
+              </a:defRPr>
+            </a:pPr>
+            <a:r>
+              <a:t>$ cd module1/examples/sequential_dff &amp;&amp; make clean &amp;&amp; make run</a:t>
+            </a:r>
+          </a:p>
+        </p:txBody>
+      </p:sp>
+      <p:pic>
+        <p:nvPicPr>
+          <p:cNvPr id="4" name="Picture 3" descr="ex07_sequential_dff.png"/>
+          <p:cNvPicPr>
+            <a:picLocks noChangeAspect="1"/>
+          </p:cNvPicPr>
+          <p:nvPr/>
+        </p:nvPicPr>
+        <p:blipFill>
+          <a:blip r:embed="rId2"/>
+          <a:stretch>
+            <a:fillRect/>
+          </a:stretch>
+        </p:blipFill>
+        <p:spPr>
+          <a:xfrm>
+            <a:off x="548640" y="1965960"/>
+            <a:ext cx="7071358" cy="3977639"/>
+          </a:xfrm>
+          <a:prstGeom prst="rect">
+            <a:avLst/>
+          </a:prstGeom>
+        </p:spPr>
+      </p:pic>
+      <p:sp>
+        <p:nvSpPr>
+          <p:cNvPr id="5" name="TextBox 4"/>
+          <p:cNvSpPr txBox="1"/>
+          <p:nvPr/>
+        </p:nvSpPr>
+        <p:spPr>
+          <a:xfrm>
+            <a:off x="548640" y="6355080"/>
+            <a:ext cx="11064240" cy="320040"/>
+          </a:xfrm>
+          <a:prstGeom prst="rect">
+            <a:avLst/>
+          </a:prstGeom>
+          <a:noFill/>
+        </p:spPr>
+        <p:txBody>
+          <a:bodyPr wrap="square">
+            <a:noAutofit/>
+          </a:bodyPr>
+          <a:lstStyle/>
+          <a:p>
+            <a:pPr algn="r">
+              <a:lnSpc>
+                <a:spcPts val="2200"/>
+              </a:lnSpc>
+              <a:defRPr sz="1000" b="0">
+                <a:solidFill>
+                  <a:srgbClr val="666666"/>
+                </a:solidFill>
+                <a:latin typeface="Calibri"/>
+              </a:defRPr>
+            </a:pPr>
+            <a:r>
+              <a:t>learn_verilog_systemverilog / Module 1</a:t>
+            </a:r>
+          </a:p>
+        </p:txBody>
+      </p:sp>
+    </p:spTree>
+  </p:cSld>
+  <p:clrMapOvr>
+    <a:masterClrMapping/>
+  </p:clrMapOvr>
+</p:sld>
+</file>
+
+<file path=ppt/slides/slide37.xml><?xml version="1.0" encoding="utf-8"?>
+<p:sld xmlns:a="http://schemas.openxmlformats.org/drawingml/2006/main" xmlns:p="http://schemas.openxmlformats.org/presentationml/2006/main" xmlns:r="http://schemas.openxmlformats.org/officeDocument/2006/relationships">
+  <p:cSld>
+    <p:spTree>
+      <p:nvGrpSpPr>
+        <p:cNvPr id="1" name=""/>
+        <p:cNvGrpSpPr/>
+        <p:nvPr/>
+      </p:nvGrpSpPr>
+      <p:grpSpPr/>
+      <p:sp>
+        <p:nvSpPr>
+          <p:cNvPr id="2" name="TextBox 1"/>
+          <p:cNvSpPr txBox="1"/>
+          <p:nvPr/>
+        </p:nvSpPr>
+        <p:spPr>
+          <a:xfrm>
+            <a:off x="548640" y="411480"/>
+            <a:ext cx="11064240" cy="777240"/>
+          </a:xfrm>
+          <a:prstGeom prst="rect">
+            <a:avLst/>
+          </a:prstGeom>
+          <a:noFill/>
+        </p:spPr>
+        <p:txBody>
+          <a:bodyPr wrap="square">
+            <a:noAutofit/>
+          </a:bodyPr>
+          <a:lstStyle/>
+          <a:p>
+            <a:pPr>
+              <a:lnSpc>
+                <a:spcPts val="2200"/>
+              </a:lnSpc>
+              <a:defRPr sz="2800" b="1">
+                <a:solidFill>
+                  <a:srgbClr val="1A1A2E"/>
+                </a:solidFill>
+                <a:latin typeface="Calibri"/>
+              </a:defRPr>
+            </a:pPr>
+            <a:r>
+              <a:t>Example 8: Delays and Timing</a:t>
+            </a:r>
+          </a:p>
+        </p:txBody>
+      </p:sp>
+      <p:sp>
+        <p:nvSpPr>
+          <p:cNvPr id="3" name="TextBox 2"/>
+          <p:cNvSpPr txBox="1"/>
+          <p:nvPr/>
+        </p:nvSpPr>
+        <p:spPr>
+          <a:xfrm>
+            <a:off x="548640" y="1234440"/>
+            <a:ext cx="11064240" cy="4937760"/>
+          </a:xfrm>
+          <a:prstGeom prst="rect">
+            <a:avLst/>
+          </a:prstGeom>
+          <a:noFill/>
+        </p:spPr>
+        <p:txBody>
+          <a:bodyPr wrap="square">
+            <a:noAutofit/>
+          </a:bodyPr>
+          <a:lstStyle/>
+          <a:p>
+            <a:pPr>
+              <a:lnSpc>
+                <a:spcPts val="2200"/>
+              </a:lnSpc>
+              <a:spcAft>
+                <a:spcPts val="1000"/>
+              </a:spcAft>
+              <a:defRPr sz="2000" b="0">
+                <a:solidFill>
+                  <a:srgbClr val="333333"/>
+                </a:solidFill>
+                <a:latin typeface="Calibri"/>
+              </a:defRPr>
+            </a:pPr>
+            <a:r>
+              <a:t>• #n, @(posedge clk), wait(condition); clock</a:t>
+            </a:r>
+          </a:p>
+          <a:p>
+            <a:pPr>
+              <a:lnSpc>
+                <a:spcPts val="2200"/>
+              </a:lnSpc>
+              <a:spcAft>
+                <a:spcPts val="1000"/>
+              </a:spcAft>
+              <a:defRPr sz="2000" b="0">
+                <a:solidFill>
+                  <a:srgbClr val="333333"/>
+                </a:solidFill>
+                <a:latin typeface="Calibri"/>
+              </a:defRPr>
+            </a:pPr>
+            <a:r>
+              <a:t>      generation with forever</a:t>
+            </a:r>
+          </a:p>
+          <a:p>
+            <a:pPr>
+              <a:lnSpc>
+                <a:spcPts val="2200"/>
+              </a:lnSpc>
+              <a:spcAft>
+                <a:spcPts val="1000"/>
+              </a:spcAft>
+              <a:defRPr sz="2000" b="0">
+                <a:solidFill>
+                  <a:srgbClr val="333333"/>
+                </a:solidFill>
+                <a:latin typeface="Calibri"/>
+              </a:defRPr>
+            </a:pPr>
+            <a:r>
+              <a:t>• Delay-based and event-based timing in testbenches</a:t>
+            </a:r>
+          </a:p>
+        </p:txBody>
+      </p:sp>
+      <p:sp>
+        <p:nvSpPr>
+          <p:cNvPr id="4" name="TextBox 3"/>
+          <p:cNvSpPr txBox="1"/>
+          <p:nvPr/>
+        </p:nvSpPr>
+        <p:spPr>
+          <a:xfrm>
+            <a:off x="548640" y="6355080"/>
+            <a:ext cx="11064240" cy="320040"/>
+          </a:xfrm>
+          <a:prstGeom prst="rect">
+            <a:avLst/>
+          </a:prstGeom>
+          <a:noFill/>
+        </p:spPr>
+        <p:txBody>
+          <a:bodyPr wrap="square">
+            <a:noAutofit/>
+          </a:bodyPr>
+          <a:lstStyle/>
+          <a:p>
+            <a:pPr algn="r">
+              <a:lnSpc>
+                <a:spcPts val="2200"/>
+              </a:lnSpc>
+              <a:defRPr sz="1000" b="0">
+                <a:solidFill>
+                  <a:srgbClr val="666666"/>
+                </a:solidFill>
+                <a:latin typeface="Calibri"/>
+              </a:defRPr>
+            </a:pPr>
+            <a:r>
+              <a:t>learn_verilog_systemverilog / Module 1</a:t>
+            </a:r>
+          </a:p>
+        </p:txBody>
+      </p:sp>
+    </p:spTree>
+  </p:cSld>
+  <p:clrMapOvr>
+    <a:masterClrMapping/>
+  </p:clrMapOvr>
+</p:sld>
+</file>
+
+<file path=ppt/slides/slide38.xml><?xml version="1.0" encoding="utf-8"?>
+<p:sld xmlns:a="http://schemas.openxmlformats.org/drawingml/2006/main" xmlns:p="http://schemas.openxmlformats.org/presentationml/2006/main" xmlns:r="http://schemas.openxmlformats.org/officeDocument/2006/relationships">
+  <p:cSld>
+    <p:spTree>
+      <p:nvGrpSpPr>
+        <p:cNvPr id="1" name=""/>
+        <p:cNvGrpSpPr/>
+        <p:nvPr/>
+      </p:nvGrpSpPr>
+      <p:grpSpPr/>
+      <p:sp>
+        <p:nvSpPr>
+          <p:cNvPr id="2" name="TextBox 1"/>
+          <p:cNvSpPr txBox="1"/>
+          <p:nvPr/>
+        </p:nvSpPr>
+        <p:spPr>
+          <a:xfrm>
+            <a:off x="548640" y="411480"/>
+            <a:ext cx="11064240" cy="777240"/>
+          </a:xfrm>
+          <a:prstGeom prst="rect">
+            <a:avLst/>
+          </a:prstGeom>
+          <a:noFill/>
+        </p:spPr>
+        <p:txBody>
+          <a:bodyPr wrap="square">
+            <a:noAutofit/>
+          </a:bodyPr>
+          <a:lstStyle/>
+          <a:p>
+            <a:pPr>
+              <a:lnSpc>
+                <a:spcPts val="2200"/>
+              </a:lnSpc>
+              <a:defRPr sz="2800" b="1">
+                <a:solidFill>
+                  <a:srgbClr val="1A1A2E"/>
+                </a:solidFill>
+                <a:latin typeface="Calibri"/>
+              </a:defRPr>
+            </a:pPr>
+            <a:r>
+              <a:t>Demo: Delays and Timing</a:t>
+            </a:r>
+          </a:p>
+        </p:txBody>
+      </p:sp>
+      <p:sp>
+        <p:nvSpPr>
+          <p:cNvPr id="3" name="TextBox 2"/>
+          <p:cNvSpPr txBox="1"/>
+          <p:nvPr/>
+        </p:nvSpPr>
+        <p:spPr>
+          <a:xfrm>
+            <a:off x="548640" y="1051560"/>
+            <a:ext cx="11064240" cy="914400"/>
+          </a:xfrm>
+          <a:prstGeom prst="rect">
+            <a:avLst/>
+          </a:prstGeom>
+          <a:solidFill>
+            <a:srgbClr val="F4F4F4"/>
+          </a:solidFill>
+        </p:spPr>
+        <p:txBody>
+          <a:bodyPr wrap="square">
+            <a:noAutofit/>
+          </a:bodyPr>
+          <a:lstStyle/>
+          <a:p>
+            <a:pPr>
+              <a:lnSpc>
+                <a:spcPts val="2200"/>
+              </a:lnSpc>
+              <a:spcAft>
+                <a:spcPts val="200"/>
+              </a:spcAft>
+              <a:defRPr sz="2000" b="0">
+                <a:solidFill>
+                  <a:srgbClr val="333333"/>
+                </a:solidFill>
+                <a:latin typeface="Consolas"/>
+              </a:defRPr>
+            </a:pPr>
+            <a:r>
+              <a:t>$ cd module1/examples/delays_timing &amp;&amp; make clean &amp;&amp; make run</a:t>
+            </a:r>
+          </a:p>
+        </p:txBody>
+      </p:sp>
+      <p:pic>
+        <p:nvPicPr>
+          <p:cNvPr id="4" name="Picture 3" descr="ex08_delays_timing.png"/>
+          <p:cNvPicPr>
+            <a:picLocks noChangeAspect="1"/>
+          </p:cNvPicPr>
+          <p:nvPr/>
+        </p:nvPicPr>
+        <p:blipFill>
+          <a:blip r:embed="rId2"/>
+          <a:stretch>
+            <a:fillRect/>
+          </a:stretch>
+        </p:blipFill>
+        <p:spPr>
+          <a:xfrm>
+            <a:off x="548640" y="1965960"/>
+            <a:ext cx="7071358" cy="3977639"/>
+          </a:xfrm>
+          <a:prstGeom prst="rect">
+            <a:avLst/>
+          </a:prstGeom>
+        </p:spPr>
+      </p:pic>
+      <p:sp>
+        <p:nvSpPr>
+          <p:cNvPr id="5" name="TextBox 4"/>
+          <p:cNvSpPr txBox="1"/>
+          <p:nvPr/>
+        </p:nvSpPr>
+        <p:spPr>
+          <a:xfrm>
+            <a:off x="548640" y="6355080"/>
+            <a:ext cx="11064240" cy="320040"/>
+          </a:xfrm>
+          <a:prstGeom prst="rect">
+            <a:avLst/>
+          </a:prstGeom>
+          <a:noFill/>
+        </p:spPr>
+        <p:txBody>
+          <a:bodyPr wrap="square">
+            <a:noAutofit/>
+          </a:bodyPr>
+          <a:lstStyle/>
+          <a:p>
+            <a:pPr algn="r">
+              <a:lnSpc>
+                <a:spcPts val="2200"/>
+              </a:lnSpc>
+              <a:defRPr sz="1000" b="0">
+                <a:solidFill>
+                  <a:srgbClr val="666666"/>
+                </a:solidFill>
+                <a:latin typeface="Calibri"/>
+              </a:defRPr>
+            </a:pPr>
+            <a:r>
+              <a:t>learn_verilog_systemverilog / Module 1</a:t>
+            </a:r>
+          </a:p>
+        </p:txBody>
+      </p:sp>
+    </p:spTree>
+  </p:cSld>
+  <p:clrMapOvr>
+    <a:masterClrMapping/>
+  </p:clrMapOvr>
+</p:sld>
+</file>
+
+<file path=ppt/slides/slide39.xml><?xml version="1.0" encoding="utf-8"?>
+<p:sld xmlns:a="http://schemas.openxmlformats.org/drawingml/2006/main" xmlns:p="http://schemas.openxmlformats.org/presentationml/2006/main" xmlns:r="http://schemas.openxmlformats.org/officeDocument/2006/relationships">
+  <p:cSld>
+    <p:spTree>
+      <p:nvGrpSpPr>
+        <p:cNvPr id="1" name=""/>
+        <p:cNvGrpSpPr/>
+        <p:nvPr/>
+      </p:nvGrpSpPr>
+      <p:grpSpPr/>
+      <p:sp>
+        <p:nvSpPr>
+          <p:cNvPr id="2" name="TextBox 1"/>
+          <p:cNvSpPr txBox="1"/>
+          <p:nvPr/>
+        </p:nvSpPr>
+        <p:spPr>
+          <a:xfrm>
+            <a:off x="548640" y="411480"/>
+            <a:ext cx="11064240" cy="777240"/>
+          </a:xfrm>
+          <a:prstGeom prst="rect">
+            <a:avLst/>
+          </a:prstGeom>
+          <a:noFill/>
+        </p:spPr>
+        <p:txBody>
+          <a:bodyPr wrap="square">
+            <a:noAutofit/>
+          </a:bodyPr>
+          <a:lstStyle/>
+          <a:p>
+            <a:pPr>
+              <a:lnSpc>
+                <a:spcPts val="2200"/>
+              </a:lnSpc>
+              <a:defRPr sz="2800" b="1">
+                <a:solidFill>
+                  <a:srgbClr val="1A1A2E"/>
+                </a:solidFill>
+                <a:latin typeface="Calibri"/>
+              </a:defRPr>
+            </a:pPr>
+            <a:r>
+              <a:t>Example 9: Testbenches</a:t>
+            </a:r>
+          </a:p>
+        </p:txBody>
+      </p:sp>
+      <p:sp>
+        <p:nvSpPr>
+          <p:cNvPr id="3" name="TextBox 2"/>
+          <p:cNvSpPr txBox="1"/>
+          <p:nvPr/>
+        </p:nvSpPr>
+        <p:spPr>
+          <a:xfrm>
+            <a:off x="548640" y="1234440"/>
+            <a:ext cx="11064240" cy="4937760"/>
+          </a:xfrm>
+          <a:prstGeom prst="rect">
+            <a:avLst/>
+          </a:prstGeom>
+          <a:noFill/>
+        </p:spPr>
+        <p:txBody>
+          <a:bodyPr wrap="square">
+            <a:noAutofit/>
+          </a:bodyPr>
+          <a:lstStyle/>
+          <a:p>
+            <a:pPr>
+              <a:lnSpc>
+                <a:spcPts val="2200"/>
+              </a:lnSpc>
+              <a:spcAft>
+                <a:spcPts val="1000"/>
+              </a:spcAft>
+              <a:defRPr sz="2000" b="0">
+                <a:solidFill>
+                  <a:srgbClr val="333333"/>
+                </a:solidFill>
+                <a:latin typeface="Calibri"/>
+              </a:defRPr>
+            </a:pPr>
+            <a:r>
+              <a:t>• Minimal testbench with initial, #, $display, $finish</a:t>
+            </a:r>
+          </a:p>
+          <a:p>
+            <a:pPr>
+              <a:lnSpc>
+                <a:spcPts val="2200"/>
+              </a:lnSpc>
+              <a:spcAft>
+                <a:spcPts val="1000"/>
+              </a:spcAft>
+              <a:defRPr sz="2000" b="0">
+                <a:solidFill>
+                  <a:srgbClr val="333333"/>
+                </a:solidFill>
+                <a:latin typeface="Calibri"/>
+              </a:defRPr>
+            </a:pPr>
+            <a:r>
+              <a:t>• Stimulus generation, termination with `$finish`</a:t>
             </a:r>
           </a:p>
         </p:txBody>
@@ -9782,6 +12500,2107 @@
 </p:sld>
 </file>
 
+<file path=ppt/slides/slide40.xml><?xml version="1.0" encoding="utf-8"?>
+<p:sld xmlns:a="http://schemas.openxmlformats.org/drawingml/2006/main" xmlns:p="http://schemas.openxmlformats.org/presentationml/2006/main" xmlns:r="http://schemas.openxmlformats.org/officeDocument/2006/relationships">
+  <p:cSld>
+    <p:spTree>
+      <p:nvGrpSpPr>
+        <p:cNvPr id="1" name=""/>
+        <p:cNvGrpSpPr/>
+        <p:nvPr/>
+      </p:nvGrpSpPr>
+      <p:grpSpPr/>
+      <p:sp>
+        <p:nvSpPr>
+          <p:cNvPr id="2" name="TextBox 1"/>
+          <p:cNvSpPr txBox="1"/>
+          <p:nvPr/>
+        </p:nvSpPr>
+        <p:spPr>
+          <a:xfrm>
+            <a:off x="548640" y="411480"/>
+            <a:ext cx="11064240" cy="777240"/>
+          </a:xfrm>
+          <a:prstGeom prst="rect">
+            <a:avLst/>
+          </a:prstGeom>
+          <a:noFill/>
+        </p:spPr>
+        <p:txBody>
+          <a:bodyPr wrap="square">
+            <a:noAutofit/>
+          </a:bodyPr>
+          <a:lstStyle/>
+          <a:p>
+            <a:pPr>
+              <a:lnSpc>
+                <a:spcPts val="2200"/>
+              </a:lnSpc>
+              <a:defRPr sz="2800" b="1">
+                <a:solidFill>
+                  <a:srgbClr val="1A1A2E"/>
+                </a:solidFill>
+                <a:latin typeface="Calibri"/>
+              </a:defRPr>
+            </a:pPr>
+            <a:r>
+              <a:t>Demo: Testbenches</a:t>
+            </a:r>
+          </a:p>
+        </p:txBody>
+      </p:sp>
+      <p:sp>
+        <p:nvSpPr>
+          <p:cNvPr id="3" name="TextBox 2"/>
+          <p:cNvSpPr txBox="1"/>
+          <p:nvPr/>
+        </p:nvSpPr>
+        <p:spPr>
+          <a:xfrm>
+            <a:off x="548640" y="1051560"/>
+            <a:ext cx="11064240" cy="914400"/>
+          </a:xfrm>
+          <a:prstGeom prst="rect">
+            <a:avLst/>
+          </a:prstGeom>
+          <a:solidFill>
+            <a:srgbClr val="F4F4F4"/>
+          </a:solidFill>
+        </p:spPr>
+        <p:txBody>
+          <a:bodyPr wrap="square">
+            <a:noAutofit/>
+          </a:bodyPr>
+          <a:lstStyle/>
+          <a:p>
+            <a:pPr>
+              <a:lnSpc>
+                <a:spcPts val="2200"/>
+              </a:lnSpc>
+              <a:spcAft>
+                <a:spcPts val="200"/>
+              </a:spcAft>
+              <a:defRPr sz="2000" b="0">
+                <a:solidFill>
+                  <a:srgbClr val="333333"/>
+                </a:solidFill>
+                <a:latin typeface="Consolas"/>
+              </a:defRPr>
+            </a:pPr>
+            <a:r>
+              <a:t>$ cd module1/examples/testbenches &amp;&amp; make clean &amp;&amp; make run</a:t>
+            </a:r>
+          </a:p>
+        </p:txBody>
+      </p:sp>
+      <p:pic>
+        <p:nvPicPr>
+          <p:cNvPr id="4" name="Picture 3" descr="ex09_testbenches.png"/>
+          <p:cNvPicPr>
+            <a:picLocks noChangeAspect="1"/>
+          </p:cNvPicPr>
+          <p:nvPr/>
+        </p:nvPicPr>
+        <p:blipFill>
+          <a:blip r:embed="rId2"/>
+          <a:stretch>
+            <a:fillRect/>
+          </a:stretch>
+        </p:blipFill>
+        <p:spPr>
+          <a:xfrm>
+            <a:off x="548640" y="1965960"/>
+            <a:ext cx="7071358" cy="3977639"/>
+          </a:xfrm>
+          <a:prstGeom prst="rect">
+            <a:avLst/>
+          </a:prstGeom>
+        </p:spPr>
+      </p:pic>
+      <p:sp>
+        <p:nvSpPr>
+          <p:cNvPr id="5" name="TextBox 4"/>
+          <p:cNvSpPr txBox="1"/>
+          <p:nvPr/>
+        </p:nvSpPr>
+        <p:spPr>
+          <a:xfrm>
+            <a:off x="548640" y="6355080"/>
+            <a:ext cx="11064240" cy="320040"/>
+          </a:xfrm>
+          <a:prstGeom prst="rect">
+            <a:avLst/>
+          </a:prstGeom>
+          <a:noFill/>
+        </p:spPr>
+        <p:txBody>
+          <a:bodyPr wrap="square">
+            <a:noAutofit/>
+          </a:bodyPr>
+          <a:lstStyle/>
+          <a:p>
+            <a:pPr algn="r">
+              <a:lnSpc>
+                <a:spcPts val="2200"/>
+              </a:lnSpc>
+              <a:defRPr sz="1000" b="0">
+                <a:solidFill>
+                  <a:srgbClr val="666666"/>
+                </a:solidFill>
+                <a:latin typeface="Calibri"/>
+              </a:defRPr>
+            </a:pPr>
+            <a:r>
+              <a:t>learn_verilog_systemverilog / Module 1</a:t>
+            </a:r>
+          </a:p>
+        </p:txBody>
+      </p:sp>
+    </p:spTree>
+  </p:cSld>
+  <p:clrMapOvr>
+    <a:masterClrMapping/>
+  </p:clrMapOvr>
+</p:sld>
+</file>
+
+<file path=ppt/slides/slide41.xml><?xml version="1.0" encoding="utf-8"?>
+<p:sld xmlns:a="http://schemas.openxmlformats.org/drawingml/2006/main" xmlns:p="http://schemas.openxmlformats.org/presentationml/2006/main" xmlns:r="http://schemas.openxmlformats.org/officeDocument/2006/relationships">
+  <p:cSld>
+    <p:spTree>
+      <p:nvGrpSpPr>
+        <p:cNvPr id="1" name=""/>
+        <p:cNvGrpSpPr/>
+        <p:nvPr/>
+      </p:nvGrpSpPr>
+      <p:grpSpPr/>
+      <p:sp>
+        <p:nvSpPr>
+          <p:cNvPr id="2" name="TextBox 1"/>
+          <p:cNvSpPr txBox="1"/>
+          <p:nvPr/>
+        </p:nvSpPr>
+        <p:spPr>
+          <a:xfrm>
+            <a:off x="548640" y="2743200"/>
+            <a:ext cx="11064240" cy="1371600"/>
+          </a:xfrm>
+          <a:prstGeom prst="rect">
+            <a:avLst/>
+          </a:prstGeom>
+          <a:noFill/>
+        </p:spPr>
+        <p:txBody>
+          <a:bodyPr wrap="square">
+            <a:noAutofit/>
+          </a:bodyPr>
+          <a:lstStyle/>
+          <a:p>
+            <a:pPr algn="ctr">
+              <a:lnSpc>
+                <a:spcPts val="2200"/>
+              </a:lnSpc>
+              <a:defRPr sz="3600" b="1">
+                <a:solidFill>
+                  <a:srgbClr val="1A1A2E"/>
+                </a:solidFill>
+                <a:latin typeface="Calibri"/>
+              </a:defRPr>
+            </a:pPr>
+            <a:r>
+              <a:t>Common pitfalls</a:t>
+            </a:r>
+          </a:p>
+        </p:txBody>
+      </p:sp>
+      <p:sp>
+        <p:nvSpPr>
+          <p:cNvPr id="3" name="TextBox 2"/>
+          <p:cNvSpPr txBox="1"/>
+          <p:nvPr/>
+        </p:nvSpPr>
+        <p:spPr>
+          <a:xfrm>
+            <a:off x="548640" y="6355080"/>
+            <a:ext cx="11064240" cy="320040"/>
+          </a:xfrm>
+          <a:prstGeom prst="rect">
+            <a:avLst/>
+          </a:prstGeom>
+          <a:noFill/>
+        </p:spPr>
+        <p:txBody>
+          <a:bodyPr wrap="square">
+            <a:noAutofit/>
+          </a:bodyPr>
+          <a:lstStyle/>
+          <a:p>
+            <a:pPr algn="r">
+              <a:lnSpc>
+                <a:spcPts val="2200"/>
+              </a:lnSpc>
+              <a:defRPr sz="1000" b="0">
+                <a:solidFill>
+                  <a:srgbClr val="666666"/>
+                </a:solidFill>
+                <a:latin typeface="Calibri"/>
+              </a:defRPr>
+            </a:pPr>
+            <a:r>
+              <a:t>learn_verilog_systemverilog / Module 1</a:t>
+            </a:r>
+          </a:p>
+        </p:txBody>
+      </p:sp>
+    </p:spTree>
+  </p:cSld>
+  <p:clrMapOvr>
+    <a:masterClrMapping/>
+  </p:clrMapOvr>
+</p:sld>
+</file>
+
+<file path=ppt/slides/slide42.xml><?xml version="1.0" encoding="utf-8"?>
+<p:sld xmlns:a="http://schemas.openxmlformats.org/drawingml/2006/main" xmlns:p="http://schemas.openxmlformats.org/presentationml/2006/main" xmlns:r="http://schemas.openxmlformats.org/officeDocument/2006/relationships">
+  <p:cSld>
+    <p:spTree>
+      <p:nvGrpSpPr>
+        <p:cNvPr id="1" name=""/>
+        <p:cNvGrpSpPr/>
+        <p:nvPr/>
+      </p:nvGrpSpPr>
+      <p:grpSpPr/>
+      <p:sp>
+        <p:nvSpPr>
+          <p:cNvPr id="2" name="TextBox 1"/>
+          <p:cNvSpPr txBox="1"/>
+          <p:nvPr/>
+        </p:nvSpPr>
+        <p:spPr>
+          <a:xfrm>
+            <a:off x="548640" y="411480"/>
+            <a:ext cx="11064240" cy="777240"/>
+          </a:xfrm>
+          <a:prstGeom prst="rect">
+            <a:avLst/>
+          </a:prstGeom>
+          <a:noFill/>
+        </p:spPr>
+        <p:txBody>
+          <a:bodyPr wrap="square">
+            <a:noAutofit/>
+          </a:bodyPr>
+          <a:lstStyle/>
+          <a:p>
+            <a:pPr>
+              <a:lnSpc>
+                <a:spcPts val="2200"/>
+              </a:lnSpc>
+              <a:defRPr sz="2800" b="1">
+                <a:solidFill>
+                  <a:srgbClr val="1A1A2E"/>
+                </a:solidFill>
+                <a:latin typeface="Calibri"/>
+              </a:defRPr>
+            </a:pPr>
+            <a:r>
+              <a:t>Incomplete Sensitivity List</a:t>
+            </a:r>
+          </a:p>
+        </p:txBody>
+      </p:sp>
+      <p:sp>
+        <p:nvSpPr>
+          <p:cNvPr id="3" name="TextBox 2"/>
+          <p:cNvSpPr txBox="1"/>
+          <p:nvPr/>
+        </p:nvSpPr>
+        <p:spPr>
+          <a:xfrm>
+            <a:off x="548640" y="1234440"/>
+            <a:ext cx="11064240" cy="4937760"/>
+          </a:xfrm>
+          <a:prstGeom prst="rect">
+            <a:avLst/>
+          </a:prstGeom>
+          <a:noFill/>
+        </p:spPr>
+        <p:txBody>
+          <a:bodyPr wrap="square">
+            <a:noAutofit/>
+          </a:bodyPr>
+          <a:lstStyle/>
+          <a:p>
+            <a:pPr>
+              <a:lnSpc>
+                <a:spcPts val="2200"/>
+              </a:lnSpc>
+              <a:spcAft>
+                <a:spcPts val="1000"/>
+              </a:spcAft>
+              <a:defRPr sz="2000" b="0">
+                <a:solidFill>
+                  <a:srgbClr val="333333"/>
+                </a:solidFill>
+                <a:latin typeface="Calibri"/>
+              </a:defRPr>
+            </a:pPr>
+            <a:r>
+              <a:t>• Mistake: `always @(sel) y = sel ? b : a;` (missing</a:t>
+            </a:r>
+          </a:p>
+          <a:p>
+            <a:pPr>
+              <a:lnSpc>
+                <a:spcPts val="2200"/>
+              </a:lnSpc>
+              <a:spcAft>
+                <a:spcPts val="1000"/>
+              </a:spcAft>
+              <a:defRPr sz="2000" b="0">
+                <a:solidFill>
+                  <a:srgbClr val="333333"/>
+                </a:solidFill>
+                <a:latin typeface="Calibri"/>
+              </a:defRPr>
+            </a:pPr>
+            <a:r>
+              <a:t>      `a` and `b`)</a:t>
+            </a:r>
+          </a:p>
+          <a:p>
+            <a:pPr>
+              <a:lnSpc>
+                <a:spcPts val="2200"/>
+              </a:lnSpc>
+              <a:spcAft>
+                <a:spcPts val="1000"/>
+              </a:spcAft>
+              <a:defRPr sz="2000" b="0">
+                <a:solidFill>
+                  <a:srgbClr val="333333"/>
+                </a:solidFill>
+                <a:latin typeface="Calibri"/>
+              </a:defRPr>
+            </a:pPr>
+            <a:r>
+              <a:t>• Reality: In 1364-1995 you must list every input that</a:t>
+            </a:r>
+          </a:p>
+          <a:p>
+            <a:pPr>
+              <a:lnSpc>
+                <a:spcPts val="2200"/>
+              </a:lnSpc>
+              <a:spcAft>
+                <a:spcPts val="1000"/>
+              </a:spcAft>
+              <a:defRPr sz="2000" b="0">
+                <a:solidFill>
+                  <a:srgbClr val="333333"/>
+                </a:solidFill>
+                <a:latin typeface="Calibri"/>
+              </a:defRPr>
+            </a:pPr>
+            <a:r>
+              <a:t>      the block reads</a:t>
+            </a:r>
+          </a:p>
+          <a:p>
+            <a:pPr>
+              <a:lnSpc>
+                <a:spcPts val="2200"/>
+              </a:lnSpc>
+              <a:spcAft>
+                <a:spcPts val="1000"/>
+              </a:spcAft>
+              <a:defRPr sz="2000" b="0">
+                <a:solidFill>
+                  <a:srgbClr val="333333"/>
+                </a:solidFill>
+                <a:latin typeface="Calibri"/>
+              </a:defRPr>
+            </a:pPr>
+            <a:r>
+              <a:t>• Correct: `always @(a or b or sel) y = sel ? b : a;`</a:t>
+            </a:r>
+          </a:p>
+          <a:p>
+            <a:pPr>
+              <a:lnSpc>
+                <a:spcPts val="2200"/>
+              </a:lnSpc>
+              <a:spcAft>
+                <a:spcPts val="1000"/>
+              </a:spcAft>
+              <a:defRPr sz="2000" b="0">
+                <a:solidFill>
+                  <a:srgbClr val="333333"/>
+                </a:solidFill>
+                <a:latin typeface="Calibri"/>
+              </a:defRPr>
+            </a:pPr>
+            <a:r>
+              <a:t>• Why: Incomplete lists cause simulation/synthesis</a:t>
+            </a:r>
+          </a:p>
+          <a:p>
+            <a:pPr>
+              <a:lnSpc>
+                <a:spcPts val="2200"/>
+              </a:lnSpc>
+              <a:spcAft>
+                <a:spcPts val="1000"/>
+              </a:spcAft>
+              <a:defRPr sz="2000" b="0">
+                <a:solidFill>
+                  <a:srgbClr val="333333"/>
+                </a:solidFill>
+                <a:latin typeface="Calibri"/>
+              </a:defRPr>
+            </a:pPr>
+            <a:r>
+              <a:t>      mismatches and inferred latches</a:t>
+            </a:r>
+          </a:p>
+        </p:txBody>
+      </p:sp>
+      <p:sp>
+        <p:nvSpPr>
+          <p:cNvPr id="4" name="TextBox 3"/>
+          <p:cNvSpPr txBox="1"/>
+          <p:nvPr/>
+        </p:nvSpPr>
+        <p:spPr>
+          <a:xfrm>
+            <a:off x="548640" y="6355080"/>
+            <a:ext cx="11064240" cy="320040"/>
+          </a:xfrm>
+          <a:prstGeom prst="rect">
+            <a:avLst/>
+          </a:prstGeom>
+          <a:noFill/>
+        </p:spPr>
+        <p:txBody>
+          <a:bodyPr wrap="square">
+            <a:noAutofit/>
+          </a:bodyPr>
+          <a:lstStyle/>
+          <a:p>
+            <a:pPr algn="r">
+              <a:lnSpc>
+                <a:spcPts val="2200"/>
+              </a:lnSpc>
+              <a:defRPr sz="1000" b="0">
+                <a:solidFill>
+                  <a:srgbClr val="666666"/>
+                </a:solidFill>
+                <a:latin typeface="Calibri"/>
+              </a:defRPr>
+            </a:pPr>
+            <a:r>
+              <a:t>learn_verilog_systemverilog / Module 1</a:t>
+            </a:r>
+          </a:p>
+        </p:txBody>
+      </p:sp>
+    </p:spTree>
+  </p:cSld>
+  <p:clrMapOvr>
+    <a:masterClrMapping/>
+  </p:clrMapOvr>
+</p:sld>
+</file>
+
+<file path=ppt/slides/slide43.xml><?xml version="1.0" encoding="utf-8"?>
+<p:sld xmlns:a="http://schemas.openxmlformats.org/drawingml/2006/main" xmlns:p="http://schemas.openxmlformats.org/presentationml/2006/main" xmlns:r="http://schemas.openxmlformats.org/officeDocument/2006/relationships">
+  <p:cSld>
+    <p:spTree>
+      <p:nvGrpSpPr>
+        <p:cNvPr id="1" name=""/>
+        <p:cNvGrpSpPr/>
+        <p:nvPr/>
+      </p:nvGrpSpPr>
+      <p:grpSpPr/>
+      <p:sp>
+        <p:nvSpPr>
+          <p:cNvPr id="2" name="TextBox 1"/>
+          <p:cNvSpPr txBox="1"/>
+          <p:nvPr/>
+        </p:nvSpPr>
+        <p:spPr>
+          <a:xfrm>
+            <a:off x="548640" y="411480"/>
+            <a:ext cx="11064240" cy="777240"/>
+          </a:xfrm>
+          <a:prstGeom prst="rect">
+            <a:avLst/>
+          </a:prstGeom>
+          <a:noFill/>
+        </p:spPr>
+        <p:txBody>
+          <a:bodyPr wrap="square">
+            <a:noAutofit/>
+          </a:bodyPr>
+          <a:lstStyle/>
+          <a:p>
+            <a:pPr>
+              <a:lnSpc>
+                <a:spcPts val="2200"/>
+              </a:lnSpc>
+              <a:defRPr sz="2800" b="1">
+                <a:solidFill>
+                  <a:srgbClr val="1A1A2E"/>
+                </a:solidFill>
+                <a:latin typeface="Calibri"/>
+              </a:defRPr>
+            </a:pPr>
+            <a:r>
+              <a:t>Port Type Mismatch</a:t>
+            </a:r>
+          </a:p>
+        </p:txBody>
+      </p:sp>
+      <p:sp>
+        <p:nvSpPr>
+          <p:cNvPr id="3" name="TextBox 2"/>
+          <p:cNvSpPr txBox="1"/>
+          <p:nvPr/>
+        </p:nvSpPr>
+        <p:spPr>
+          <a:xfrm>
+            <a:off x="548640" y="1234440"/>
+            <a:ext cx="11064240" cy="4937760"/>
+          </a:xfrm>
+          <a:prstGeom prst="rect">
+            <a:avLst/>
+          </a:prstGeom>
+          <a:noFill/>
+        </p:spPr>
+        <p:txBody>
+          <a:bodyPr wrap="square">
+            <a:noAutofit/>
+          </a:bodyPr>
+          <a:lstStyle/>
+          <a:p>
+            <a:pPr>
+              <a:lnSpc>
+                <a:spcPts val="2200"/>
+              </a:lnSpc>
+              <a:spcAft>
+                <a:spcPts val="1000"/>
+              </a:spcAft>
+              <a:defRPr sz="2000" b="0">
+                <a:solidFill>
+                  <a:srgbClr val="333333"/>
+                </a:solidFill>
+                <a:latin typeface="Calibri"/>
+              </a:defRPr>
+            </a:pPr>
+            <a:r>
+              <a:t>• Mistake: Declaring as `wire` an output that is</a:t>
+            </a:r>
+          </a:p>
+          <a:p>
+            <a:pPr>
+              <a:lnSpc>
+                <a:spcPts val="2200"/>
+              </a:lnSpc>
+              <a:spcAft>
+                <a:spcPts val="1000"/>
+              </a:spcAft>
+              <a:defRPr sz="2000" b="0">
+                <a:solidFill>
+                  <a:srgbClr val="333333"/>
+                </a:solidFill>
+                <a:latin typeface="Calibri"/>
+              </a:defRPr>
+            </a:pPr>
+            <a:r>
+              <a:t>      assigned in `always`</a:t>
+            </a:r>
+          </a:p>
+          <a:p>
+            <a:pPr>
+              <a:lnSpc>
+                <a:spcPts val="2200"/>
+              </a:lnSpc>
+              <a:spcAft>
+                <a:spcPts val="1000"/>
+              </a:spcAft>
+              <a:defRPr sz="2000" b="0">
+                <a:solidFill>
+                  <a:srgbClr val="333333"/>
+                </a:solidFill>
+                <a:latin typeface="Calibri"/>
+              </a:defRPr>
+            </a:pPr>
+            <a:r>
+              <a:t>• Reality: Outputs driven in procedural blocks must be</a:t>
+            </a:r>
+          </a:p>
+          <a:p>
+            <a:pPr>
+              <a:lnSpc>
+                <a:spcPts val="2200"/>
+              </a:lnSpc>
+              <a:spcAft>
+                <a:spcPts val="1000"/>
+              </a:spcAft>
+              <a:defRPr sz="2000" b="0">
+                <a:solidFill>
+                  <a:srgbClr val="333333"/>
+                </a:solidFill>
+                <a:latin typeface="Calibri"/>
+              </a:defRPr>
+            </a:pPr>
+            <a:r>
+              <a:t>      `reg`</a:t>
+            </a:r>
+          </a:p>
+          <a:p>
+            <a:pPr>
+              <a:lnSpc>
+                <a:spcPts val="2200"/>
+              </a:lnSpc>
+              <a:spcAft>
+                <a:spcPts val="1000"/>
+              </a:spcAft>
+              <a:defRPr sz="2000" b="0">
+                <a:solidFill>
+                  <a:srgbClr val="333333"/>
+                </a:solidFill>
+                <a:latin typeface="Calibri"/>
+              </a:defRPr>
+            </a:pPr>
+            <a:r>
+              <a:t>• Correct: `output y; reg y;` when `y` is assigned in</a:t>
+            </a:r>
+          </a:p>
+          <a:p>
+            <a:pPr>
+              <a:lnSpc>
+                <a:spcPts val="2200"/>
+              </a:lnSpc>
+              <a:spcAft>
+                <a:spcPts val="1000"/>
+              </a:spcAft>
+              <a:defRPr sz="2000" b="0">
+                <a:solidFill>
+                  <a:srgbClr val="333333"/>
+                </a:solidFill>
+                <a:latin typeface="Calibri"/>
+              </a:defRPr>
+            </a:pPr>
+            <a:r>
+              <a:t>      `always`</a:t>
+            </a:r>
+          </a:p>
+          <a:p>
+            <a:pPr>
+              <a:lnSpc>
+                <a:spcPts val="2200"/>
+              </a:lnSpc>
+              <a:spcAft>
+                <a:spcPts val="1000"/>
+              </a:spcAft>
+              <a:defRPr sz="2000" b="0">
+                <a:solidFill>
+                  <a:srgbClr val="333333"/>
+                </a:solidFill>
+                <a:latin typeface="Calibri"/>
+              </a:defRPr>
+            </a:pPr>
+            <a:r>
+              <a:t>• Why: `wire` cannot be the target of procedural</a:t>
+            </a:r>
+          </a:p>
+          <a:p>
+            <a:pPr>
+              <a:lnSpc>
+                <a:spcPts val="2200"/>
+              </a:lnSpc>
+              <a:spcAft>
+                <a:spcPts val="1000"/>
+              </a:spcAft>
+              <a:defRPr sz="2000" b="0">
+                <a:solidFill>
+                  <a:srgbClr val="333333"/>
+                </a:solidFill>
+                <a:latin typeface="Calibri"/>
+              </a:defRPr>
+            </a:pPr>
+            <a:r>
+              <a:t>      assignment</a:t>
+            </a:r>
+          </a:p>
+        </p:txBody>
+      </p:sp>
+      <p:sp>
+        <p:nvSpPr>
+          <p:cNvPr id="4" name="TextBox 3"/>
+          <p:cNvSpPr txBox="1"/>
+          <p:nvPr/>
+        </p:nvSpPr>
+        <p:spPr>
+          <a:xfrm>
+            <a:off x="548640" y="6355080"/>
+            <a:ext cx="11064240" cy="320040"/>
+          </a:xfrm>
+          <a:prstGeom prst="rect">
+            <a:avLst/>
+          </a:prstGeom>
+          <a:noFill/>
+        </p:spPr>
+        <p:txBody>
+          <a:bodyPr wrap="square">
+            <a:noAutofit/>
+          </a:bodyPr>
+          <a:lstStyle/>
+          <a:p>
+            <a:pPr algn="r">
+              <a:lnSpc>
+                <a:spcPts val="2200"/>
+              </a:lnSpc>
+              <a:defRPr sz="1000" b="0">
+                <a:solidFill>
+                  <a:srgbClr val="666666"/>
+                </a:solidFill>
+                <a:latin typeface="Calibri"/>
+              </a:defRPr>
+            </a:pPr>
+            <a:r>
+              <a:t>learn_verilog_systemverilog / Module 1</a:t>
+            </a:r>
+          </a:p>
+        </p:txBody>
+      </p:sp>
+    </p:spTree>
+  </p:cSld>
+  <p:clrMapOvr>
+    <a:masterClrMapping/>
+  </p:clrMapOvr>
+</p:sld>
+</file>
+
+<file path=ppt/slides/slide44.xml><?xml version="1.0" encoding="utf-8"?>
+<p:sld xmlns:a="http://schemas.openxmlformats.org/drawingml/2006/main" xmlns:p="http://schemas.openxmlformats.org/presentationml/2006/main" xmlns:r="http://schemas.openxmlformats.org/officeDocument/2006/relationships">
+  <p:cSld>
+    <p:spTree>
+      <p:nvGrpSpPr>
+        <p:cNvPr id="1" name=""/>
+        <p:cNvGrpSpPr/>
+        <p:nvPr/>
+      </p:nvGrpSpPr>
+      <p:grpSpPr/>
+      <p:sp>
+        <p:nvSpPr>
+          <p:cNvPr id="2" name="TextBox 1"/>
+          <p:cNvSpPr txBox="1"/>
+          <p:nvPr/>
+        </p:nvSpPr>
+        <p:spPr>
+          <a:xfrm>
+            <a:off x="548640" y="411480"/>
+            <a:ext cx="11064240" cy="777240"/>
+          </a:xfrm>
+          <a:prstGeom prst="rect">
+            <a:avLst/>
+          </a:prstGeom>
+          <a:noFill/>
+        </p:spPr>
+        <p:txBody>
+          <a:bodyPr wrap="square">
+            <a:noAutofit/>
+          </a:bodyPr>
+          <a:lstStyle/>
+          <a:p>
+            <a:pPr>
+              <a:lnSpc>
+                <a:spcPts val="2200"/>
+              </a:lnSpc>
+              <a:defRPr sz="2800" b="1">
+                <a:solidFill>
+                  <a:srgbClr val="1A1A2E"/>
+                </a:solidFill>
+                <a:latin typeface="Calibri"/>
+              </a:defRPr>
+            </a:pPr>
+            <a:r>
+              <a:t>Simulation Never Ends</a:t>
+            </a:r>
+          </a:p>
+        </p:txBody>
+      </p:sp>
+      <p:sp>
+        <p:nvSpPr>
+          <p:cNvPr id="3" name="TextBox 2"/>
+          <p:cNvSpPr txBox="1"/>
+          <p:nvPr/>
+        </p:nvSpPr>
+        <p:spPr>
+          <a:xfrm>
+            <a:off x="548640" y="1234440"/>
+            <a:ext cx="11064240" cy="4937760"/>
+          </a:xfrm>
+          <a:prstGeom prst="rect">
+            <a:avLst/>
+          </a:prstGeom>
+          <a:noFill/>
+        </p:spPr>
+        <p:txBody>
+          <a:bodyPr wrap="square">
+            <a:noAutofit/>
+          </a:bodyPr>
+          <a:lstStyle/>
+          <a:p>
+            <a:pPr>
+              <a:lnSpc>
+                <a:spcPts val="2200"/>
+              </a:lnSpc>
+              <a:spcAft>
+                <a:spcPts val="1000"/>
+              </a:spcAft>
+              <a:defRPr sz="2000" b="0">
+                <a:solidFill>
+                  <a:srgbClr val="333333"/>
+                </a:solidFill>
+                <a:latin typeface="Calibri"/>
+              </a:defRPr>
+            </a:pPr>
+            <a:r>
+              <a:t>• Mistake: Testbench without `$finish`</a:t>
+            </a:r>
+          </a:p>
+          <a:p>
+            <a:pPr>
+              <a:lnSpc>
+                <a:spcPts val="2200"/>
+              </a:lnSpc>
+              <a:spcAft>
+                <a:spcPts val="1000"/>
+              </a:spcAft>
+              <a:defRPr sz="2000" b="0">
+                <a:solidFill>
+                  <a:srgbClr val="333333"/>
+                </a:solidFill>
+                <a:latin typeface="Calibri"/>
+              </a:defRPr>
+            </a:pPr>
+            <a:r>
+              <a:t>• Correct: Always call `$finish` after stimulus (e.g.</a:t>
+            </a:r>
+          </a:p>
+          <a:p>
+            <a:pPr>
+              <a:lnSpc>
+                <a:spcPts val="2200"/>
+              </a:lnSpc>
+              <a:spcAft>
+                <a:spcPts val="1000"/>
+              </a:spcAft>
+              <a:defRPr sz="2000" b="0">
+                <a:solidFill>
+                  <a:srgbClr val="333333"/>
+                </a:solidFill>
+                <a:latin typeface="Calibri"/>
+              </a:defRPr>
+            </a:pPr>
+            <a:r>
+              <a:t>      `#1000; $finish;`)</a:t>
+            </a:r>
+          </a:p>
+          <a:p>
+            <a:pPr>
+              <a:lnSpc>
+                <a:spcPts val="2200"/>
+              </a:lnSpc>
+              <a:spcAft>
+                <a:spcPts val="1000"/>
+              </a:spcAft>
+              <a:defRPr sz="2000" b="0">
+                <a:solidFill>
+                  <a:srgbClr val="333333"/>
+                </a:solidFill>
+                <a:latin typeface="Calibri"/>
+              </a:defRPr>
+            </a:pPr>
+            <a:r>
+              <a:t>• Why: Simulator runs until explicit termination or</a:t>
+            </a:r>
+          </a:p>
+          <a:p>
+            <a:pPr>
+              <a:lnSpc>
+                <a:spcPts val="2200"/>
+              </a:lnSpc>
+              <a:spcAft>
+                <a:spcPts val="1000"/>
+              </a:spcAft>
+              <a:defRPr sz="2000" b="0">
+                <a:solidFill>
+                  <a:srgbClr val="333333"/>
+                </a:solidFill>
+                <a:latin typeface="Calibri"/>
+              </a:defRPr>
+            </a:pPr>
+            <a:r>
+              <a:t>      limit</a:t>
+            </a:r>
+          </a:p>
+        </p:txBody>
+      </p:sp>
+      <p:sp>
+        <p:nvSpPr>
+          <p:cNvPr id="4" name="TextBox 3"/>
+          <p:cNvSpPr txBox="1"/>
+          <p:nvPr/>
+        </p:nvSpPr>
+        <p:spPr>
+          <a:xfrm>
+            <a:off x="548640" y="6355080"/>
+            <a:ext cx="11064240" cy="320040"/>
+          </a:xfrm>
+          <a:prstGeom prst="rect">
+            <a:avLst/>
+          </a:prstGeom>
+          <a:noFill/>
+        </p:spPr>
+        <p:txBody>
+          <a:bodyPr wrap="square">
+            <a:noAutofit/>
+          </a:bodyPr>
+          <a:lstStyle/>
+          <a:p>
+            <a:pPr algn="r">
+              <a:lnSpc>
+                <a:spcPts val="2200"/>
+              </a:lnSpc>
+              <a:defRPr sz="1000" b="0">
+                <a:solidFill>
+                  <a:srgbClr val="666666"/>
+                </a:solidFill>
+                <a:latin typeface="Calibri"/>
+              </a:defRPr>
+            </a:pPr>
+            <a:r>
+              <a:t>learn_verilog_systemverilog / Module 1</a:t>
+            </a:r>
+          </a:p>
+        </p:txBody>
+      </p:sp>
+    </p:spTree>
+  </p:cSld>
+  <p:clrMapOvr>
+    <a:masterClrMapping/>
+  </p:clrMapOvr>
+</p:sld>
+</file>
+
+<file path=ppt/slides/slide45.xml><?xml version="1.0" encoding="utf-8"?>
+<p:sld xmlns:a="http://schemas.openxmlformats.org/drawingml/2006/main" xmlns:p="http://schemas.openxmlformats.org/presentationml/2006/main" xmlns:r="http://schemas.openxmlformats.org/officeDocument/2006/relationships">
+  <p:cSld>
+    <p:spTree>
+      <p:nvGrpSpPr>
+        <p:cNvPr id="1" name=""/>
+        <p:cNvGrpSpPr/>
+        <p:nvPr/>
+      </p:nvGrpSpPr>
+      <p:grpSpPr/>
+      <p:sp>
+        <p:nvSpPr>
+          <p:cNvPr id="2" name="TextBox 1"/>
+          <p:cNvSpPr txBox="1"/>
+          <p:nvPr/>
+        </p:nvSpPr>
+        <p:spPr>
+          <a:xfrm>
+            <a:off x="548640" y="411480"/>
+            <a:ext cx="11064240" cy="777240"/>
+          </a:xfrm>
+          <a:prstGeom prst="rect">
+            <a:avLst/>
+          </a:prstGeom>
+          <a:noFill/>
+        </p:spPr>
+        <p:txBody>
+          <a:bodyPr wrap="square">
+            <a:noAutofit/>
+          </a:bodyPr>
+          <a:lstStyle/>
+          <a:p>
+            <a:pPr>
+              <a:lnSpc>
+                <a:spcPts val="2200"/>
+              </a:lnSpc>
+              <a:defRPr sz="2800" b="1">
+                <a:solidFill>
+                  <a:srgbClr val="1A1A2E"/>
+                </a:solidFill>
+                <a:latin typeface="Calibri"/>
+              </a:defRPr>
+            </a:pPr>
+            <a:r>
+              <a:t>Using 2001/SystemVerilog Constructs in 1995</a:t>
+            </a:r>
+          </a:p>
+        </p:txBody>
+      </p:sp>
+      <p:sp>
+        <p:nvSpPr>
+          <p:cNvPr id="3" name="TextBox 2"/>
+          <p:cNvSpPr txBox="1"/>
+          <p:nvPr/>
+        </p:nvSpPr>
+        <p:spPr>
+          <a:xfrm>
+            <a:off x="548640" y="1234440"/>
+            <a:ext cx="11064240" cy="4937760"/>
+          </a:xfrm>
+          <a:prstGeom prst="rect">
+            <a:avLst/>
+          </a:prstGeom>
+          <a:noFill/>
+        </p:spPr>
+        <p:txBody>
+          <a:bodyPr wrap="square">
+            <a:noAutofit/>
+          </a:bodyPr>
+          <a:lstStyle/>
+          <a:p>
+            <a:pPr>
+              <a:lnSpc>
+                <a:spcPts val="2200"/>
+              </a:lnSpc>
+              <a:spcAft>
+                <a:spcPts val="1000"/>
+              </a:spcAft>
+              <a:defRPr sz="2000" b="0">
+                <a:solidFill>
+                  <a:srgbClr val="333333"/>
+                </a:solidFill>
+                <a:latin typeface="Calibri"/>
+              </a:defRPr>
+            </a:pPr>
+            <a:r>
+              <a:t>• Mistake: Writing `always @*` or ANSI ports and</a:t>
+            </a:r>
+          </a:p>
+          <a:p>
+            <a:pPr>
+              <a:lnSpc>
+                <a:spcPts val="2200"/>
+              </a:lnSpc>
+              <a:spcAft>
+                <a:spcPts val="1000"/>
+              </a:spcAft>
+              <a:defRPr sz="2000" b="0">
+                <a:solidFill>
+                  <a:srgbClr val="333333"/>
+                </a:solidFill>
+                <a:latin typeface="Calibri"/>
+              </a:defRPr>
+            </a:pPr>
+            <a:r>
+              <a:t>      assuming 1995</a:t>
+            </a:r>
+          </a:p>
+          <a:p>
+            <a:pPr>
+              <a:lnSpc>
+                <a:spcPts val="2200"/>
+              </a:lnSpc>
+              <a:spcAft>
+                <a:spcPts val="1000"/>
+              </a:spcAft>
+              <a:defRPr sz="2000" b="0">
+                <a:solidFill>
+                  <a:srgbClr val="333333"/>
+                </a:solidFill>
+                <a:latin typeface="Calibri"/>
+              </a:defRPr>
+            </a:pPr>
+            <a:r>
+              <a:t>• Reality: `always @*` and ANSI ports are 1364-2001;</a:t>
+            </a:r>
+          </a:p>
+          <a:p>
+            <a:pPr>
+              <a:lnSpc>
+                <a:spcPts val="2200"/>
+              </a:lnSpc>
+              <a:spcAft>
+                <a:spcPts val="1000"/>
+              </a:spcAft>
+              <a:defRPr sz="2000" b="0">
+                <a:solidFill>
+                  <a:srgbClr val="333333"/>
+                </a:solidFill>
+                <a:latin typeface="Calibri"/>
+              </a:defRPr>
+            </a:pPr>
+            <a:r>
+              <a:t>      `logic`/`always_comb` are SystemVerilog</a:t>
+            </a:r>
+          </a:p>
+          <a:p>
+            <a:pPr>
+              <a:lnSpc>
+                <a:spcPts val="2200"/>
+              </a:lnSpc>
+              <a:spcAft>
+                <a:spcPts val="1000"/>
+              </a:spcAft>
+              <a:defRPr sz="2000" b="0">
+                <a:solidFill>
+                  <a:srgbClr val="333333"/>
+                </a:solidFill>
+                <a:latin typeface="Calibri"/>
+              </a:defRPr>
+            </a:pPr>
+            <a:r>
+              <a:t>• Correct: For strict 1995, use explicit sensitivity</a:t>
+            </a:r>
+          </a:p>
+          <a:p>
+            <a:pPr>
+              <a:lnSpc>
+                <a:spcPts val="2200"/>
+              </a:lnSpc>
+              <a:spcAft>
+                <a:spcPts val="1000"/>
+              </a:spcAft>
+              <a:defRPr sz="2000" b="0">
+                <a:solidFill>
+                  <a:srgbClr val="333333"/>
+                </a:solidFill>
+                <a:latin typeface="Calibri"/>
+              </a:defRPr>
+            </a:pPr>
+            <a:r>
+              <a:t>      and non-ANSI ports</a:t>
+            </a:r>
+          </a:p>
+          <a:p>
+            <a:pPr>
+              <a:lnSpc>
+                <a:spcPts val="2200"/>
+              </a:lnSpc>
+              <a:spcAft>
+                <a:spcPts val="1000"/>
+              </a:spcAft>
+              <a:defRPr sz="2000" b="0">
+                <a:solidFill>
+                  <a:srgbClr val="333333"/>
+                </a:solidFill>
+                <a:latin typeface="Calibri"/>
+              </a:defRPr>
+            </a:pPr>
+            <a:r>
+              <a:t>• Why: Keeps code portable to 1995-only tools and</a:t>
+            </a:r>
+          </a:p>
+          <a:p>
+            <a:pPr>
+              <a:lnSpc>
+                <a:spcPts val="2200"/>
+              </a:lnSpc>
+              <a:spcAft>
+                <a:spcPts val="1000"/>
+              </a:spcAft>
+              <a:defRPr sz="2000" b="0">
+                <a:solidFill>
+                  <a:srgbClr val="333333"/>
+                </a:solidFill>
+                <a:latin typeface="Calibri"/>
+              </a:defRPr>
+            </a:pPr>
+            <a:r>
+              <a:t>      clarifies version scope</a:t>
+            </a:r>
+          </a:p>
+        </p:txBody>
+      </p:sp>
+      <p:sp>
+        <p:nvSpPr>
+          <p:cNvPr id="4" name="TextBox 3"/>
+          <p:cNvSpPr txBox="1"/>
+          <p:nvPr/>
+        </p:nvSpPr>
+        <p:spPr>
+          <a:xfrm>
+            <a:off x="548640" y="6355080"/>
+            <a:ext cx="11064240" cy="320040"/>
+          </a:xfrm>
+          <a:prstGeom prst="rect">
+            <a:avLst/>
+          </a:prstGeom>
+          <a:noFill/>
+        </p:spPr>
+        <p:txBody>
+          <a:bodyPr wrap="square">
+            <a:noAutofit/>
+          </a:bodyPr>
+          <a:lstStyle/>
+          <a:p>
+            <a:pPr algn="r">
+              <a:lnSpc>
+                <a:spcPts val="2200"/>
+              </a:lnSpc>
+              <a:defRPr sz="1000" b="0">
+                <a:solidFill>
+                  <a:srgbClr val="666666"/>
+                </a:solidFill>
+                <a:latin typeface="Calibri"/>
+              </a:defRPr>
+            </a:pPr>
+            <a:r>
+              <a:t>learn_verilog_systemverilog / Module 1</a:t>
+            </a:r>
+          </a:p>
+        </p:txBody>
+      </p:sp>
+    </p:spTree>
+  </p:cSld>
+  <p:clrMapOvr>
+    <a:masterClrMapping/>
+  </p:clrMapOvr>
+</p:sld>
+</file>
+
+<file path=ppt/slides/slide46.xml><?xml version="1.0" encoding="utf-8"?>
+<p:sld xmlns:a="http://schemas.openxmlformats.org/drawingml/2006/main" xmlns:p="http://schemas.openxmlformats.org/presentationml/2006/main" xmlns:r="http://schemas.openxmlformats.org/officeDocument/2006/relationships">
+  <p:cSld>
+    <p:spTree>
+      <p:nvGrpSpPr>
+        <p:cNvPr id="1" name=""/>
+        <p:cNvGrpSpPr/>
+        <p:nvPr/>
+      </p:nvGrpSpPr>
+      <p:grpSpPr/>
+      <p:sp>
+        <p:nvSpPr>
+          <p:cNvPr id="2" name="TextBox 1"/>
+          <p:cNvSpPr txBox="1"/>
+          <p:nvPr/>
+        </p:nvSpPr>
+        <p:spPr>
+          <a:xfrm>
+            <a:off x="548640" y="411480"/>
+            <a:ext cx="11064240" cy="777240"/>
+          </a:xfrm>
+          <a:prstGeom prst="rect">
+            <a:avLst/>
+          </a:prstGeom>
+          <a:noFill/>
+        </p:spPr>
+        <p:txBody>
+          <a:bodyPr wrap="square">
+            <a:noAutofit/>
+          </a:bodyPr>
+          <a:lstStyle/>
+          <a:p>
+            <a:pPr>
+              <a:lnSpc>
+                <a:spcPts val="2200"/>
+              </a:lnSpc>
+              <a:defRPr sz="2800" b="1">
+                <a:solidFill>
+                  <a:srgbClr val="1A1A2E"/>
+                </a:solidFill>
+                <a:latin typeface="Calibri"/>
+              </a:defRPr>
+            </a:pPr>
+            <a:r>
+              <a:t>Confusing reg with Registers</a:t>
+            </a:r>
+          </a:p>
+        </p:txBody>
+      </p:sp>
+      <p:sp>
+        <p:nvSpPr>
+          <p:cNvPr id="3" name="TextBox 2"/>
+          <p:cNvSpPr txBox="1"/>
+          <p:nvPr/>
+        </p:nvSpPr>
+        <p:spPr>
+          <a:xfrm>
+            <a:off x="548640" y="1234440"/>
+            <a:ext cx="11064240" cy="4937760"/>
+          </a:xfrm>
+          <a:prstGeom prst="rect">
+            <a:avLst/>
+          </a:prstGeom>
+          <a:noFill/>
+        </p:spPr>
+        <p:txBody>
+          <a:bodyPr wrap="square">
+            <a:noAutofit/>
+          </a:bodyPr>
+          <a:lstStyle/>
+          <a:p>
+            <a:pPr>
+              <a:lnSpc>
+                <a:spcPts val="2200"/>
+              </a:lnSpc>
+              <a:spcAft>
+                <a:spcPts val="1000"/>
+              </a:spcAft>
+              <a:defRPr sz="2000" b="0">
+                <a:solidFill>
+                  <a:srgbClr val="333333"/>
+                </a:solidFill>
+                <a:latin typeface="Calibri"/>
+              </a:defRPr>
+            </a:pPr>
+            <a:r>
+              <a:t>• Mistake: Thinking `reg` creates a flip-flop</a:t>
+            </a:r>
+          </a:p>
+          <a:p>
+            <a:pPr>
+              <a:lnSpc>
+                <a:spcPts val="2200"/>
+              </a:lnSpc>
+              <a:spcAft>
+                <a:spcPts val="1000"/>
+              </a:spcAft>
+              <a:defRPr sz="2000" b="0">
+                <a:solidFill>
+                  <a:srgbClr val="333333"/>
+                </a:solidFill>
+                <a:latin typeface="Calibri"/>
+              </a:defRPr>
+            </a:pPr>
+            <a:r>
+              <a:t>• Reality: `reg` is a variable type; flip-flops come</a:t>
+            </a:r>
+          </a:p>
+          <a:p>
+            <a:pPr>
+              <a:lnSpc>
+                <a:spcPts val="2200"/>
+              </a:lnSpc>
+              <a:spcAft>
+                <a:spcPts val="1000"/>
+              </a:spcAft>
+              <a:defRPr sz="2000" b="0">
+                <a:solidFill>
+                  <a:srgbClr val="333333"/>
+                </a:solidFill>
+                <a:latin typeface="Calibri"/>
+              </a:defRPr>
+            </a:pPr>
+            <a:r>
+              <a:t>      from `always @(posedge clk)` with `&lt;=`</a:t>
+            </a:r>
+          </a:p>
+          <a:p>
+            <a:pPr>
+              <a:lnSpc>
+                <a:spcPts val="2200"/>
+              </a:lnSpc>
+              <a:spcAft>
+                <a:spcPts val="1000"/>
+              </a:spcAft>
+              <a:defRPr sz="2000" b="0">
+                <a:solidFill>
+                  <a:srgbClr val="333333"/>
+                </a:solidFill>
+                <a:latin typeface="Calibri"/>
+              </a:defRPr>
+            </a:pPr>
+            <a:r>
+              <a:t>• Correct: Use `reg` for any procedural output; use</a:t>
+            </a:r>
+          </a:p>
+          <a:p>
+            <a:pPr>
+              <a:lnSpc>
+                <a:spcPts val="2200"/>
+              </a:lnSpc>
+              <a:spcAft>
+                <a:spcPts val="1000"/>
+              </a:spcAft>
+              <a:defRPr sz="2000" b="0">
+                <a:solidFill>
+                  <a:srgbClr val="333333"/>
+                </a:solidFill>
+                <a:latin typeface="Calibri"/>
+              </a:defRPr>
+            </a:pPr>
+            <a:r>
+              <a:t>      clocked `always` for sequential logic</a:t>
+            </a:r>
+          </a:p>
+          <a:p>
+            <a:pPr>
+              <a:lnSpc>
+                <a:spcPts val="2200"/>
+              </a:lnSpc>
+              <a:spcAft>
+                <a:spcPts val="1000"/>
+              </a:spcAft>
+              <a:defRPr sz="2000" b="0">
+                <a:solidFill>
+                  <a:srgbClr val="333333"/>
+                </a:solidFill>
+                <a:latin typeface="Calibri"/>
+              </a:defRPr>
+            </a:pPr>
+            <a:r>
+              <a:t>• Why: Clarifies design intent and avoids synthesis</a:t>
+            </a:r>
+          </a:p>
+          <a:p>
+            <a:pPr>
+              <a:lnSpc>
+                <a:spcPts val="2200"/>
+              </a:lnSpc>
+              <a:spcAft>
+                <a:spcPts val="1000"/>
+              </a:spcAft>
+              <a:defRPr sz="2000" b="0">
+                <a:solidFill>
+                  <a:srgbClr val="333333"/>
+                </a:solidFill>
+                <a:latin typeface="Calibri"/>
+              </a:defRPr>
+            </a:pPr>
+            <a:r>
+              <a:t>      surprises</a:t>
+            </a:r>
+          </a:p>
+        </p:txBody>
+      </p:sp>
+      <p:sp>
+        <p:nvSpPr>
+          <p:cNvPr id="4" name="TextBox 3"/>
+          <p:cNvSpPr txBox="1"/>
+          <p:nvPr/>
+        </p:nvSpPr>
+        <p:spPr>
+          <a:xfrm>
+            <a:off x="548640" y="6355080"/>
+            <a:ext cx="11064240" cy="320040"/>
+          </a:xfrm>
+          <a:prstGeom prst="rect">
+            <a:avLst/>
+          </a:prstGeom>
+          <a:noFill/>
+        </p:spPr>
+        <p:txBody>
+          <a:bodyPr wrap="square">
+            <a:noAutofit/>
+          </a:bodyPr>
+          <a:lstStyle/>
+          <a:p>
+            <a:pPr algn="r">
+              <a:lnSpc>
+                <a:spcPts val="2200"/>
+              </a:lnSpc>
+              <a:defRPr sz="1000" b="0">
+                <a:solidFill>
+                  <a:srgbClr val="666666"/>
+                </a:solidFill>
+                <a:latin typeface="Calibri"/>
+              </a:defRPr>
+            </a:pPr>
+            <a:r>
+              <a:t>learn_verilog_systemverilog / Module 1</a:t>
+            </a:r>
+          </a:p>
+        </p:txBody>
+      </p:sp>
+    </p:spTree>
+  </p:cSld>
+  <p:clrMapOvr>
+    <a:masterClrMapping/>
+  </p:clrMapOvr>
+</p:sld>
+</file>
+
+<file path=ppt/slides/slide47.xml><?xml version="1.0" encoding="utf-8"?>
+<p:sld xmlns:a="http://schemas.openxmlformats.org/drawingml/2006/main" xmlns:p="http://schemas.openxmlformats.org/presentationml/2006/main" xmlns:r="http://schemas.openxmlformats.org/officeDocument/2006/relationships">
+  <p:cSld>
+    <p:spTree>
+      <p:nvGrpSpPr>
+        <p:cNvPr id="1" name=""/>
+        <p:cNvGrpSpPr/>
+        <p:nvPr/>
+      </p:nvGrpSpPr>
+      <p:grpSpPr/>
+      <p:sp>
+        <p:nvSpPr>
+          <p:cNvPr id="2" name="TextBox 1"/>
+          <p:cNvSpPr txBox="1"/>
+          <p:nvPr/>
+        </p:nvSpPr>
+        <p:spPr>
+          <a:xfrm>
+            <a:off x="548640" y="2743200"/>
+            <a:ext cx="11064240" cy="1371600"/>
+          </a:xfrm>
+          <a:prstGeom prst="rect">
+            <a:avLst/>
+          </a:prstGeom>
+          <a:noFill/>
+        </p:spPr>
+        <p:txBody>
+          <a:bodyPr wrap="square">
+            <a:noAutofit/>
+          </a:bodyPr>
+          <a:lstStyle/>
+          <a:p>
+            <a:pPr algn="ctr">
+              <a:lnSpc>
+                <a:spcPts val="2200"/>
+              </a:lnSpc>
+              <a:defRPr sz="3600" b="1">
+                <a:solidFill>
+                  <a:srgbClr val="1A1A2E"/>
+                </a:solidFill>
+                <a:latin typeface="Calibri"/>
+              </a:defRPr>
+            </a:pPr>
+            <a:r>
+              <a:t>Practice &amp; assessment</a:t>
+            </a:r>
+          </a:p>
+        </p:txBody>
+      </p:sp>
+      <p:sp>
+        <p:nvSpPr>
+          <p:cNvPr id="3" name="TextBox 2"/>
+          <p:cNvSpPr txBox="1"/>
+          <p:nvPr/>
+        </p:nvSpPr>
+        <p:spPr>
+          <a:xfrm>
+            <a:off x="548640" y="6355080"/>
+            <a:ext cx="11064240" cy="320040"/>
+          </a:xfrm>
+          <a:prstGeom prst="rect">
+            <a:avLst/>
+          </a:prstGeom>
+          <a:noFill/>
+        </p:spPr>
+        <p:txBody>
+          <a:bodyPr wrap="square">
+            <a:noAutofit/>
+          </a:bodyPr>
+          <a:lstStyle/>
+          <a:p>
+            <a:pPr algn="r">
+              <a:lnSpc>
+                <a:spcPts val="2200"/>
+              </a:lnSpc>
+              <a:defRPr sz="1000" b="0">
+                <a:solidFill>
+                  <a:srgbClr val="666666"/>
+                </a:solidFill>
+                <a:latin typeface="Calibri"/>
+              </a:defRPr>
+            </a:pPr>
+            <a:r>
+              <a:t>learn_verilog_systemverilog / Module 1</a:t>
+            </a:r>
+          </a:p>
+        </p:txBody>
+      </p:sp>
+    </p:spTree>
+  </p:cSld>
+  <p:clrMapOvr>
+    <a:masterClrMapping/>
+  </p:clrMapOvr>
+</p:sld>
+</file>
+
+<file path=ppt/slides/slide48.xml><?xml version="1.0" encoding="utf-8"?>
+<p:sld xmlns:a="http://schemas.openxmlformats.org/drawingml/2006/main" xmlns:p="http://schemas.openxmlformats.org/presentationml/2006/main" xmlns:r="http://schemas.openxmlformats.org/officeDocument/2006/relationships">
+  <p:cSld>
+    <p:spTree>
+      <p:nvGrpSpPr>
+        <p:cNvPr id="1" name=""/>
+        <p:cNvGrpSpPr/>
+        <p:nvPr/>
+      </p:nvGrpSpPr>
+      <p:grpSpPr/>
+      <p:sp>
+        <p:nvSpPr>
+          <p:cNvPr id="2" name="TextBox 1"/>
+          <p:cNvSpPr txBox="1"/>
+          <p:nvPr/>
+        </p:nvSpPr>
+        <p:spPr>
+          <a:xfrm>
+            <a:off x="548640" y="411480"/>
+            <a:ext cx="11064240" cy="777240"/>
+          </a:xfrm>
+          <a:prstGeom prst="rect">
+            <a:avLst/>
+          </a:prstGeom>
+          <a:noFill/>
+        </p:spPr>
+        <p:txBody>
+          <a:bodyPr wrap="square">
+            <a:noAutofit/>
+          </a:bodyPr>
+          <a:lstStyle/>
+          <a:p>
+            <a:pPr>
+              <a:lnSpc>
+                <a:spcPts val="2200"/>
+              </a:lnSpc>
+              <a:defRPr sz="2800" b="1">
+                <a:solidFill>
+                  <a:srgbClr val="1A1A2E"/>
+                </a:solidFill>
+                <a:latin typeface="Calibri"/>
+              </a:defRPr>
+            </a:pPr>
+            <a:r>
+              <a:t>What you should know (1/2)</a:t>
+            </a:r>
+          </a:p>
+        </p:txBody>
+      </p:sp>
+      <p:sp>
+        <p:nvSpPr>
+          <p:cNvPr id="3" name="TextBox 2"/>
+          <p:cNvSpPr txBox="1"/>
+          <p:nvPr/>
+        </p:nvSpPr>
+        <p:spPr>
+          <a:xfrm>
+            <a:off x="548640" y="1234440"/>
+            <a:ext cx="11064240" cy="4937760"/>
+          </a:xfrm>
+          <a:prstGeom prst="rect">
+            <a:avLst/>
+          </a:prstGeom>
+          <a:noFill/>
+        </p:spPr>
+        <p:txBody>
+          <a:bodyPr wrap="square">
+            <a:noAutofit/>
+          </a:bodyPr>
+          <a:lstStyle/>
+          <a:p>
+            <a:pPr>
+              <a:lnSpc>
+                <a:spcPts val="2200"/>
+              </a:lnSpc>
+              <a:spcAft>
+                <a:spcPts val="1000"/>
+              </a:spcAft>
+              <a:defRPr sz="2000" b="0">
+                <a:solidFill>
+                  <a:srgbClr val="333333"/>
+                </a:solidFill>
+                <a:latin typeface="Calibri"/>
+              </a:defRPr>
+            </a:pPr>
+            <a:r>
+              <a:t>• ✓ Write modules in IEEE 1364-1995 style (non-ANSI</a:t>
+            </a:r>
+          </a:p>
+          <a:p>
+            <a:pPr>
+              <a:lnSpc>
+                <a:spcPts val="2200"/>
+              </a:lnSpc>
+              <a:spcAft>
+                <a:spcPts val="1000"/>
+              </a:spcAft>
+              <a:defRPr sz="2000" b="0">
+                <a:solidFill>
+                  <a:srgbClr val="333333"/>
+                </a:solidFill>
+                <a:latin typeface="Calibri"/>
+              </a:defRPr>
+            </a:pPr>
+            <a:r>
+              <a:t>      ports, explicit sensitivity)</a:t>
+            </a:r>
+          </a:p>
+          <a:p>
+            <a:pPr>
+              <a:lnSpc>
+                <a:spcPts val="2200"/>
+              </a:lnSpc>
+              <a:spcAft>
+                <a:spcPts val="1000"/>
+              </a:spcAft>
+              <a:defRPr sz="2000" b="0">
+                <a:solidFill>
+                  <a:srgbClr val="333333"/>
+                </a:solidFill>
+                <a:latin typeface="Calibri"/>
+              </a:defRPr>
+            </a:pPr>
+            <a:r>
+              <a:t>• ✓ Use `wire` and `reg` correctly for nets and</a:t>
+            </a:r>
+          </a:p>
+          <a:p>
+            <a:pPr>
+              <a:lnSpc>
+                <a:spcPts val="2200"/>
+              </a:lnSpc>
+              <a:spcAft>
+                <a:spcPts val="1000"/>
+              </a:spcAft>
+              <a:defRPr sz="2000" b="0">
+                <a:solidFill>
+                  <a:srgbClr val="333333"/>
+                </a:solidFill>
+                <a:latin typeface="Calibri"/>
+              </a:defRPr>
+            </a:pPr>
+            <a:r>
+              <a:t>      procedural outputs</a:t>
+            </a:r>
+          </a:p>
+          <a:p>
+            <a:pPr>
+              <a:lnSpc>
+                <a:spcPts val="2200"/>
+              </a:lnSpc>
+              <a:spcAft>
+                <a:spcPts val="1000"/>
+              </a:spcAft>
+              <a:defRPr sz="2000" b="0">
+                <a:solidFill>
+                  <a:srgbClr val="333333"/>
+                </a:solidFill>
+                <a:latin typeface="Calibri"/>
+              </a:defRPr>
+            </a:pPr>
+            <a:r>
+              <a:t>• ✓ Describe combinational logic with `assign` and</a:t>
+            </a:r>
+          </a:p>
+          <a:p>
+            <a:pPr>
+              <a:lnSpc>
+                <a:spcPts val="2200"/>
+              </a:lnSpc>
+              <a:spcAft>
+                <a:spcPts val="1000"/>
+              </a:spcAft>
+              <a:defRPr sz="2000" b="0">
+                <a:solidFill>
+                  <a:srgbClr val="333333"/>
+                </a:solidFill>
+                <a:latin typeface="Calibri"/>
+              </a:defRPr>
+            </a:pPr>
+            <a:r>
+              <a:t>      `always @(inputs)`</a:t>
+            </a:r>
+          </a:p>
+          <a:p>
+            <a:pPr>
+              <a:lnSpc>
+                <a:spcPts val="2200"/>
+              </a:lnSpc>
+              <a:spcAft>
+                <a:spcPts val="1000"/>
+              </a:spcAft>
+              <a:defRPr sz="2000" b="0">
+                <a:solidFill>
+                  <a:srgbClr val="333333"/>
+                </a:solidFill>
+                <a:latin typeface="Calibri"/>
+              </a:defRPr>
+            </a:pPr>
+            <a:r>
+              <a:t>• ✓ Describe sequential logic with `always @(posedge</a:t>
+            </a:r>
+          </a:p>
+          <a:p>
+            <a:pPr>
+              <a:lnSpc>
+                <a:spcPts val="2200"/>
+              </a:lnSpc>
+              <a:spcAft>
+                <a:spcPts val="1000"/>
+              </a:spcAft>
+              <a:defRPr sz="2000" b="0">
+                <a:solidFill>
+                  <a:srgbClr val="333333"/>
+                </a:solidFill>
+                <a:latin typeface="Calibri"/>
+              </a:defRPr>
+            </a:pPr>
+            <a:r>
+              <a:t>      clk)` and nonblocking assignment</a:t>
+            </a:r>
+          </a:p>
+          <a:p>
+            <a:pPr>
+              <a:lnSpc>
+                <a:spcPts val="2200"/>
+              </a:lnSpc>
+              <a:spcAft>
+                <a:spcPts val="1000"/>
+              </a:spcAft>
+              <a:defRPr sz="2000" b="0">
+                <a:solidFill>
+                  <a:srgbClr val="333333"/>
+                </a:solidFill>
+                <a:latin typeface="Calibri"/>
+              </a:defRPr>
+            </a:pPr>
+            <a:r>
+              <a:t>• ✓ Use `initial`, `#`, `@`, and `wait` for</a:t>
+            </a:r>
+          </a:p>
+          <a:p>
+            <a:pPr>
+              <a:lnSpc>
+                <a:spcPts val="2200"/>
+              </a:lnSpc>
+              <a:spcAft>
+                <a:spcPts val="1000"/>
+              </a:spcAft>
+              <a:defRPr sz="2000" b="0">
+                <a:solidFill>
+                  <a:srgbClr val="333333"/>
+                </a:solidFill>
+                <a:latin typeface="Calibri"/>
+              </a:defRPr>
+            </a:pPr>
+            <a:r>
+              <a:t>      testbenches</a:t>
+            </a:r>
+          </a:p>
+          <a:p>
+            <a:pPr>
+              <a:lnSpc>
+                <a:spcPts val="2200"/>
+              </a:lnSpc>
+              <a:spcAft>
+                <a:spcPts val="1000"/>
+              </a:spcAft>
+              <a:defRPr sz="2000" b="0">
+                <a:solidFill>
+                  <a:srgbClr val="333333"/>
+                </a:solidFill>
+                <a:latin typeface="Calibri"/>
+              </a:defRPr>
+            </a:pPr>
+            <a:r>
+              <a:t>• ✓ Use 1364-1995 tasks and functions (non-ANSI form)</a:t>
+            </a:r>
+          </a:p>
+        </p:txBody>
+      </p:sp>
+      <p:sp>
+        <p:nvSpPr>
+          <p:cNvPr id="4" name="TextBox 3"/>
+          <p:cNvSpPr txBox="1"/>
+          <p:nvPr/>
+        </p:nvSpPr>
+        <p:spPr>
+          <a:xfrm>
+            <a:off x="548640" y="6355080"/>
+            <a:ext cx="11064240" cy="320040"/>
+          </a:xfrm>
+          <a:prstGeom prst="rect">
+            <a:avLst/>
+          </a:prstGeom>
+          <a:noFill/>
+        </p:spPr>
+        <p:txBody>
+          <a:bodyPr wrap="square">
+            <a:noAutofit/>
+          </a:bodyPr>
+          <a:lstStyle/>
+          <a:p>
+            <a:pPr algn="r">
+              <a:lnSpc>
+                <a:spcPts val="2200"/>
+              </a:lnSpc>
+              <a:defRPr sz="1000" b="0">
+                <a:solidFill>
+                  <a:srgbClr val="666666"/>
+                </a:solidFill>
+                <a:latin typeface="Calibri"/>
+              </a:defRPr>
+            </a:pPr>
+            <a:r>
+              <a:t>learn_verilog_systemverilog / Module 1</a:t>
+            </a:r>
+          </a:p>
+        </p:txBody>
+      </p:sp>
+    </p:spTree>
+  </p:cSld>
+  <p:clrMapOvr>
+    <a:masterClrMapping/>
+  </p:clrMapOvr>
+</p:sld>
+</file>
+
+<file path=ppt/slides/slide49.xml><?xml version="1.0" encoding="utf-8"?>
+<p:sld xmlns:a="http://schemas.openxmlformats.org/drawingml/2006/main" xmlns:p="http://schemas.openxmlformats.org/presentationml/2006/main" xmlns:r="http://schemas.openxmlformats.org/officeDocument/2006/relationships">
+  <p:cSld>
+    <p:spTree>
+      <p:nvGrpSpPr>
+        <p:cNvPr id="1" name=""/>
+        <p:cNvGrpSpPr/>
+        <p:nvPr/>
+      </p:nvGrpSpPr>
+      <p:grpSpPr/>
+      <p:sp>
+        <p:nvSpPr>
+          <p:cNvPr id="2" name="TextBox 1"/>
+          <p:cNvSpPr txBox="1"/>
+          <p:nvPr/>
+        </p:nvSpPr>
+        <p:spPr>
+          <a:xfrm>
+            <a:off x="548640" y="411480"/>
+            <a:ext cx="11064240" cy="777240"/>
+          </a:xfrm>
+          <a:prstGeom prst="rect">
+            <a:avLst/>
+          </a:prstGeom>
+          <a:noFill/>
+        </p:spPr>
+        <p:txBody>
+          <a:bodyPr wrap="square">
+            <a:noAutofit/>
+          </a:bodyPr>
+          <a:lstStyle/>
+          <a:p>
+            <a:pPr>
+              <a:lnSpc>
+                <a:spcPts val="2200"/>
+              </a:lnSpc>
+              <a:defRPr sz="2800" b="1">
+                <a:solidFill>
+                  <a:srgbClr val="1A1A2E"/>
+                </a:solidFill>
+                <a:latin typeface="Calibri"/>
+              </a:defRPr>
+            </a:pPr>
+            <a:r>
+              <a:t>What you should know (2/2)</a:t>
+            </a:r>
+          </a:p>
+        </p:txBody>
+      </p:sp>
+      <p:sp>
+        <p:nvSpPr>
+          <p:cNvPr id="3" name="TextBox 2"/>
+          <p:cNvSpPr txBox="1"/>
+          <p:nvPr/>
+        </p:nvSpPr>
+        <p:spPr>
+          <a:xfrm>
+            <a:off x="548640" y="1234440"/>
+            <a:ext cx="11064240" cy="4937760"/>
+          </a:xfrm>
+          <a:prstGeom prst="rect">
+            <a:avLst/>
+          </a:prstGeom>
+          <a:noFill/>
+        </p:spPr>
+        <p:txBody>
+          <a:bodyPr wrap="square">
+            <a:noAutofit/>
+          </a:bodyPr>
+          <a:lstStyle/>
+          <a:p>
+            <a:pPr>
+              <a:lnSpc>
+                <a:spcPts val="2200"/>
+              </a:lnSpc>
+              <a:spcAft>
+                <a:spcPts val="1000"/>
+              </a:spcAft>
+              <a:defRPr sz="2000" b="0">
+                <a:solidFill>
+                  <a:srgbClr val="333333"/>
+                </a:solidFill>
+                <a:latin typeface="Calibri"/>
+              </a:defRPr>
+            </a:pPr>
+            <a:r>
+              <a:t>• ✓ State what 1364-1995 does not include (ANSI, `@*`,</a:t>
+            </a:r>
+          </a:p>
+          <a:p>
+            <a:pPr>
+              <a:lnSpc>
+                <a:spcPts val="2200"/>
+              </a:lnSpc>
+              <a:spcAft>
+                <a:spcPts val="1000"/>
+              </a:spcAft>
+              <a:defRPr sz="2000" b="0">
+                <a:solidFill>
+                  <a:srgbClr val="333333"/>
+                </a:solidFill>
+                <a:latin typeface="Calibri"/>
+              </a:defRPr>
+            </a:pPr>
+            <a:r>
+              <a:t>      generate, SystemVerilog)</a:t>
+            </a:r>
+          </a:p>
+        </p:txBody>
+      </p:sp>
+      <p:sp>
+        <p:nvSpPr>
+          <p:cNvPr id="4" name="TextBox 3"/>
+          <p:cNvSpPr txBox="1"/>
+          <p:nvPr/>
+        </p:nvSpPr>
+        <p:spPr>
+          <a:xfrm>
+            <a:off x="548640" y="6355080"/>
+            <a:ext cx="11064240" cy="320040"/>
+          </a:xfrm>
+          <a:prstGeom prst="rect">
+            <a:avLst/>
+          </a:prstGeom>
+          <a:noFill/>
+        </p:spPr>
+        <p:txBody>
+          <a:bodyPr wrap="square">
+            <a:noAutofit/>
+          </a:bodyPr>
+          <a:lstStyle/>
+          <a:p>
+            <a:pPr algn="r">
+              <a:lnSpc>
+                <a:spcPts val="2200"/>
+              </a:lnSpc>
+              <a:defRPr sz="1000" b="0">
+                <a:solidFill>
+                  <a:srgbClr val="666666"/>
+                </a:solidFill>
+                <a:latin typeface="Calibri"/>
+              </a:defRPr>
+            </a:pPr>
+            <a:r>
+              <a:t>learn_verilog_systemverilog / Module 1</a:t>
+            </a:r>
+          </a:p>
+        </p:txBody>
+      </p:sp>
+    </p:spTree>
+  </p:cSld>
+  <p:clrMapOvr>
+    <a:masterClrMapping/>
+  </p:clrMapOvr>
+</p:sld>
+</file>
+
 <file path=ppt/slides/slide5.xml><?xml version="1.0" encoding="utf-8"?>
 <p:sld xmlns:a="http://schemas.openxmlformats.org/drawingml/2006/main" xmlns:p="http://schemas.openxmlformats.org/presentationml/2006/main" xmlns:r="http://schemas.openxmlformats.org/officeDocument/2006/relationships">
   <p:cSld>
@@ -9907,6 +14726,629 @@
             </a:pPr>
             <a:r>
               <a:t>      You'll…</a:t>
+            </a:r>
+          </a:p>
+        </p:txBody>
+      </p:sp>
+      <p:sp>
+        <p:nvSpPr>
+          <p:cNvPr id="4" name="TextBox 3"/>
+          <p:cNvSpPr txBox="1"/>
+          <p:nvPr/>
+        </p:nvSpPr>
+        <p:spPr>
+          <a:xfrm>
+            <a:off x="548640" y="6355080"/>
+            <a:ext cx="11064240" cy="320040"/>
+          </a:xfrm>
+          <a:prstGeom prst="rect">
+            <a:avLst/>
+          </a:prstGeom>
+          <a:noFill/>
+        </p:spPr>
+        <p:txBody>
+          <a:bodyPr wrap="square">
+            <a:noAutofit/>
+          </a:bodyPr>
+          <a:lstStyle/>
+          <a:p>
+            <a:pPr algn="r">
+              <a:lnSpc>
+                <a:spcPts val="2200"/>
+              </a:lnSpc>
+              <a:defRPr sz="1000" b="0">
+                <a:solidFill>
+                  <a:srgbClr val="666666"/>
+                </a:solidFill>
+                <a:latin typeface="Calibri"/>
+              </a:defRPr>
+            </a:pPr>
+            <a:r>
+              <a:t>learn_verilog_systemverilog / Module 1</a:t>
+            </a:r>
+          </a:p>
+        </p:txBody>
+      </p:sp>
+    </p:spTree>
+  </p:cSld>
+  <p:clrMapOvr>
+    <a:masterClrMapping/>
+  </p:clrMapOvr>
+</p:sld>
+</file>
+
+<file path=ppt/slides/slide50.xml><?xml version="1.0" encoding="utf-8"?>
+<p:sld xmlns:a="http://schemas.openxmlformats.org/drawingml/2006/main" xmlns:p="http://schemas.openxmlformats.org/presentationml/2006/main" xmlns:r="http://schemas.openxmlformats.org/officeDocument/2006/relationships">
+  <p:cSld>
+    <p:spTree>
+      <p:nvGrpSpPr>
+        <p:cNvPr id="1" name=""/>
+        <p:cNvGrpSpPr/>
+        <p:nvPr/>
+      </p:nvGrpSpPr>
+      <p:grpSpPr/>
+      <p:sp>
+        <p:nvSpPr>
+          <p:cNvPr id="2" name="TextBox 1"/>
+          <p:cNvSpPr txBox="1"/>
+          <p:nvPr/>
+        </p:nvSpPr>
+        <p:spPr>
+          <a:xfrm>
+            <a:off x="548640" y="411480"/>
+            <a:ext cx="11064240" cy="777240"/>
+          </a:xfrm>
+          <a:prstGeom prst="rect">
+            <a:avLst/>
+          </a:prstGeom>
+          <a:noFill/>
+        </p:spPr>
+        <p:txBody>
+          <a:bodyPr wrap="square">
+            <a:noAutofit/>
+          </a:bodyPr>
+          <a:lstStyle/>
+          <a:p>
+            <a:pPr>
+              <a:lnSpc>
+                <a:spcPts val="2200"/>
+              </a:lnSpc>
+              <a:defRPr sz="2800" b="1">
+                <a:solidFill>
+                  <a:srgbClr val="1A1A2E"/>
+                </a:solidFill>
+                <a:latin typeface="Calibri"/>
+              </a:defRPr>
+            </a:pPr>
+            <a:r>
+              <a:t>Exercises</a:t>
+            </a:r>
+          </a:p>
+        </p:txBody>
+      </p:sp>
+      <p:sp>
+        <p:nvSpPr>
+          <p:cNvPr id="3" name="TextBox 2"/>
+          <p:cNvSpPr txBox="1"/>
+          <p:nvPr/>
+        </p:nvSpPr>
+        <p:spPr>
+          <a:xfrm>
+            <a:off x="548640" y="1234440"/>
+            <a:ext cx="11064240" cy="4937760"/>
+          </a:xfrm>
+          <a:prstGeom prst="rect">
+            <a:avLst/>
+          </a:prstGeom>
+          <a:noFill/>
+        </p:spPr>
+        <p:txBody>
+          <a:bodyPr wrap="square">
+            <a:noAutofit/>
+          </a:bodyPr>
+          <a:lstStyle/>
+          <a:p>
+            <a:pPr>
+              <a:lnSpc>
+                <a:spcPts val="2200"/>
+              </a:lnSpc>
+              <a:spcAft>
+                <a:spcPts val="1000"/>
+              </a:spcAft>
+              <a:defRPr sz="2000" b="0">
+                <a:solidFill>
+                  <a:srgbClr val="333333"/>
+                </a:solidFill>
+                <a:latin typeface="Calibri"/>
+              </a:defRPr>
+            </a:pPr>
+            <a:r>
+              <a:t>• Module and Ports (1995)</a:t>
+            </a:r>
+          </a:p>
+          <a:p>
+            <a:pPr>
+              <a:lnSpc>
+                <a:spcPts val="2200"/>
+              </a:lnSpc>
+              <a:spcAft>
+                <a:spcPts val="1000"/>
+              </a:spcAft>
+              <a:defRPr sz="2000" b="0">
+                <a:solidFill>
+                  <a:srgbClr val="333333"/>
+                </a:solidFill>
+                <a:latin typeface="Calibri"/>
+              </a:defRPr>
+            </a:pPr>
+            <a:r>
+              <a:t>• wire vs reg</a:t>
+            </a:r>
+          </a:p>
+          <a:p>
+            <a:pPr>
+              <a:lnSpc>
+                <a:spcPts val="2200"/>
+              </a:lnSpc>
+              <a:spcAft>
+                <a:spcPts val="1000"/>
+              </a:spcAft>
+              <a:defRPr sz="2000" b="0">
+                <a:solidFill>
+                  <a:srgbClr val="333333"/>
+                </a:solidFill>
+                <a:latin typeface="Calibri"/>
+              </a:defRPr>
+            </a:pPr>
+            <a:r>
+              <a:t>• Simple Testbench</a:t>
+            </a:r>
+          </a:p>
+          <a:p>
+            <a:pPr>
+              <a:lnSpc>
+                <a:spcPts val="2200"/>
+              </a:lnSpc>
+              <a:spcAft>
+                <a:spcPts val="1000"/>
+              </a:spcAft>
+              <a:defRPr sz="2000" b="0">
+                <a:solidFill>
+                  <a:srgbClr val="333333"/>
+                </a:solidFill>
+                <a:latin typeface="Calibri"/>
+              </a:defRPr>
+            </a:pPr>
+            <a:r>
+              <a:t>• Limitations</a:t>
+            </a:r>
+          </a:p>
+          <a:p>
+            <a:pPr>
+              <a:lnSpc>
+                <a:spcPts val="2200"/>
+              </a:lnSpc>
+              <a:spcAft>
+                <a:spcPts val="1000"/>
+              </a:spcAft>
+              <a:defRPr sz="2000" b="0">
+                <a:solidFill>
+                  <a:srgbClr val="333333"/>
+                </a:solidFill>
+                <a:latin typeface="Calibri"/>
+              </a:defRPr>
+            </a:pPr>
+            <a:r>
+              <a:t>• Incomplete Sensitivity List</a:t>
+            </a:r>
+          </a:p>
+        </p:txBody>
+      </p:sp>
+      <p:sp>
+        <p:nvSpPr>
+          <p:cNvPr id="4" name="TextBox 3"/>
+          <p:cNvSpPr txBox="1"/>
+          <p:nvPr/>
+        </p:nvSpPr>
+        <p:spPr>
+          <a:xfrm>
+            <a:off x="548640" y="6355080"/>
+            <a:ext cx="11064240" cy="320040"/>
+          </a:xfrm>
+          <a:prstGeom prst="rect">
+            <a:avLst/>
+          </a:prstGeom>
+          <a:noFill/>
+        </p:spPr>
+        <p:txBody>
+          <a:bodyPr wrap="square">
+            <a:noAutofit/>
+          </a:bodyPr>
+          <a:lstStyle/>
+          <a:p>
+            <a:pPr algn="r">
+              <a:lnSpc>
+                <a:spcPts val="2200"/>
+              </a:lnSpc>
+              <a:defRPr sz="1000" b="0">
+                <a:solidFill>
+                  <a:srgbClr val="666666"/>
+                </a:solidFill>
+                <a:latin typeface="Calibri"/>
+              </a:defRPr>
+            </a:pPr>
+            <a:r>
+              <a:t>learn_verilog_systemverilog / Module 1</a:t>
+            </a:r>
+          </a:p>
+        </p:txBody>
+      </p:sp>
+    </p:spTree>
+  </p:cSld>
+  <p:clrMapOvr>
+    <a:masterClrMapping/>
+  </p:clrMapOvr>
+</p:sld>
+</file>
+
+<file path=ppt/slides/slide51.xml><?xml version="1.0" encoding="utf-8"?>
+<p:sld xmlns:a="http://schemas.openxmlformats.org/drawingml/2006/main" xmlns:p="http://schemas.openxmlformats.org/presentationml/2006/main" xmlns:r="http://schemas.openxmlformats.org/officeDocument/2006/relationships">
+  <p:cSld>
+    <p:spTree>
+      <p:nvGrpSpPr>
+        <p:cNvPr id="1" name=""/>
+        <p:cNvGrpSpPr/>
+        <p:nvPr/>
+      </p:nvGrpSpPr>
+      <p:grpSpPr/>
+      <p:sp>
+        <p:nvSpPr>
+          <p:cNvPr id="2" name="TextBox 1"/>
+          <p:cNvSpPr txBox="1"/>
+          <p:nvPr/>
+        </p:nvSpPr>
+        <p:spPr>
+          <a:xfrm>
+            <a:off x="548640" y="411480"/>
+            <a:ext cx="11064240" cy="777240"/>
+          </a:xfrm>
+          <a:prstGeom prst="rect">
+            <a:avLst/>
+          </a:prstGeom>
+          <a:noFill/>
+        </p:spPr>
+        <p:txBody>
+          <a:bodyPr wrap="square">
+            <a:noAutofit/>
+          </a:bodyPr>
+          <a:lstStyle/>
+          <a:p>
+            <a:pPr>
+              <a:lnSpc>
+                <a:spcPts val="2200"/>
+              </a:lnSpc>
+              <a:defRPr sz="2800" b="1">
+                <a:solidFill>
+                  <a:srgbClr val="1A1A2E"/>
+                </a:solidFill>
+                <a:latin typeface="Calibri"/>
+              </a:defRPr>
+            </a:pPr>
+            <a:r>
+              <a:t>Exercises</a:t>
+            </a:r>
+          </a:p>
+        </p:txBody>
+      </p:sp>
+      <p:sp>
+        <p:nvSpPr>
+          <p:cNvPr id="3" name="TextBox 2"/>
+          <p:cNvSpPr txBox="1"/>
+          <p:nvPr/>
+        </p:nvSpPr>
+        <p:spPr>
+          <a:xfrm>
+            <a:off x="548640" y="1234440"/>
+            <a:ext cx="11064240" cy="4937760"/>
+          </a:xfrm>
+          <a:prstGeom prst="rect">
+            <a:avLst/>
+          </a:prstGeom>
+          <a:noFill/>
+        </p:spPr>
+        <p:txBody>
+          <a:bodyPr wrap="square">
+            <a:noAutofit/>
+          </a:bodyPr>
+          <a:lstStyle/>
+          <a:p>
+            <a:pPr>
+              <a:lnSpc>
+                <a:spcPts val="2200"/>
+              </a:lnSpc>
+              <a:spcAft>
+                <a:spcPts val="1000"/>
+              </a:spcAft>
+              <a:defRPr sz="2000" b="0">
+                <a:solidFill>
+                  <a:srgbClr val="333333"/>
+                </a:solidFill>
+                <a:latin typeface="Calibri"/>
+              </a:defRPr>
+            </a:pPr>
+            <a:r>
+              <a:t>• Port Type Mismatch</a:t>
+            </a:r>
+          </a:p>
+          <a:p>
+            <a:pPr>
+              <a:lnSpc>
+                <a:spcPts val="2200"/>
+              </a:lnSpc>
+              <a:spcAft>
+                <a:spcPts val="1000"/>
+              </a:spcAft>
+              <a:defRPr sz="2000" b="0">
+                <a:solidFill>
+                  <a:srgbClr val="333333"/>
+                </a:solidFill>
+                <a:latin typeface="Calibri"/>
+              </a:defRPr>
+            </a:pPr>
+            <a:r>
+              <a:t>• Simulation Never Ends</a:t>
+            </a:r>
+          </a:p>
+          <a:p>
+            <a:pPr>
+              <a:lnSpc>
+                <a:spcPts val="2200"/>
+              </a:lnSpc>
+              <a:spcAft>
+                <a:spcPts val="1000"/>
+              </a:spcAft>
+              <a:defRPr sz="2000" b="0">
+                <a:solidFill>
+                  <a:srgbClr val="333333"/>
+                </a:solidFill>
+                <a:latin typeface="Calibri"/>
+              </a:defRPr>
+            </a:pPr>
+            <a:r>
+              <a:t>• Using 2001/SystemVerilog Constructs in 1995</a:t>
+            </a:r>
+          </a:p>
+          <a:p>
+            <a:pPr>
+              <a:lnSpc>
+                <a:spcPts val="2200"/>
+              </a:lnSpc>
+              <a:spcAft>
+                <a:spcPts val="1000"/>
+              </a:spcAft>
+              <a:defRPr sz="2000" b="0">
+                <a:solidFill>
+                  <a:srgbClr val="333333"/>
+                </a:solidFill>
+                <a:latin typeface="Calibri"/>
+              </a:defRPr>
+            </a:pPr>
+            <a:r>
+              <a:t>• Confusing reg with Registers</a:t>
+            </a:r>
+          </a:p>
+        </p:txBody>
+      </p:sp>
+      <p:sp>
+        <p:nvSpPr>
+          <p:cNvPr id="4" name="TextBox 3"/>
+          <p:cNvSpPr txBox="1"/>
+          <p:nvPr/>
+        </p:nvSpPr>
+        <p:spPr>
+          <a:xfrm>
+            <a:off x="548640" y="6355080"/>
+            <a:ext cx="11064240" cy="320040"/>
+          </a:xfrm>
+          <a:prstGeom prst="rect">
+            <a:avLst/>
+          </a:prstGeom>
+          <a:noFill/>
+        </p:spPr>
+        <p:txBody>
+          <a:bodyPr wrap="square">
+            <a:noAutofit/>
+          </a:bodyPr>
+          <a:lstStyle/>
+          <a:p>
+            <a:pPr algn="r">
+              <a:lnSpc>
+                <a:spcPts val="2200"/>
+              </a:lnSpc>
+              <a:defRPr sz="1000" b="0">
+                <a:solidFill>
+                  <a:srgbClr val="666666"/>
+                </a:solidFill>
+                <a:latin typeface="Calibri"/>
+              </a:defRPr>
+            </a:pPr>
+            <a:r>
+              <a:t>learn_verilog_systemverilog / Module 1</a:t>
+            </a:r>
+          </a:p>
+        </p:txBody>
+      </p:sp>
+    </p:spTree>
+  </p:cSld>
+  <p:clrMapOvr>
+    <a:masterClrMapping/>
+  </p:clrMapOvr>
+</p:sld>
+</file>
+
+<file path=ppt/slides/slide52.xml><?xml version="1.0" encoding="utf-8"?>
+<p:sld xmlns:a="http://schemas.openxmlformats.org/drawingml/2006/main" xmlns:p="http://schemas.openxmlformats.org/presentationml/2006/main" xmlns:r="http://schemas.openxmlformats.org/officeDocument/2006/relationships">
+  <p:cSld>
+    <p:spTree>
+      <p:nvGrpSpPr>
+        <p:cNvPr id="1" name=""/>
+        <p:cNvGrpSpPr/>
+        <p:nvPr/>
+      </p:nvGrpSpPr>
+      <p:grpSpPr/>
+      <p:sp>
+        <p:nvSpPr>
+          <p:cNvPr id="2" name="TextBox 1"/>
+          <p:cNvSpPr txBox="1"/>
+          <p:nvPr/>
+        </p:nvSpPr>
+        <p:spPr>
+          <a:xfrm>
+            <a:off x="548640" y="411480"/>
+            <a:ext cx="11064240" cy="777240"/>
+          </a:xfrm>
+          <a:prstGeom prst="rect">
+            <a:avLst/>
+          </a:prstGeom>
+          <a:noFill/>
+        </p:spPr>
+        <p:txBody>
+          <a:bodyPr wrap="square">
+            <a:noAutofit/>
+          </a:bodyPr>
+          <a:lstStyle/>
+          <a:p>
+            <a:pPr>
+              <a:lnSpc>
+                <a:spcPts val="2200"/>
+              </a:lnSpc>
+              <a:defRPr sz="2800" b="1">
+                <a:solidFill>
+                  <a:srgbClr val="1A1A2E"/>
+                </a:solidFill>
+                <a:latin typeface="Calibri"/>
+              </a:defRPr>
+            </a:pPr>
+            <a:r>
+              <a:t>Summary &amp; next steps</a:t>
+            </a:r>
+          </a:p>
+        </p:txBody>
+      </p:sp>
+      <p:sp>
+        <p:nvSpPr>
+          <p:cNvPr id="3" name="TextBox 2"/>
+          <p:cNvSpPr txBox="1"/>
+          <p:nvPr/>
+        </p:nvSpPr>
+        <p:spPr>
+          <a:xfrm>
+            <a:off x="548640" y="1234440"/>
+            <a:ext cx="11064240" cy="4937760"/>
+          </a:xfrm>
+          <a:prstGeom prst="rect">
+            <a:avLst/>
+          </a:prstGeom>
+          <a:noFill/>
+        </p:spPr>
+        <p:txBody>
+          <a:bodyPr wrap="square">
+            <a:noAutofit/>
+          </a:bodyPr>
+          <a:lstStyle/>
+          <a:p>
+            <a:pPr>
+              <a:lnSpc>
+                <a:spcPts val="2200"/>
+              </a:lnSpc>
+              <a:spcAft>
+                <a:spcPts val="1000"/>
+              </a:spcAft>
+              <a:defRPr sz="2000" b="0">
+                <a:solidFill>
+                  <a:srgbClr val="333333"/>
+                </a:solidFill>
+                <a:latin typeface="Calibri"/>
+              </a:defRPr>
+            </a:pPr>
+            <a:r>
+              <a:t>• Master the first standardized Verilog language (IEEE</a:t>
+            </a:r>
+          </a:p>
+          <a:p>
+            <a:pPr>
+              <a:lnSpc>
+                <a:spcPts val="2200"/>
+              </a:lnSpc>
+              <a:spcAft>
+                <a:spcPts val="1000"/>
+              </a:spcAft>
+              <a:defRPr sz="2000" b="0">
+                <a:solidFill>
+                  <a:srgbClr val="333333"/>
+                </a:solidFill>
+                <a:latin typeface="Calibri"/>
+              </a:defRPr>
+            </a:pPr>
+            <a:r>
+              <a:t>      1364-1995) and its core syntax for RTL design…</a:t>
+            </a:r>
+          </a:p>
+          <a:p>
+            <a:pPr>
+              <a:lnSpc>
+                <a:spcPts val="2200"/>
+              </a:lnSpc>
+              <a:spcAft>
+                <a:spcPts val="1000"/>
+              </a:spcAft>
+              <a:defRPr sz="2000" b="0">
+                <a:solidFill>
+                  <a:srgbClr val="333333"/>
+                </a:solidFill>
+                <a:latin typeface="Calibri"/>
+              </a:defRPr>
+            </a:pPr>
+            <a:r>
+              <a:t>• Complete module1/CHECKLIST.md</a:t>
+            </a:r>
+          </a:p>
+          <a:p>
+            <a:pPr>
+              <a:lnSpc>
+                <a:spcPts val="2200"/>
+              </a:lnSpc>
+              <a:spcAft>
+                <a:spcPts val="1000"/>
+              </a:spcAft>
+              <a:defRPr sz="2000" b="0">
+                <a:solidFill>
+                  <a:srgbClr val="333333"/>
+                </a:solidFill>
+                <a:latin typeface="Calibri"/>
+              </a:defRPr>
+            </a:pPr>
+            <a:r>
+              <a:t>• Review module1/EXAMPLES.md and run each lab</a:t>
+            </a:r>
+          </a:p>
+          <a:p>
+            <a:pPr>
+              <a:lnSpc>
+                <a:spcPts val="2200"/>
+              </a:lnSpc>
+              <a:spcAft>
+                <a:spcPts val="1000"/>
+              </a:spcAft>
+              <a:defRPr sz="2000" b="0">
+                <a:solidFill>
+                  <a:srgbClr val="333333"/>
+                </a:solidFill>
+                <a:latin typeface="Calibri"/>
+              </a:defRPr>
+            </a:pPr>
+            <a:r>
+              <a:t>• Next: Next module in course</a:t>
             </a:r>
           </a:p>
         </p:txBody>
@@ -10002,7 +15444,7 @@
               </a:defRPr>
             </a:pPr>
             <a:r>
-              <a:t>Syllabus topics</a:t>
+              <a:t>How to learn this module</a:t>
             </a:r>
           </a:p>
         </p:txBody>
@@ -10098,7 +15540,7 @@
               </a:defRPr>
             </a:pPr>
             <a:r>
-              <a:t>1. IEEE 1364-1995 Context (1/3)</a:t>
+              <a:t>Suggested learning path (1/2)</a:t>
             </a:r>
           </a:p>
         </p:txBody>
@@ -10140,178 +15582,197 @@
               </a:defRPr>
             </a:pPr>
             <a:r>
-              <a:t>• Modules and hierarchy: Module declaration, port</a:t>
-            </a:r>
-          </a:p>
-          <a:p>
-            <a:pPr>
-              <a:lnSpc>
-                <a:spcPts val="2200"/>
-              </a:lnSpc>
-              <a:spcAft>
-                <a:spcPts val="1000"/>
-              </a:spcAft>
-              <a:defRPr sz="2000" b="0">
-                <a:solidFill>
-                  <a:srgbClr val="333333"/>
-                </a:solidFill>
-                <a:latin typeface="Calibri"/>
-              </a:defRPr>
-            </a:pPr>
-            <a:r>
-              <a:t>      list, instantiation</a:t>
-            </a:r>
-          </a:p>
-          <a:p>
-            <a:pPr>
-              <a:lnSpc>
-                <a:spcPts val="2200"/>
-              </a:lnSpc>
-              <a:spcAft>
-                <a:spcPts val="1000"/>
-              </a:spcAft>
-              <a:defRPr sz="2000" b="0">
-                <a:solidFill>
-                  <a:srgbClr val="333333"/>
-                </a:solidFill>
-                <a:latin typeface="Calibri"/>
-              </a:defRPr>
-            </a:pPr>
-            <a:r>
-              <a:t>• Nets: `wire` (and `wand`, `wor`, `tri`; rarely used</a:t>
-            </a:r>
-          </a:p>
-          <a:p>
-            <a:pPr>
-              <a:lnSpc>
-                <a:spcPts val="2200"/>
-              </a:lnSpc>
-              <a:spcAft>
-                <a:spcPts val="1000"/>
-              </a:spcAft>
-              <a:defRPr sz="2000" b="0">
-                <a:solidFill>
-                  <a:srgbClr val="333333"/>
-                </a:solidFill>
-                <a:latin typeface="Calibri"/>
-              </a:defRPr>
-            </a:pPr>
-            <a:r>
-              <a:t>      in RTL)</a:t>
-            </a:r>
-          </a:p>
-          <a:p>
-            <a:pPr>
-              <a:lnSpc>
-                <a:spcPts val="2200"/>
-              </a:lnSpc>
-              <a:spcAft>
-                <a:spcPts val="1000"/>
-              </a:spcAft>
-              <a:defRPr sz="2000" b="0">
-                <a:solidFill>
-                  <a:srgbClr val="333333"/>
-                </a:solidFill>
-                <a:latin typeface="Calibri"/>
-              </a:defRPr>
-            </a:pPr>
-            <a:r>
-              <a:t>• Variables: `reg` for procedural assignment outputs</a:t>
-            </a:r>
-          </a:p>
-          <a:p>
-            <a:pPr>
-              <a:lnSpc>
-                <a:spcPts val="2200"/>
-              </a:lnSpc>
-              <a:spcAft>
-                <a:spcPts val="1000"/>
-              </a:spcAft>
-              <a:defRPr sz="2000" b="0">
-                <a:solidFill>
-                  <a:srgbClr val="333333"/>
-                </a:solidFill>
-                <a:latin typeface="Calibri"/>
-              </a:defRPr>
-            </a:pPr>
-            <a:r>
-              <a:t>• Continuous assignment: `assign` for combinational</a:t>
-            </a:r>
-          </a:p>
-          <a:p>
-            <a:pPr>
-              <a:lnSpc>
-                <a:spcPts val="2200"/>
-              </a:lnSpc>
-              <a:spcAft>
-                <a:spcPts val="1000"/>
-              </a:spcAft>
-              <a:defRPr sz="2000" b="0">
-                <a:solidFill>
-                  <a:srgbClr val="333333"/>
-                </a:solidFill>
-                <a:latin typeface="Calibri"/>
-              </a:defRPr>
-            </a:pPr>
-            <a:r>
-              <a:t>      logic</a:t>
-            </a:r>
-          </a:p>
-          <a:p>
-            <a:pPr>
-              <a:lnSpc>
-                <a:spcPts val="2200"/>
-              </a:lnSpc>
-              <a:spcAft>
-                <a:spcPts val="1000"/>
-              </a:spcAft>
-              <a:defRPr sz="2000" b="0">
-                <a:solidFill>
-                  <a:srgbClr val="333333"/>
-                </a:solidFill>
-                <a:latin typeface="Calibri"/>
-              </a:defRPr>
-            </a:pPr>
-            <a:r>
-              <a:t>• Procedural blocks: `always`, `initial` with explicit</a:t>
-            </a:r>
-          </a:p>
-          <a:p>
-            <a:pPr>
-              <a:lnSpc>
-                <a:spcPts val="2200"/>
-              </a:lnSpc>
-              <a:spcAft>
-                <a:spcPts val="1000"/>
-              </a:spcAft>
-              <a:defRPr sz="2000" b="0">
-                <a:solidFill>
-                  <a:srgbClr val="333333"/>
-                </a:solidFill>
-                <a:latin typeface="Calibri"/>
-              </a:defRPr>
-            </a:pPr>
-            <a:r>
-              <a:t>      sensitivity lists</a:t>
-            </a:r>
-          </a:p>
-          <a:p>
-            <a:pPr>
-              <a:lnSpc>
-                <a:spcPts val="2200"/>
-              </a:lnSpc>
-              <a:spcAft>
-                <a:spcPts val="1000"/>
-              </a:spcAft>
-              <a:defRPr sz="2000" b="0">
-                <a:solidFill>
-                  <a:srgbClr val="333333"/>
-                </a:solidFill>
-                <a:latin typeface="Calibri"/>
-              </a:defRPr>
-            </a:pPr>
-            <a:r>
-              <a:t>• Delays and timing: `#`, `@`, `wait`</a:t>
+              <a:t>• Skim this document — Goal, Overview, and Topics</a:t>
+            </a:r>
+          </a:p>
+          <a:p>
+            <a:pPr>
+              <a:lnSpc>
+                <a:spcPts val="2200"/>
+              </a:lnSpc>
+              <a:spcAft>
+                <a:spcPts val="1000"/>
+              </a:spcAft>
+              <a:defRPr sz="2000" b="0">
+                <a:solidFill>
+                  <a:srgbClr val="333333"/>
+                </a:solidFill>
+                <a:latin typeface="Calibri"/>
+              </a:defRPr>
+            </a:pPr>
+            <a:r>
+              <a:t>      Covered set the IEEE scope for Module 1.</a:t>
+            </a:r>
+          </a:p>
+          <a:p>
+            <a:pPr>
+              <a:lnSpc>
+                <a:spcPts val="2200"/>
+              </a:lnSpc>
+              <a:spcAft>
+                <a:spcPts val="1000"/>
+              </a:spcAft>
+              <a:defRPr sz="2000" b="0">
+                <a:solidFill>
+                  <a:srgbClr val="333333"/>
+                </a:solidFill>
+                <a:latin typeface="Calibri"/>
+              </a:defRPr>
+            </a:pPr>
+            <a:r>
+              <a:t>• Study design architecture — See how DUTs, examples,</a:t>
+            </a:r>
+          </a:p>
+          <a:p>
+            <a:pPr>
+              <a:lnSpc>
+                <a:spcPts val="2200"/>
+              </a:lnSpc>
+              <a:spcAft>
+                <a:spcPts val="1000"/>
+              </a:spcAft>
+              <a:defRPr sz="2000" b="0">
+                <a:solidFill>
+                  <a:srgbClr val="333333"/>
+                </a:solidFill>
+                <a:latin typeface="Calibri"/>
+              </a:defRPr>
+            </a:pPr>
+            <a:r>
+              <a:t>      and testbenches fit together under `module1/`.</a:t>
+            </a:r>
+          </a:p>
+          <a:p>
+            <a:pPr>
+              <a:lnSpc>
+                <a:spcPts val="2200"/>
+              </a:lnSpc>
+              <a:spcAft>
+                <a:spcPts val="1000"/>
+              </a:spcAft>
+              <a:defRPr sz="2000" b="0">
+                <a:solidFill>
+                  <a:srgbClr val="333333"/>
+                </a:solidFill>
+                <a:latin typeface="Calibri"/>
+              </a:defRPr>
+            </a:pPr>
+            <a:r>
+              <a:t>• Work through labs in order — Open</a:t>
+            </a:r>
+          </a:p>
+          <a:p>
+            <a:pPr>
+              <a:lnSpc>
+                <a:spcPts val="2200"/>
+              </a:lnSpc>
+              <a:spcAft>
+                <a:spcPts val="1000"/>
+              </a:spcAft>
+              <a:defRPr sz="2000" b="0">
+                <a:solidFill>
+                  <a:srgbClr val="333333"/>
+                </a:solidFill>
+                <a:latin typeface="Calibri"/>
+              </a:defRPr>
+            </a:pPr>
+            <a:r>
+              <a:t>      `module1/EXAMPLES.md` and run each `make clean &amp;&amp;</a:t>
+            </a:r>
+          </a:p>
+          <a:p>
+            <a:pPr>
+              <a:lnSpc>
+                <a:spcPts val="2200"/>
+              </a:lnSpc>
+              <a:spcAft>
+                <a:spcPts val="1000"/>
+              </a:spcAft>
+              <a:defRPr sz="2000" b="0">
+                <a:solidFill>
+                  <a:srgbClr val="333333"/>
+                </a:solidFill>
+                <a:latin typeface="Calibri"/>
+              </a:defRPr>
+            </a:pPr>
+            <a:r>
+              <a:t>      make run` from…</a:t>
+            </a:r>
+          </a:p>
+          <a:p>
+            <a:pPr>
+              <a:lnSpc>
+                <a:spcPts val="2200"/>
+              </a:lnSpc>
+              <a:spcAft>
+                <a:spcPts val="1000"/>
+              </a:spcAft>
+              <a:defRPr sz="2000" b="0">
+                <a:solidFill>
+                  <a:srgbClr val="333333"/>
+                </a:solidFill>
+                <a:latin typeface="Calibri"/>
+              </a:defRPr>
+            </a:pPr>
+            <a:r>
+              <a:t>• Run the full module script — `./scripts/module1.sh`</a:t>
+            </a:r>
+          </a:p>
+          <a:p>
+            <a:pPr>
+              <a:lnSpc>
+                <a:spcPts val="2200"/>
+              </a:lnSpc>
+              <a:spcAft>
+                <a:spcPts val="1000"/>
+              </a:spcAft>
+              <a:defRPr sz="2000" b="0">
+                <a:solidFill>
+                  <a:srgbClr val="333333"/>
+                </a:solidFill>
+                <a:latin typeface="Calibri"/>
+              </a:defRPr>
+            </a:pPr>
+            <a:r>
+              <a:t>      from the repo root to simulate all examples and…</a:t>
+            </a:r>
+          </a:p>
+          <a:p>
+            <a:pPr>
+              <a:lnSpc>
+                <a:spcPts val="2200"/>
+              </a:lnSpc>
+              <a:spcAft>
+                <a:spcPts val="1000"/>
+              </a:spcAft>
+              <a:defRPr sz="2000" b="0">
+                <a:solidFill>
+                  <a:srgbClr val="333333"/>
+                </a:solidFill>
+                <a:latin typeface="Calibri"/>
+              </a:defRPr>
+            </a:pPr>
+            <a:r>
+              <a:t>• Complete the exercises — Try each exercise in this</a:t>
+            </a:r>
+          </a:p>
+          <a:p>
+            <a:pPr>
+              <a:lnSpc>
+                <a:spcPts val="2200"/>
+              </a:lnSpc>
+              <a:spcAft>
+                <a:spcPts val="1000"/>
+              </a:spcAft>
+              <a:defRPr sz="2000" b="0">
+                <a:solidFill>
+                  <a:srgbClr val="333333"/>
+                </a:solidFill>
+                <a:latin typeface="Calibri"/>
+              </a:defRPr>
+            </a:pPr>
+            <a:r>
+              <a:t>      document before reading solutions or peeking at…</a:t>
             </a:r>
           </a:p>
         </p:txBody>
@@ -10407,7 +15868,7 @@
               </a:defRPr>
             </a:pPr>
             <a:r>
-              <a:t>1. IEEE 1364-1995 Context (2/3)</a:t>
+              <a:t>Suggested learning path (2/2)</a:t>
             </a:r>
           </a:p>
         </p:txBody>
@@ -10449,159 +15910,64 @@
               </a:defRPr>
             </a:pPr>
             <a:r>
-              <a:t>• Tasks and functions: Non-ANSI style (declarations</a:t>
-            </a:r>
-          </a:p>
-          <a:p>
-            <a:pPr>
-              <a:lnSpc>
-                <a:spcPts val="2200"/>
-              </a:lnSpc>
-              <a:spcAft>
-                <a:spcPts val="1000"/>
-              </a:spcAft>
-              <a:defRPr sz="2000" b="0">
-                <a:solidFill>
-                  <a:srgbClr val="333333"/>
-                </a:solidFill>
-                <a:latin typeface="Calibri"/>
-              </a:defRPr>
-            </a:pPr>
-            <a:r>
-              <a:t>      separate from port list)</a:t>
-            </a:r>
-          </a:p>
-          <a:p>
-            <a:pPr>
-              <a:lnSpc>
-                <a:spcPts val="2200"/>
-              </a:lnSpc>
-              <a:spcAft>
-                <a:spcPts val="1000"/>
-              </a:spcAft>
-              <a:defRPr sz="2000" b="0">
-                <a:solidFill>
-                  <a:srgbClr val="333333"/>
-                </a:solidFill>
-                <a:latin typeface="Calibri"/>
-              </a:defRPr>
-            </a:pPr>
-            <a:r>
-              <a:t>• System tasks: `$display`, `$monitor`, `$finish`,</a:t>
-            </a:r>
-          </a:p>
-          <a:p>
-            <a:pPr>
-              <a:lnSpc>
-                <a:spcPts val="2200"/>
-              </a:lnSpc>
-              <a:spcAft>
-                <a:spcPts val="1000"/>
-              </a:spcAft>
-              <a:defRPr sz="2000" b="0">
-                <a:solidFill>
-                  <a:srgbClr val="333333"/>
-                </a:solidFill>
-                <a:latin typeface="Calibri"/>
-              </a:defRPr>
-            </a:pPr>
-            <a:r>
-              <a:t>      `$stop`, `$time`</a:t>
-            </a:r>
-          </a:p>
-          <a:p>
-            <a:pPr>
-              <a:lnSpc>
-                <a:spcPts val="2200"/>
-              </a:lnSpc>
-              <a:spcAft>
-                <a:spcPts val="1000"/>
-              </a:spcAft>
-              <a:defRPr sz="2000" b="0">
-                <a:solidFill>
-                  <a:srgbClr val="333333"/>
-                </a:solidFill>
-                <a:latin typeface="Calibri"/>
-              </a:defRPr>
-            </a:pPr>
-            <a:r>
-              <a:t>• No ANSI-style port declarations (added in 1364-2001)</a:t>
-            </a:r>
-          </a:p>
-          <a:p>
-            <a:pPr>
-              <a:lnSpc>
-                <a:spcPts val="2200"/>
-              </a:lnSpc>
-              <a:spcAft>
-                <a:spcPts val="1000"/>
-              </a:spcAft>
-              <a:defRPr sz="2000" b="0">
-                <a:solidFill>
-                  <a:srgbClr val="333333"/>
-                </a:solidFill>
-                <a:latin typeface="Calibri"/>
-              </a:defRPr>
-            </a:pPr>
-            <a:r>
-              <a:t>• No **`always @*`** (added in 1364-2001)</a:t>
-            </a:r>
-          </a:p>
-          <a:p>
-            <a:pPr>
-              <a:lnSpc>
-                <a:spcPts val="2200"/>
-              </a:lnSpc>
-              <a:spcAft>
-                <a:spcPts val="1000"/>
-              </a:spcAft>
-              <a:defRPr sz="2000" b="0">
-                <a:solidFill>
-                  <a:srgbClr val="333333"/>
-                </a:solidFill>
-                <a:latin typeface="Calibri"/>
-              </a:defRPr>
-            </a:pPr>
-            <a:r>
-              <a:t>• No generate (added in 1364-2001)</a:t>
-            </a:r>
-          </a:p>
-          <a:p>
-            <a:pPr>
-              <a:lnSpc>
-                <a:spcPts val="2200"/>
-              </a:lnSpc>
-              <a:spcAft>
-                <a:spcPts val="1000"/>
-              </a:spcAft>
-              <a:defRPr sz="2000" b="0">
-                <a:solidFill>
-                  <a:srgbClr val="333333"/>
-                </a:solidFill>
-                <a:latin typeface="Calibri"/>
-              </a:defRPr>
-            </a:pPr>
-            <a:r>
-              <a:t>• No signed keyword, no multi-dimensional arrays</a:t>
-            </a:r>
-          </a:p>
-          <a:p>
-            <a:pPr>
-              <a:lnSpc>
-                <a:spcPts val="2200"/>
-              </a:lnSpc>
-              <a:spcAft>
-                <a:spcPts val="1000"/>
-              </a:spcAft>
-              <a:defRPr sz="2000" b="0">
-                <a:solidFill>
-                  <a:srgbClr val="333333"/>
-                </a:solidFill>
-                <a:latin typeface="Calibri"/>
-              </a:defRPr>
-            </a:pPr>
-            <a:r>
-              <a:t>      (1364-2001)</a:t>
+              <a:t>• Review Common Pitfalls — Can you explain each</a:t>
+            </a:r>
+          </a:p>
+          <a:p>
+            <a:pPr>
+              <a:lnSpc>
+                <a:spcPts val="2200"/>
+              </a:lnSpc>
+              <a:spcAft>
+                <a:spcPts val="1000"/>
+              </a:spcAft>
+              <a:defRPr sz="2000" b="0">
+                <a:solidFill>
+                  <a:srgbClr val="333333"/>
+                </a:solidFill>
+                <a:latin typeface="Calibri"/>
+              </a:defRPr>
+            </a:pPr>
+            <a:r>
+              <a:t>      mistake and the fix?</a:t>
+            </a:r>
+          </a:p>
+          <a:p>
+            <a:pPr>
+              <a:lnSpc>
+                <a:spcPts val="2200"/>
+              </a:lnSpc>
+              <a:spcAft>
+                <a:spcPts val="1000"/>
+              </a:spcAft>
+              <a:defRPr sz="2000" b="0">
+                <a:solidFill>
+                  <a:srgbClr val="333333"/>
+                </a:solidFill>
+                <a:latin typeface="Calibri"/>
+              </a:defRPr>
+            </a:pPr>
+            <a:r>
+              <a:t>• Self-check — Use `module1/CHECKLIST.md` before</a:t>
+            </a:r>
+          </a:p>
+          <a:p>
+            <a:pPr>
+              <a:lnSpc>
+                <a:spcPts val="2200"/>
+              </a:lnSpc>
+              <a:spcAft>
+                <a:spcPts val="1000"/>
+              </a:spcAft>
+              <a:defRPr sz="2000" b="0">
+                <a:solidFill>
+                  <a:srgbClr val="333333"/>
+                </a:solidFill>
+                <a:latin typeface="Calibri"/>
+              </a:defRPr>
+            </a:pPr>
+            <a:r>
+              <a:t>      starting the next module.</a:t>
             </a:r>
           </a:p>
         </p:txBody>
@@ -10671,8 +16037,8 @@
         </p:nvSpPr>
         <p:spPr>
           <a:xfrm>
-            <a:off x="548640" y="411480"/>
-            <a:ext cx="11064240" cy="777240"/>
+            <a:off x="548640" y="2743200"/>
+            <a:ext cx="11064240" cy="1371600"/>
           </a:xfrm>
           <a:prstGeom prst="rect">
             <a:avLst/>
@@ -10685,11 +16051,11 @@
           </a:bodyPr>
           <a:lstStyle/>
           <a:p>
-            <a:pPr>
-              <a:lnSpc>
-                <a:spcPts val="2200"/>
-              </a:lnSpc>
-              <a:defRPr sz="2800" b="1">
+            <a:pPr algn="ctr">
+              <a:lnSpc>
+                <a:spcPts val="2200"/>
+              </a:lnSpc>
+              <a:defRPr sz="3600" b="1">
                 <a:solidFill>
                   <a:srgbClr val="1A1A2E"/>
                 </a:solidFill>
@@ -10697,7 +16063,7 @@
               </a:defRPr>
             </a:pPr>
             <a:r>
-              <a:t>1. IEEE 1364-1995 Context (3/3)</a:t>
+              <a:t>Syllabus topics</a:t>
             </a:r>
           </a:p>
         </p:txBody>
@@ -10705,67 +16071,6 @@
       <p:sp>
         <p:nvSpPr>
           <p:cNvPr id="3" name="TextBox 2"/>
-          <p:cNvSpPr txBox="1"/>
-          <p:nvPr/>
-        </p:nvSpPr>
-        <p:spPr>
-          <a:xfrm>
-            <a:off x="548640" y="1234440"/>
-            <a:ext cx="11064240" cy="4937760"/>
-          </a:xfrm>
-          <a:prstGeom prst="rect">
-            <a:avLst/>
-          </a:prstGeom>
-          <a:noFill/>
-        </p:spPr>
-        <p:txBody>
-          <a:bodyPr wrap="square">
-            <a:noAutofit/>
-          </a:bodyPr>
-          <a:lstStyle/>
-          <a:p>
-            <a:pPr>
-              <a:lnSpc>
-                <a:spcPts val="2200"/>
-              </a:lnSpc>
-              <a:spcAft>
-                <a:spcPts val="1000"/>
-              </a:spcAft>
-              <a:defRPr sz="2000" b="0">
-                <a:solidFill>
-                  <a:srgbClr val="333333"/>
-                </a:solidFill>
-                <a:latin typeface="Calibri"/>
-              </a:defRPr>
-            </a:pPr>
-            <a:r>
-              <a:t>• No SystemVerilog: no `logic`, `always_comb`,</a:t>
-            </a:r>
-          </a:p>
-          <a:p>
-            <a:pPr>
-              <a:lnSpc>
-                <a:spcPts val="2200"/>
-              </a:lnSpc>
-              <a:spcAft>
-                <a:spcPts val="1000"/>
-              </a:spcAft>
-              <a:defRPr sz="2000" b="0">
-                <a:solidFill>
-                  <a:srgbClr val="333333"/>
-                </a:solidFill>
-                <a:latin typeface="Calibri"/>
-              </a:defRPr>
-            </a:pPr>
-            <a:r>
-              <a:t>      `always_ff`, interfaces, packages</a:t>
-            </a:r>
-          </a:p>
-        </p:txBody>
-      </p:sp>
-      <p:sp>
-        <p:nvSpPr>
-          <p:cNvPr id="4" name="TextBox 3"/>
           <p:cNvSpPr txBox="1"/>
           <p:nvPr/>
         </p:nvSpPr>
